--- a/labs/lab10/slides/slides.pptx
+++ b/labs/lab10/slides/slides.pptx
@@ -4,6 +4,9 @@
   <p:sldMasterIdLst>
     <p:sldMasterId id="2147483696" r:id="rId1"/>
   </p:sldMasterIdLst>
+  <p:notesMasterIdLst>
+    <p:notesMasterId r:id="rId18"/>
+  </p:notesMasterIdLst>
   <p:sldIdLst>
     <p:sldId id="256" r:id="rId2"/>
     <p:sldId id="257" r:id="rId3"/>
@@ -21,16 +24,6 @@
     <p:sldId id="269" r:id="rId15"/>
     <p:sldId id="270" r:id="rId16"/>
     <p:sldId id="271" r:id="rId17"/>
-    <p:sldId id="272" r:id="rId18"/>
-    <p:sldId id="273" r:id="rId19"/>
-    <p:sldId id="274" r:id="rId20"/>
-    <p:sldId id="275" r:id="rId21"/>
-    <p:sldId id="276" r:id="rId22"/>
-    <p:sldId id="277" r:id="rId23"/>
-    <p:sldId id="278" r:id="rId24"/>
-    <p:sldId id="279" r:id="rId25"/>
-    <p:sldId id="280" r:id="rId26"/>
-    <p:sldId id="281" r:id="rId27"/>
   </p:sldIdLst>
   <p:sldSz cx="12192000" cy="6858000"/>
   <p:notesSz cx="6858000" cy="9144000"/>
@@ -137,6 +130,1585 @@
 </p:presentation>
 </file>
 
+<file path=ppt/notesMasters/notesMaster1.xml><?xml version="1.0" encoding="utf-8"?>
+<p:notesMaster xmlns:a="http://schemas.openxmlformats.org/drawingml/2006/main" xmlns:r="http://schemas.openxmlformats.org/officeDocument/2006/relationships" xmlns:p="http://schemas.openxmlformats.org/presentationml/2006/main">
+  <p:cSld>
+    <p:bg>
+      <p:bgRef idx="1001">
+        <a:schemeClr val="bg1"/>
+      </p:bgRef>
+    </p:bg>
+    <p:spTree>
+      <p:nvGrpSpPr>
+        <p:cNvPr id="1" name=""/>
+        <p:cNvGrpSpPr/>
+        <p:nvPr/>
+      </p:nvGrpSpPr>
+      <p:grpSpPr>
+        <a:xfrm>
+          <a:off x="0" y="0"/>
+          <a:ext cx="0" cy="0"/>
+          <a:chOff x="0" y="0"/>
+          <a:chExt cx="0" cy="0"/>
+        </a:xfrm>
+      </p:grpSpPr>
+      <p:sp>
+        <p:nvSpPr>
+          <p:cNvPr id="2" name="Header Placeholder 1"/>
+          <p:cNvSpPr>
+            <a:spLocks noGrp="1"/>
+          </p:cNvSpPr>
+          <p:nvPr>
+            <p:ph type="hdr" sz="quarter"/>
+          </p:nvPr>
+        </p:nvSpPr>
+        <p:spPr>
+          <a:xfrm>
+            <a:off x="0" y="0"/>
+            <a:ext cx="2971800" cy="458788"/>
+          </a:xfrm>
+          <a:prstGeom prst="rect">
+            <a:avLst/>
+          </a:prstGeom>
+        </p:spPr>
+        <p:txBody>
+          <a:bodyPr vert="horz" lIns="91440" tIns="45720" rIns="91440" bIns="45720" rtlCol="0"/>
+          <a:lstStyle>
+            <a:lvl1pPr algn="l">
+              <a:defRPr sz="1200"/>
+            </a:lvl1pPr>
+          </a:lstStyle>
+          <a:p>
+            <a:endParaRPr lang="en-US"/>
+          </a:p>
+        </p:txBody>
+      </p:sp>
+      <p:sp>
+        <p:nvSpPr>
+          <p:cNvPr id="3" name="Date Placeholder 2"/>
+          <p:cNvSpPr>
+            <a:spLocks noGrp="1"/>
+          </p:cNvSpPr>
+          <p:nvPr>
+            <p:ph type="dt" idx="1"/>
+          </p:nvPr>
+        </p:nvSpPr>
+        <p:spPr>
+          <a:xfrm>
+            <a:off x="3884613" y="0"/>
+            <a:ext cx="2971800" cy="458788"/>
+          </a:xfrm>
+          <a:prstGeom prst="rect">
+            <a:avLst/>
+          </a:prstGeom>
+        </p:spPr>
+        <p:txBody>
+          <a:bodyPr vert="horz" lIns="91440" tIns="45720" rIns="91440" bIns="45720" rtlCol="0"/>
+          <a:lstStyle>
+            <a:lvl1pPr algn="r">
+              <a:defRPr sz="1200"/>
+            </a:lvl1pPr>
+          </a:lstStyle>
+          <a:p>
+            <a:fld id="{0F9C1CCF-B725-44A7-AA57-5E433BD85C9F}" type="datetimeFigureOut">
+              <a:rPr lang="en-US" smtClean="0"/>
+              <a:t>1/2/22</a:t>
+            </a:fld>
+            <a:endParaRPr lang="en-US"/>
+          </a:p>
+        </p:txBody>
+      </p:sp>
+      <p:sp>
+        <p:nvSpPr>
+          <p:cNvPr id="4" name="Slide Image Placeholder 3"/>
+          <p:cNvSpPr>
+            <a:spLocks noGrp="1" noRot="1" noChangeAspect="1"/>
+          </p:cNvSpPr>
+          <p:nvPr>
+            <p:ph type="sldImg" idx="2"/>
+          </p:nvPr>
+        </p:nvSpPr>
+        <p:spPr>
+          <a:xfrm>
+            <a:off x="685800" y="1143000"/>
+            <a:ext cx="5486400" cy="3086100"/>
+          </a:xfrm>
+          <a:prstGeom prst="rect">
+            <a:avLst/>
+          </a:prstGeom>
+          <a:noFill/>
+          <a:ln w="12700">
+            <a:solidFill>
+              <a:prstClr val="black"/>
+            </a:solidFill>
+          </a:ln>
+        </p:spPr>
+        <p:txBody>
+          <a:bodyPr vert="horz" lIns="91440" tIns="45720" rIns="91440" bIns="45720" rtlCol="0" anchor="ctr"/>
+          <a:lstStyle/>
+          <a:p>
+            <a:endParaRPr lang="en-US"/>
+          </a:p>
+        </p:txBody>
+      </p:sp>
+      <p:sp>
+        <p:nvSpPr>
+          <p:cNvPr id="5" name="Notes Placeholder 4"/>
+          <p:cNvSpPr>
+            <a:spLocks noGrp="1"/>
+          </p:cNvSpPr>
+          <p:nvPr>
+            <p:ph type="body" sz="quarter" idx="3"/>
+          </p:nvPr>
+        </p:nvSpPr>
+        <p:spPr>
+          <a:xfrm>
+            <a:off x="685800" y="4400550"/>
+            <a:ext cx="5486400" cy="3600450"/>
+          </a:xfrm>
+          <a:prstGeom prst="rect">
+            <a:avLst/>
+          </a:prstGeom>
+        </p:spPr>
+        <p:txBody>
+          <a:bodyPr vert="horz" lIns="91440" tIns="45720" rIns="91440" bIns="45720" rtlCol="0"/>
+          <a:lstStyle/>
+          <a:p>
+            <a:pPr lvl="0"/>
+            <a:r>
+              <a:rPr lang="en-US"/>
+              <a:t>Click to edit Master text styles</a:t>
+            </a:r>
+          </a:p>
+          <a:p>
+            <a:pPr lvl="1"/>
+            <a:r>
+              <a:rPr lang="en-US"/>
+              <a:t>Second level</a:t>
+            </a:r>
+          </a:p>
+          <a:p>
+            <a:pPr lvl="2"/>
+            <a:r>
+              <a:rPr lang="en-US"/>
+              <a:t>Third level</a:t>
+            </a:r>
+          </a:p>
+          <a:p>
+            <a:pPr lvl="3"/>
+            <a:r>
+              <a:rPr lang="en-US"/>
+              <a:t>Fourth level</a:t>
+            </a:r>
+          </a:p>
+          <a:p>
+            <a:pPr lvl="4"/>
+            <a:r>
+              <a:rPr lang="en-US"/>
+              <a:t>Fifth level</a:t>
+            </a:r>
+          </a:p>
+        </p:txBody>
+      </p:sp>
+      <p:sp>
+        <p:nvSpPr>
+          <p:cNvPr id="6" name="Footer Placeholder 5"/>
+          <p:cNvSpPr>
+            <a:spLocks noGrp="1"/>
+          </p:cNvSpPr>
+          <p:nvPr>
+            <p:ph type="ftr" sz="quarter" idx="4"/>
+          </p:nvPr>
+        </p:nvSpPr>
+        <p:spPr>
+          <a:xfrm>
+            <a:off x="0" y="8685213"/>
+            <a:ext cx="2971800" cy="458787"/>
+          </a:xfrm>
+          <a:prstGeom prst="rect">
+            <a:avLst/>
+          </a:prstGeom>
+        </p:spPr>
+        <p:txBody>
+          <a:bodyPr vert="horz" lIns="91440" tIns="45720" rIns="91440" bIns="45720" rtlCol="0" anchor="b"/>
+          <a:lstStyle>
+            <a:lvl1pPr algn="l">
+              <a:defRPr sz="1200"/>
+            </a:lvl1pPr>
+          </a:lstStyle>
+          <a:p>
+            <a:endParaRPr lang="en-US"/>
+          </a:p>
+        </p:txBody>
+      </p:sp>
+      <p:sp>
+        <p:nvSpPr>
+          <p:cNvPr id="7" name="Slide Number Placeholder 6"/>
+          <p:cNvSpPr>
+            <a:spLocks noGrp="1"/>
+          </p:cNvSpPr>
+          <p:nvPr>
+            <p:ph type="sldNum" sz="quarter" idx="5"/>
+          </p:nvPr>
+        </p:nvSpPr>
+        <p:spPr>
+          <a:xfrm>
+            <a:off x="3884613" y="8685213"/>
+            <a:ext cx="2971800" cy="458787"/>
+          </a:xfrm>
+          <a:prstGeom prst="rect">
+            <a:avLst/>
+          </a:prstGeom>
+        </p:spPr>
+        <p:txBody>
+          <a:bodyPr vert="horz" lIns="91440" tIns="45720" rIns="91440" bIns="45720" rtlCol="0" anchor="b"/>
+          <a:lstStyle>
+            <a:lvl1pPr algn="r">
+              <a:defRPr sz="1200"/>
+            </a:lvl1pPr>
+          </a:lstStyle>
+          <a:p>
+            <a:fld id="{18BDFEC3-8487-43E8-A154-7C12CBC1FFF2}" type="slidenum">
+              <a:rPr lang="en-US" smtClean="0"/>
+              <a:t>‹#›</a:t>
+            </a:fld>
+            <a:endParaRPr lang="en-US"/>
+          </a:p>
+        </p:txBody>
+      </p:sp>
+    </p:spTree>
+    <p:extLst>
+      <p:ext uri="{BB962C8B-B14F-4D97-AF65-F5344CB8AC3E}">
+        <p14:creationId xmlns:p14="http://schemas.microsoft.com/office/powerpoint/2010/main" val="3782709779"/>
+      </p:ext>
+    </p:extLst>
+  </p:cSld>
+  <p:clrMap bg1="lt1" tx1="dk1" bg2="lt2" tx2="dk2" accent1="accent1" accent2="accent2" accent3="accent3" accent4="accent4" accent5="accent5" accent6="accent6" hlink="hlink" folHlink="folHlink"/>
+  <p:notesStyle>
+    <a:lvl1pPr marL="0" algn="l" defTabSz="914400" rtl="0" eaLnBrk="1" latinLnBrk="0" hangingPunct="1">
+      <a:defRPr sz="1200" kern="1200">
+        <a:solidFill>
+          <a:schemeClr val="tx1"/>
+        </a:solidFill>
+        <a:latin typeface="+mn-lt"/>
+        <a:ea typeface="+mn-ea"/>
+        <a:cs typeface="+mn-cs"/>
+      </a:defRPr>
+    </a:lvl1pPr>
+    <a:lvl2pPr marL="457200" algn="l" defTabSz="914400" rtl="0" eaLnBrk="1" latinLnBrk="0" hangingPunct="1">
+      <a:defRPr sz="1200" kern="1200">
+        <a:solidFill>
+          <a:schemeClr val="tx1"/>
+        </a:solidFill>
+        <a:latin typeface="+mn-lt"/>
+        <a:ea typeface="+mn-ea"/>
+        <a:cs typeface="+mn-cs"/>
+      </a:defRPr>
+    </a:lvl2pPr>
+    <a:lvl3pPr marL="914400" algn="l" defTabSz="914400" rtl="0" eaLnBrk="1" latinLnBrk="0" hangingPunct="1">
+      <a:defRPr sz="1200" kern="1200">
+        <a:solidFill>
+          <a:schemeClr val="tx1"/>
+        </a:solidFill>
+        <a:latin typeface="+mn-lt"/>
+        <a:ea typeface="+mn-ea"/>
+        <a:cs typeface="+mn-cs"/>
+      </a:defRPr>
+    </a:lvl3pPr>
+    <a:lvl4pPr marL="1371600" algn="l" defTabSz="914400" rtl="0" eaLnBrk="1" latinLnBrk="0" hangingPunct="1">
+      <a:defRPr sz="1200" kern="1200">
+        <a:solidFill>
+          <a:schemeClr val="tx1"/>
+        </a:solidFill>
+        <a:latin typeface="+mn-lt"/>
+        <a:ea typeface="+mn-ea"/>
+        <a:cs typeface="+mn-cs"/>
+      </a:defRPr>
+    </a:lvl4pPr>
+    <a:lvl5pPr marL="1828800" algn="l" defTabSz="914400" rtl="0" eaLnBrk="1" latinLnBrk="0" hangingPunct="1">
+      <a:defRPr sz="1200" kern="1200">
+        <a:solidFill>
+          <a:schemeClr val="tx1"/>
+        </a:solidFill>
+        <a:latin typeface="+mn-lt"/>
+        <a:ea typeface="+mn-ea"/>
+        <a:cs typeface="+mn-cs"/>
+      </a:defRPr>
+    </a:lvl5pPr>
+    <a:lvl6pPr marL="2286000" algn="l" defTabSz="914400" rtl="0" eaLnBrk="1" latinLnBrk="0" hangingPunct="1">
+      <a:defRPr sz="1200" kern="1200">
+        <a:solidFill>
+          <a:schemeClr val="tx1"/>
+        </a:solidFill>
+        <a:latin typeface="+mn-lt"/>
+        <a:ea typeface="+mn-ea"/>
+        <a:cs typeface="+mn-cs"/>
+      </a:defRPr>
+    </a:lvl6pPr>
+    <a:lvl7pPr marL="2743200" algn="l" defTabSz="914400" rtl="0" eaLnBrk="1" latinLnBrk="0" hangingPunct="1">
+      <a:defRPr sz="1200" kern="1200">
+        <a:solidFill>
+          <a:schemeClr val="tx1"/>
+        </a:solidFill>
+        <a:latin typeface="+mn-lt"/>
+        <a:ea typeface="+mn-ea"/>
+        <a:cs typeface="+mn-cs"/>
+      </a:defRPr>
+    </a:lvl7pPr>
+    <a:lvl8pPr marL="3200400" algn="l" defTabSz="914400" rtl="0" eaLnBrk="1" latinLnBrk="0" hangingPunct="1">
+      <a:defRPr sz="1200" kern="1200">
+        <a:solidFill>
+          <a:schemeClr val="tx1"/>
+        </a:solidFill>
+        <a:latin typeface="+mn-lt"/>
+        <a:ea typeface="+mn-ea"/>
+        <a:cs typeface="+mn-cs"/>
+      </a:defRPr>
+    </a:lvl8pPr>
+    <a:lvl9pPr marL="3657600" algn="l" defTabSz="914400" rtl="0" eaLnBrk="1" latinLnBrk="0" hangingPunct="1">
+      <a:defRPr sz="1200" kern="1200">
+        <a:solidFill>
+          <a:schemeClr val="tx1"/>
+        </a:solidFill>
+        <a:latin typeface="+mn-lt"/>
+        <a:ea typeface="+mn-ea"/>
+        <a:cs typeface="+mn-cs"/>
+      </a:defRPr>
+    </a:lvl9pPr>
+  </p:notesStyle>
+</p:notesMaster>
+</file>
+
+<file path=ppt/notesSlides/notesSlide1.xml><?xml version="1.0" encoding="utf-8"?>
+<p:notes xmlns:a="http://schemas.openxmlformats.org/drawingml/2006/main" xmlns:r="http://schemas.openxmlformats.org/officeDocument/2006/relationships" xmlns:p="http://schemas.openxmlformats.org/presentationml/2006/main">
+  <p:cSld>
+    <p:spTree>
+      <p:nvGrpSpPr>
+        <p:cNvPr id="1" name=""/>
+        <p:cNvGrpSpPr/>
+        <p:nvPr/>
+      </p:nvGrpSpPr>
+      <p:grpSpPr>
+        <a:xfrm>
+          <a:off x="0" y="0"/>
+          <a:ext cx="0" cy="0"/>
+          <a:chOff x="0" y="0"/>
+          <a:chExt cx="0" cy="0"/>
+        </a:xfrm>
+      </p:grpSpPr>
+      <p:sp>
+        <p:nvSpPr>
+          <p:cNvPr id="2" name="Slide Image Placeholder 1"/>
+          <p:cNvSpPr>
+            <a:spLocks noGrp="1" noRot="1" noChangeAspect="1"/>
+          </p:cNvSpPr>
+          <p:nvPr>
+            <p:ph type="sldImg"/>
+          </p:nvPr>
+        </p:nvSpPr>
+        <p:spPr/>
+      </p:sp>
+      <p:sp>
+        <p:nvSpPr>
+          <p:cNvPr id="3" name="Notes Placeholder 2"/>
+          <p:cNvSpPr>
+            <a:spLocks noGrp="1"/>
+          </p:cNvSpPr>
+          <p:nvPr>
+            <p:ph type="body" idx="1"/>
+          </p:nvPr>
+        </p:nvSpPr>
+        <p:spPr/>
+        <p:txBody>
+          <a:bodyPr/>
+          <a:lstStyle/>
+          <a:p>
+            <a:pPr lvl="0" indent="0" marL="0">
+              <a:buNone/>
+            </a:pPr>
+            <a:r>
+              <a:rPr/>
+              <a:t>Pair students and confirm that each person has a readable draft. The worksheet structures two distinct tasks: giving feedback and planning a response.</a:t>
+            </a:r>
+          </a:p>
+        </p:txBody>
+      </p:sp>
+      <p:sp>
+        <p:nvSpPr>
+          <p:cNvPr id="4" name="Slide Number Placeholder 3"/>
+          <p:cNvSpPr>
+            <a:spLocks noGrp="1"/>
+          </p:cNvSpPr>
+          <p:nvPr>
+            <p:ph type="sldNum" sz="quarter" idx="10"/>
+          </p:nvPr>
+        </p:nvSpPr>
+        <p:spPr/>
+        <p:txBody>
+          <a:bodyPr/>
+          <a:lstStyle/>
+          <a:p>
+            <a:fld id="{18BDFEC3-8487-43E8-A154-7C12CBC1FFF2}" type="slidenum">
+              <a:rPr lang="en-US"/>
+              <a:t>2</a:t>
+            </a:fld>
+            <a:endParaRPr lang="en-US"/>
+          </a:p>
+        </p:txBody>
+      </p:sp>
+    </p:spTree>
+  </p:cSld>
+</p:notes>
+</file>
+
+<file path=ppt/notesSlides/notesSlide10.xml><?xml version="1.0" encoding="utf-8"?>
+<p:notes xmlns:a="http://schemas.openxmlformats.org/drawingml/2006/main" xmlns:r="http://schemas.openxmlformats.org/officeDocument/2006/relationships" xmlns:p="http://schemas.openxmlformats.org/presentationml/2006/main">
+  <p:cSld>
+    <p:spTree>
+      <p:nvGrpSpPr>
+        <p:cNvPr id="1" name=""/>
+        <p:cNvGrpSpPr/>
+        <p:nvPr/>
+      </p:nvGrpSpPr>
+      <p:grpSpPr>
+        <a:xfrm>
+          <a:off x="0" y="0"/>
+          <a:ext cx="0" cy="0"/>
+          <a:chOff x="0" y="0"/>
+          <a:chExt cx="0" cy="0"/>
+        </a:xfrm>
+      </p:grpSpPr>
+      <p:sp>
+        <p:nvSpPr>
+          <p:cNvPr id="2" name="Slide Image Placeholder 1"/>
+          <p:cNvSpPr>
+            <a:spLocks noGrp="1" noRot="1" noChangeAspect="1"/>
+          </p:cNvSpPr>
+          <p:nvPr>
+            <p:ph type="sldImg"/>
+          </p:nvPr>
+        </p:nvSpPr>
+        <p:spPr/>
+      </p:sp>
+      <p:sp>
+        <p:nvSpPr>
+          <p:cNvPr id="3" name="Notes Placeholder 2"/>
+          <p:cNvSpPr>
+            <a:spLocks noGrp="1"/>
+          </p:cNvSpPr>
+          <p:nvPr>
+            <p:ph type="body" idx="1"/>
+          </p:nvPr>
+        </p:nvSpPr>
+        <p:spPr/>
+        <p:txBody>
+          <a:bodyPr/>
+          <a:lstStyle/>
+          <a:p>
+            <a:pPr lvl="0" indent="0" marL="0">
+              <a:buNone/>
+            </a:pPr>
+            <a:r>
+              <a:rPr/>
+              <a:t>The reviewer should compare the prose, tables, and hypotheses for consistency. Numbers should agree across all three.</a:t>
+            </a:r>
+          </a:p>
+        </p:txBody>
+      </p:sp>
+      <p:sp>
+        <p:nvSpPr>
+          <p:cNvPr id="4" name="Slide Number Placeholder 3"/>
+          <p:cNvSpPr>
+            <a:spLocks noGrp="1"/>
+          </p:cNvSpPr>
+          <p:nvPr>
+            <p:ph type="sldNum" sz="quarter" idx="10"/>
+          </p:nvPr>
+        </p:nvSpPr>
+        <p:spPr/>
+        <p:txBody>
+          <a:bodyPr/>
+          <a:lstStyle/>
+          <a:p>
+            <a:fld id="{18BDFEC3-8487-43E8-A154-7C12CBC1FFF2}" type="slidenum">
+              <a:rPr lang="en-US"/>
+              <a:t>11</a:t>
+            </a:fld>
+            <a:endParaRPr lang="en-US"/>
+          </a:p>
+        </p:txBody>
+      </p:sp>
+    </p:spTree>
+  </p:cSld>
+</p:notes>
+</file>
+
+<file path=ppt/notesSlides/notesSlide11.xml><?xml version="1.0" encoding="utf-8"?>
+<p:notes xmlns:a="http://schemas.openxmlformats.org/drawingml/2006/main" xmlns:r="http://schemas.openxmlformats.org/officeDocument/2006/relationships" xmlns:p="http://schemas.openxmlformats.org/presentationml/2006/main">
+  <p:cSld>
+    <p:spTree>
+      <p:nvGrpSpPr>
+        <p:cNvPr id="1" name=""/>
+        <p:cNvGrpSpPr/>
+        <p:nvPr/>
+      </p:nvGrpSpPr>
+      <p:grpSpPr>
+        <a:xfrm>
+          <a:off x="0" y="0"/>
+          <a:ext cx="0" cy="0"/>
+          <a:chOff x="0" y="0"/>
+          <a:chExt cx="0" cy="0"/>
+        </a:xfrm>
+      </p:grpSpPr>
+      <p:sp>
+        <p:nvSpPr>
+          <p:cNvPr id="2" name="Slide Image Placeholder 1"/>
+          <p:cNvSpPr>
+            <a:spLocks noGrp="1" noRot="1" noChangeAspect="1"/>
+          </p:cNvSpPr>
+          <p:nvPr>
+            <p:ph type="sldImg"/>
+          </p:nvPr>
+        </p:nvSpPr>
+        <p:spPr/>
+      </p:sp>
+      <p:sp>
+        <p:nvSpPr>
+          <p:cNvPr id="3" name="Notes Placeholder 2"/>
+          <p:cNvSpPr>
+            <a:spLocks noGrp="1"/>
+          </p:cNvSpPr>
+          <p:nvPr>
+            <p:ph type="body" idx="1"/>
+          </p:nvPr>
+        </p:nvSpPr>
+        <p:spPr/>
+        <p:txBody>
+          <a:bodyPr/>
+          <a:lstStyle/>
+          <a:p>
+            <a:pPr lvl="0" indent="0" marL="0">
+              <a:buNone/>
+            </a:pPr>
+            <a:r>
+              <a:rPr/>
+              <a:t>The discussion should explain what the results mean without simply repeating the results section or making claims the design cannot support.</a:t>
+            </a:r>
+          </a:p>
+        </p:txBody>
+      </p:sp>
+      <p:sp>
+        <p:nvSpPr>
+          <p:cNvPr id="4" name="Slide Number Placeholder 3"/>
+          <p:cNvSpPr>
+            <a:spLocks noGrp="1"/>
+          </p:cNvSpPr>
+          <p:nvPr>
+            <p:ph type="sldNum" sz="quarter" idx="10"/>
+          </p:nvPr>
+        </p:nvSpPr>
+        <p:spPr/>
+        <p:txBody>
+          <a:bodyPr/>
+          <a:lstStyle/>
+          <a:p>
+            <a:fld id="{18BDFEC3-8487-43E8-A154-7C12CBC1FFF2}" type="slidenum">
+              <a:rPr lang="en-US"/>
+              <a:t>12</a:t>
+            </a:fld>
+            <a:endParaRPr lang="en-US"/>
+          </a:p>
+        </p:txBody>
+      </p:sp>
+    </p:spTree>
+  </p:cSld>
+</p:notes>
+</file>
+
+<file path=ppt/notesSlides/notesSlide12.xml><?xml version="1.0" encoding="utf-8"?>
+<p:notes xmlns:a="http://schemas.openxmlformats.org/drawingml/2006/main" xmlns:r="http://schemas.openxmlformats.org/officeDocument/2006/relationships" xmlns:p="http://schemas.openxmlformats.org/presentationml/2006/main">
+  <p:cSld>
+    <p:spTree>
+      <p:nvGrpSpPr>
+        <p:cNvPr id="1" name=""/>
+        <p:cNvGrpSpPr/>
+        <p:nvPr/>
+      </p:nvGrpSpPr>
+      <p:grpSpPr>
+        <a:xfrm>
+          <a:off x="0" y="0"/>
+          <a:ext cx="0" cy="0"/>
+          <a:chOff x="0" y="0"/>
+          <a:chExt cx="0" cy="0"/>
+        </a:xfrm>
+      </p:grpSpPr>
+      <p:sp>
+        <p:nvSpPr>
+          <p:cNvPr id="2" name="Slide Image Placeholder 1"/>
+          <p:cNvSpPr>
+            <a:spLocks noGrp="1" noRot="1" noChangeAspect="1"/>
+          </p:cNvSpPr>
+          <p:nvPr>
+            <p:ph type="sldImg"/>
+          </p:nvPr>
+        </p:nvSpPr>
+        <p:spPr/>
+      </p:sp>
+      <p:sp>
+        <p:nvSpPr>
+          <p:cNvPr id="3" name="Notes Placeholder 2"/>
+          <p:cNvSpPr>
+            <a:spLocks noGrp="1"/>
+          </p:cNvSpPr>
+          <p:nvPr>
+            <p:ph type="body" idx="1"/>
+          </p:nvPr>
+        </p:nvSpPr>
+        <p:spPr/>
+        <p:txBody>
+          <a:bodyPr/>
+          <a:lstStyle/>
+          <a:p>
+            <a:pPr lvl="0" indent="0" marL="0">
+              <a:buNone/>
+            </a:pPr>
+            <a:r>
+              <a:rPr/>
+              <a:t>Surface edits matter, but they should not consume the time needed for major revisions. The worksheet deliberately orders content review before polish.</a:t>
+            </a:r>
+          </a:p>
+        </p:txBody>
+      </p:sp>
+      <p:sp>
+        <p:nvSpPr>
+          <p:cNvPr id="4" name="Slide Number Placeholder 3"/>
+          <p:cNvSpPr>
+            <a:spLocks noGrp="1"/>
+          </p:cNvSpPr>
+          <p:nvPr>
+            <p:ph type="sldNum" sz="quarter" idx="10"/>
+          </p:nvPr>
+        </p:nvSpPr>
+        <p:spPr/>
+        <p:txBody>
+          <a:bodyPr/>
+          <a:lstStyle/>
+          <a:p>
+            <a:fld id="{18BDFEC3-8487-43E8-A154-7C12CBC1FFF2}" type="slidenum">
+              <a:rPr lang="en-US"/>
+              <a:t>13</a:t>
+            </a:fld>
+            <a:endParaRPr lang="en-US"/>
+          </a:p>
+        </p:txBody>
+      </p:sp>
+    </p:spTree>
+  </p:cSld>
+</p:notes>
+</file>
+
+<file path=ppt/notesSlides/notesSlide13.xml><?xml version="1.0" encoding="utf-8"?>
+<p:notes xmlns:a="http://schemas.openxmlformats.org/drawingml/2006/main" xmlns:r="http://schemas.openxmlformats.org/officeDocument/2006/relationships" xmlns:p="http://schemas.openxmlformats.org/presentationml/2006/main">
+  <p:cSld>
+    <p:spTree>
+      <p:nvGrpSpPr>
+        <p:cNvPr id="1" name=""/>
+        <p:cNvGrpSpPr/>
+        <p:nvPr/>
+      </p:nvGrpSpPr>
+      <p:grpSpPr>
+        <a:xfrm>
+          <a:off x="0" y="0"/>
+          <a:ext cx="0" cy="0"/>
+          <a:chOff x="0" y="0"/>
+          <a:chExt cx="0" cy="0"/>
+        </a:xfrm>
+      </p:grpSpPr>
+      <p:sp>
+        <p:nvSpPr>
+          <p:cNvPr id="2" name="Slide Image Placeholder 1"/>
+          <p:cNvSpPr>
+            <a:spLocks noGrp="1" noRot="1" noChangeAspect="1"/>
+          </p:cNvSpPr>
+          <p:nvPr>
+            <p:ph type="sldImg"/>
+          </p:nvPr>
+        </p:nvSpPr>
+        <p:spPr/>
+      </p:sp>
+      <p:sp>
+        <p:nvSpPr>
+          <p:cNvPr id="3" name="Notes Placeholder 2"/>
+          <p:cNvSpPr>
+            <a:spLocks noGrp="1"/>
+          </p:cNvSpPr>
+          <p:nvPr>
+            <p:ph type="body" idx="1"/>
+          </p:nvPr>
+        </p:nvSpPr>
+        <p:spPr/>
+        <p:txBody>
+          <a:bodyPr/>
+          <a:lstStyle/>
+          <a:p>
+            <a:pPr lvl="0" indent="0" marL="0">
+              <a:buNone/>
+            </a:pPr>
+            <a:r>
+              <a:rPr/>
+              <a:t>The author does not need to accept every suggestion. They do need to understand the reader problem each comment reveals.</a:t>
+            </a:r>
+          </a:p>
+        </p:txBody>
+      </p:sp>
+      <p:sp>
+        <p:nvSpPr>
+          <p:cNvPr id="4" name="Slide Number Placeholder 3"/>
+          <p:cNvSpPr>
+            <a:spLocks noGrp="1"/>
+          </p:cNvSpPr>
+          <p:nvPr>
+            <p:ph type="sldNum" sz="quarter" idx="10"/>
+          </p:nvPr>
+        </p:nvSpPr>
+        <p:spPr/>
+        <p:txBody>
+          <a:bodyPr/>
+          <a:lstStyle/>
+          <a:p>
+            <a:fld id="{18BDFEC3-8487-43E8-A154-7C12CBC1FFF2}" type="slidenum">
+              <a:rPr lang="en-US"/>
+              <a:t>14</a:t>
+            </a:fld>
+            <a:endParaRPr lang="en-US"/>
+          </a:p>
+        </p:txBody>
+      </p:sp>
+    </p:spTree>
+  </p:cSld>
+</p:notes>
+</file>
+
+<file path=ppt/notesSlides/notesSlide14.xml><?xml version="1.0" encoding="utf-8"?>
+<p:notes xmlns:a="http://schemas.openxmlformats.org/drawingml/2006/main" xmlns:r="http://schemas.openxmlformats.org/officeDocument/2006/relationships" xmlns:p="http://schemas.openxmlformats.org/presentationml/2006/main">
+  <p:cSld>
+    <p:spTree>
+      <p:nvGrpSpPr>
+        <p:cNvPr id="1" name=""/>
+        <p:cNvGrpSpPr/>
+        <p:nvPr/>
+      </p:nvGrpSpPr>
+      <p:grpSpPr>
+        <a:xfrm>
+          <a:off x="0" y="0"/>
+          <a:ext cx="0" cy="0"/>
+          <a:chOff x="0" y="0"/>
+          <a:chExt cx="0" cy="0"/>
+        </a:xfrm>
+      </p:grpSpPr>
+      <p:sp>
+        <p:nvSpPr>
+          <p:cNvPr id="2" name="Slide Image Placeholder 1"/>
+          <p:cNvSpPr>
+            <a:spLocks noGrp="1" noRot="1" noChangeAspect="1"/>
+          </p:cNvSpPr>
+          <p:nvPr>
+            <p:ph type="sldImg"/>
+          </p:nvPr>
+        </p:nvSpPr>
+        <p:spPr/>
+      </p:sp>
+      <p:sp>
+        <p:nvSpPr>
+          <p:cNvPr id="3" name="Notes Placeholder 2"/>
+          <p:cNvSpPr>
+            <a:spLocks noGrp="1"/>
+          </p:cNvSpPr>
+          <p:nvPr>
+            <p:ph type="body" idx="1"/>
+          </p:nvPr>
+        </p:nvSpPr>
+        <p:spPr/>
+        <p:txBody>
+          <a:bodyPr/>
+          <a:lstStyle/>
+          <a:p>
+            <a:pPr lvl="0" indent="0" marL="0">
+              <a:buNone/>
+            </a:pPr>
+            <a:r>
+              <a:rPr/>
+              <a:t>Encourage authors to write a short action list. Revising in priority order prevents polishing text that will later be deleted or moved.</a:t>
+            </a:r>
+          </a:p>
+        </p:txBody>
+      </p:sp>
+      <p:sp>
+        <p:nvSpPr>
+          <p:cNvPr id="4" name="Slide Number Placeholder 3"/>
+          <p:cNvSpPr>
+            <a:spLocks noGrp="1"/>
+          </p:cNvSpPr>
+          <p:nvPr>
+            <p:ph type="sldNum" sz="quarter" idx="10"/>
+          </p:nvPr>
+        </p:nvSpPr>
+        <p:spPr/>
+        <p:txBody>
+          <a:bodyPr/>
+          <a:lstStyle/>
+          <a:p>
+            <a:fld id="{18BDFEC3-8487-43E8-A154-7C12CBC1FFF2}" type="slidenum">
+              <a:rPr lang="en-US"/>
+              <a:t>15</a:t>
+            </a:fld>
+            <a:endParaRPr lang="en-US"/>
+          </a:p>
+        </p:txBody>
+      </p:sp>
+    </p:spTree>
+  </p:cSld>
+</p:notes>
+</file>
+
+<file path=ppt/notesSlides/notesSlide15.xml><?xml version="1.0" encoding="utf-8"?>
+<p:notes xmlns:a="http://schemas.openxmlformats.org/drawingml/2006/main" xmlns:r="http://schemas.openxmlformats.org/officeDocument/2006/relationships" xmlns:p="http://schemas.openxmlformats.org/presentationml/2006/main">
+  <p:cSld>
+    <p:spTree>
+      <p:nvGrpSpPr>
+        <p:cNvPr id="1" name=""/>
+        <p:cNvGrpSpPr/>
+        <p:nvPr/>
+      </p:nvGrpSpPr>
+      <p:grpSpPr>
+        <a:xfrm>
+          <a:off x="0" y="0"/>
+          <a:ext cx="0" cy="0"/>
+          <a:chOff x="0" y="0"/>
+          <a:chExt cx="0" cy="0"/>
+        </a:xfrm>
+      </p:grpSpPr>
+      <p:sp>
+        <p:nvSpPr>
+          <p:cNvPr id="2" name="Slide Image Placeholder 1"/>
+          <p:cNvSpPr>
+            <a:spLocks noGrp="1" noRot="1" noChangeAspect="1"/>
+          </p:cNvSpPr>
+          <p:nvPr>
+            <p:ph type="sldImg"/>
+          </p:nvPr>
+        </p:nvSpPr>
+        <p:spPr/>
+      </p:sp>
+      <p:sp>
+        <p:nvSpPr>
+          <p:cNvPr id="3" name="Notes Placeholder 2"/>
+          <p:cNvSpPr>
+            <a:spLocks noGrp="1"/>
+          </p:cNvSpPr>
+          <p:nvPr>
+            <p:ph type="body" idx="1"/>
+          </p:nvPr>
+        </p:nvSpPr>
+        <p:spPr/>
+        <p:txBody>
+          <a:bodyPr/>
+          <a:lstStyle/>
+          <a:p>
+            <a:pPr lvl="0" indent="0" marL="0">
+              <a:buNone/>
+            </a:pPr>
+            <a:r>
+              <a:rPr/>
+              <a:t>Leave enough time for the exchange back and the author’s revision plan. Both giving and using feedback are assessed skills.</a:t>
+            </a:r>
+          </a:p>
+        </p:txBody>
+      </p:sp>
+      <p:sp>
+        <p:nvSpPr>
+          <p:cNvPr id="4" name="Slide Number Placeholder 3"/>
+          <p:cNvSpPr>
+            <a:spLocks noGrp="1"/>
+          </p:cNvSpPr>
+          <p:nvPr>
+            <p:ph type="sldNum" sz="quarter" idx="10"/>
+          </p:nvPr>
+        </p:nvSpPr>
+        <p:spPr/>
+        <p:txBody>
+          <a:bodyPr/>
+          <a:lstStyle/>
+          <a:p>
+            <a:fld id="{18BDFEC3-8487-43E8-A154-7C12CBC1FFF2}" type="slidenum">
+              <a:rPr lang="en-US"/>
+              <a:t>16</a:t>
+            </a:fld>
+            <a:endParaRPr lang="en-US"/>
+          </a:p>
+        </p:txBody>
+      </p:sp>
+    </p:spTree>
+  </p:cSld>
+</p:notes>
+</file>
+
+<file path=ppt/notesSlides/notesSlide2.xml><?xml version="1.0" encoding="utf-8"?>
+<p:notes xmlns:a="http://schemas.openxmlformats.org/drawingml/2006/main" xmlns:r="http://schemas.openxmlformats.org/officeDocument/2006/relationships" xmlns:p="http://schemas.openxmlformats.org/presentationml/2006/main">
+  <p:cSld>
+    <p:spTree>
+      <p:nvGrpSpPr>
+        <p:cNvPr id="1" name=""/>
+        <p:cNvGrpSpPr/>
+        <p:nvPr/>
+      </p:nvGrpSpPr>
+      <p:grpSpPr>
+        <a:xfrm>
+          <a:off x="0" y="0"/>
+          <a:ext cx="0" cy="0"/>
+          <a:chOff x="0" y="0"/>
+          <a:chExt cx="0" cy="0"/>
+        </a:xfrm>
+      </p:grpSpPr>
+      <p:sp>
+        <p:nvSpPr>
+          <p:cNvPr id="2" name="Slide Image Placeholder 1"/>
+          <p:cNvSpPr>
+            <a:spLocks noGrp="1" noRot="1" noChangeAspect="1"/>
+          </p:cNvSpPr>
+          <p:nvPr>
+            <p:ph type="sldImg"/>
+          </p:nvPr>
+        </p:nvSpPr>
+        <p:spPr/>
+      </p:sp>
+      <p:sp>
+        <p:nvSpPr>
+          <p:cNvPr id="3" name="Notes Placeholder 2"/>
+          <p:cNvSpPr>
+            <a:spLocks noGrp="1"/>
+          </p:cNvSpPr>
+          <p:nvPr>
+            <p:ph type="body" idx="1"/>
+          </p:nvPr>
+        </p:nvSpPr>
+        <p:spPr/>
+        <p:txBody>
+          <a:bodyPr/>
+          <a:lstStyle/>
+          <a:p>
+            <a:pPr lvl="0" indent="0" marL="0">
+              <a:buNone/>
+            </a:pPr>
+            <a:r>
+              <a:rPr/>
+              <a:t>The reviewer is not grading or rewriting the paper. Their job is to provide evidence about the reading experience and actionable revision ideas.</a:t>
+            </a:r>
+          </a:p>
+        </p:txBody>
+      </p:sp>
+      <p:sp>
+        <p:nvSpPr>
+          <p:cNvPr id="4" name="Slide Number Placeholder 3"/>
+          <p:cNvSpPr>
+            <a:spLocks noGrp="1"/>
+          </p:cNvSpPr>
+          <p:nvPr>
+            <p:ph type="sldNum" sz="quarter" idx="10"/>
+          </p:nvPr>
+        </p:nvSpPr>
+        <p:spPr/>
+        <p:txBody>
+          <a:bodyPr/>
+          <a:lstStyle/>
+          <a:p>
+            <a:fld id="{18BDFEC3-8487-43E8-A154-7C12CBC1FFF2}" type="slidenum">
+              <a:rPr lang="en-US"/>
+              <a:t>3</a:t>
+            </a:fld>
+            <a:endParaRPr lang="en-US"/>
+          </a:p>
+        </p:txBody>
+      </p:sp>
+    </p:spTree>
+  </p:cSld>
+</p:notes>
+</file>
+
+<file path=ppt/notesSlides/notesSlide3.xml><?xml version="1.0" encoding="utf-8"?>
+<p:notes xmlns:a="http://schemas.openxmlformats.org/drawingml/2006/main" xmlns:r="http://schemas.openxmlformats.org/officeDocument/2006/relationships" xmlns:p="http://schemas.openxmlformats.org/presentationml/2006/main">
+  <p:cSld>
+    <p:spTree>
+      <p:nvGrpSpPr>
+        <p:cNvPr id="1" name=""/>
+        <p:cNvGrpSpPr/>
+        <p:nvPr/>
+      </p:nvGrpSpPr>
+      <p:grpSpPr>
+        <a:xfrm>
+          <a:off x="0" y="0"/>
+          <a:ext cx="0" cy="0"/>
+          <a:chOff x="0" y="0"/>
+          <a:chExt cx="0" cy="0"/>
+        </a:xfrm>
+      </p:grpSpPr>
+      <p:sp>
+        <p:nvSpPr>
+          <p:cNvPr id="2" name="Slide Image Placeholder 1"/>
+          <p:cNvSpPr>
+            <a:spLocks noGrp="1" noRot="1" noChangeAspect="1"/>
+          </p:cNvSpPr>
+          <p:nvPr>
+            <p:ph type="sldImg"/>
+          </p:nvPr>
+        </p:nvSpPr>
+        <p:spPr/>
+      </p:sp>
+      <p:sp>
+        <p:nvSpPr>
+          <p:cNvPr id="3" name="Notes Placeholder 2"/>
+          <p:cNvSpPr>
+            <a:spLocks noGrp="1"/>
+          </p:cNvSpPr>
+          <p:nvPr>
+            <p:ph type="body" idx="1"/>
+          </p:nvPr>
+        </p:nvSpPr>
+        <p:spPr/>
+        <p:txBody>
+          <a:bodyPr/>
+          <a:lstStyle/>
+          <a:p>
+            <a:pPr lvl="0" indent="0" marL="0">
+              <a:buNone/>
+            </a:pPr>
+            <a:r>
+              <a:rPr/>
+              <a:t>Do not begin by correcting commas. The worksheet’s first pass focuses on overall structure and appearance.</a:t>
+            </a:r>
+          </a:p>
+        </p:txBody>
+      </p:sp>
+      <p:sp>
+        <p:nvSpPr>
+          <p:cNvPr id="4" name="Slide Number Placeholder 3"/>
+          <p:cNvSpPr>
+            <a:spLocks noGrp="1"/>
+          </p:cNvSpPr>
+          <p:nvPr>
+            <p:ph type="sldNum" sz="quarter" idx="10"/>
+          </p:nvPr>
+        </p:nvSpPr>
+        <p:spPr/>
+        <p:txBody>
+          <a:bodyPr/>
+          <a:lstStyle/>
+          <a:p>
+            <a:fld id="{18BDFEC3-8487-43E8-A154-7C12CBC1FFF2}" type="slidenum">
+              <a:rPr lang="en-US"/>
+              <a:t>4</a:t>
+            </a:fld>
+            <a:endParaRPr lang="en-US"/>
+          </a:p>
+        </p:txBody>
+      </p:sp>
+    </p:spTree>
+  </p:cSld>
+</p:notes>
+</file>
+
+<file path=ppt/notesSlides/notesSlide4.xml><?xml version="1.0" encoding="utf-8"?>
+<p:notes xmlns:a="http://schemas.openxmlformats.org/drawingml/2006/main" xmlns:r="http://schemas.openxmlformats.org/officeDocument/2006/relationships" xmlns:p="http://schemas.openxmlformats.org/presentationml/2006/main">
+  <p:cSld>
+    <p:spTree>
+      <p:nvGrpSpPr>
+        <p:cNvPr id="1" name=""/>
+        <p:cNvGrpSpPr/>
+        <p:nvPr/>
+      </p:nvGrpSpPr>
+      <p:grpSpPr>
+        <a:xfrm>
+          <a:off x="0" y="0"/>
+          <a:ext cx="0" cy="0"/>
+          <a:chOff x="0" y="0"/>
+          <a:chExt cx="0" cy="0"/>
+        </a:xfrm>
+      </p:grpSpPr>
+      <p:sp>
+        <p:nvSpPr>
+          <p:cNvPr id="2" name="Slide Image Placeholder 1"/>
+          <p:cNvSpPr>
+            <a:spLocks noGrp="1" noRot="1" noChangeAspect="1"/>
+          </p:cNvSpPr>
+          <p:nvPr>
+            <p:ph type="sldImg"/>
+          </p:nvPr>
+        </p:nvSpPr>
+        <p:spPr/>
+      </p:sp>
+      <p:sp>
+        <p:nvSpPr>
+          <p:cNvPr id="3" name="Notes Placeholder 2"/>
+          <p:cNvSpPr>
+            <a:spLocks noGrp="1"/>
+          </p:cNvSpPr>
+          <p:nvPr>
+            <p:ph type="body" idx="1"/>
+          </p:nvPr>
+        </p:nvSpPr>
+        <p:spPr/>
+        <p:txBody>
+          <a:bodyPr/>
+          <a:lstStyle/>
+          <a:p>
+            <a:pPr lvl="0" indent="0" marL="0">
+              <a:buNone/>
+            </a:pPr>
+            <a:r>
+              <a:rPr/>
+              <a:t>Model an example aloud. “This paragraph is bad” offers no diagnosis or next step; naming the missing connection makes the feedback usable.</a:t>
+            </a:r>
+          </a:p>
+        </p:txBody>
+      </p:sp>
+      <p:sp>
+        <p:nvSpPr>
+          <p:cNvPr id="4" name="Slide Number Placeholder 3"/>
+          <p:cNvSpPr>
+            <a:spLocks noGrp="1"/>
+          </p:cNvSpPr>
+          <p:nvPr>
+            <p:ph type="sldNum" sz="quarter" idx="10"/>
+          </p:nvPr>
+        </p:nvSpPr>
+        <p:spPr/>
+        <p:txBody>
+          <a:bodyPr/>
+          <a:lstStyle/>
+          <a:p>
+            <a:fld id="{18BDFEC3-8487-43E8-A154-7C12CBC1FFF2}" type="slidenum">
+              <a:rPr lang="en-US"/>
+              <a:t>5</a:t>
+            </a:fld>
+            <a:endParaRPr lang="en-US"/>
+          </a:p>
+        </p:txBody>
+      </p:sp>
+    </p:spTree>
+  </p:cSld>
+</p:notes>
+</file>
+
+<file path=ppt/notesSlides/notesSlide5.xml><?xml version="1.0" encoding="utf-8"?>
+<p:notes xmlns:a="http://schemas.openxmlformats.org/drawingml/2006/main" xmlns:r="http://schemas.openxmlformats.org/officeDocument/2006/relationships" xmlns:p="http://schemas.openxmlformats.org/presentationml/2006/main">
+  <p:cSld>
+    <p:spTree>
+      <p:nvGrpSpPr>
+        <p:cNvPr id="1" name=""/>
+        <p:cNvGrpSpPr/>
+        <p:nvPr/>
+      </p:nvGrpSpPr>
+      <p:grpSpPr>
+        <a:xfrm>
+          <a:off x="0" y="0"/>
+          <a:ext cx="0" cy="0"/>
+          <a:chOff x="0" y="0"/>
+          <a:chExt cx="0" cy="0"/>
+        </a:xfrm>
+      </p:grpSpPr>
+      <p:sp>
+        <p:nvSpPr>
+          <p:cNvPr id="2" name="Slide Image Placeholder 1"/>
+          <p:cNvSpPr>
+            <a:spLocks noGrp="1" noRot="1" noChangeAspect="1"/>
+          </p:cNvSpPr>
+          <p:nvPr>
+            <p:ph type="sldImg"/>
+          </p:nvPr>
+        </p:nvSpPr>
+        <p:spPr/>
+      </p:sp>
+      <p:sp>
+        <p:nvSpPr>
+          <p:cNvPr id="3" name="Notes Placeholder 2"/>
+          <p:cNvSpPr>
+            <a:spLocks noGrp="1"/>
+          </p:cNvSpPr>
+          <p:nvPr>
+            <p:ph type="body" idx="1"/>
+          </p:nvPr>
+        </p:nvSpPr>
+        <p:spPr/>
+        <p:txBody>
+          <a:bodyPr/>
+          <a:lstStyle/>
+          <a:p>
+            <a:pPr lvl="0" indent="0" marL="0">
+              <a:buNone/>
+            </a:pPr>
+            <a:r>
+              <a:rPr/>
+              <a:t>Specific feedback points to a location, a reader effect, and an action. The reviewer can offer options without dictating exact wording.</a:t>
+            </a:r>
+          </a:p>
+        </p:txBody>
+      </p:sp>
+      <p:sp>
+        <p:nvSpPr>
+          <p:cNvPr id="4" name="Slide Number Placeholder 3"/>
+          <p:cNvSpPr>
+            <a:spLocks noGrp="1"/>
+          </p:cNvSpPr>
+          <p:nvPr>
+            <p:ph type="sldNum" sz="quarter" idx="10"/>
+          </p:nvPr>
+        </p:nvSpPr>
+        <p:spPr/>
+        <p:txBody>
+          <a:bodyPr/>
+          <a:lstStyle/>
+          <a:p>
+            <a:fld id="{18BDFEC3-8487-43E8-A154-7C12CBC1FFF2}" type="slidenum">
+              <a:rPr lang="en-US"/>
+              <a:t>6</a:t>
+            </a:fld>
+            <a:endParaRPr lang="en-US"/>
+          </a:p>
+        </p:txBody>
+      </p:sp>
+    </p:spTree>
+  </p:cSld>
+</p:notes>
+</file>
+
+<file path=ppt/notesSlides/notesSlide6.xml><?xml version="1.0" encoding="utf-8"?>
+<p:notes xmlns:a="http://schemas.openxmlformats.org/drawingml/2006/main" xmlns:r="http://schemas.openxmlformats.org/officeDocument/2006/relationships" xmlns:p="http://schemas.openxmlformats.org/presentationml/2006/main">
+  <p:cSld>
+    <p:spTree>
+      <p:nvGrpSpPr>
+        <p:cNvPr id="1" name=""/>
+        <p:cNvGrpSpPr/>
+        <p:nvPr/>
+      </p:nvGrpSpPr>
+      <p:grpSpPr>
+        <a:xfrm>
+          <a:off x="0" y="0"/>
+          <a:ext cx="0" cy="0"/>
+          <a:chOff x="0" y="0"/>
+          <a:chExt cx="0" cy="0"/>
+        </a:xfrm>
+      </p:grpSpPr>
+      <p:sp>
+        <p:nvSpPr>
+          <p:cNvPr id="2" name="Slide Image Placeholder 1"/>
+          <p:cNvSpPr>
+            <a:spLocks noGrp="1" noRot="1" noChangeAspect="1"/>
+          </p:cNvSpPr>
+          <p:nvPr>
+            <p:ph type="sldImg"/>
+          </p:nvPr>
+        </p:nvSpPr>
+        <p:spPr/>
+      </p:sp>
+      <p:sp>
+        <p:nvSpPr>
+          <p:cNvPr id="3" name="Notes Placeholder 2"/>
+          <p:cNvSpPr>
+            <a:spLocks noGrp="1"/>
+          </p:cNvSpPr>
+          <p:nvPr>
+            <p:ph type="body" idx="1"/>
+          </p:nvPr>
+        </p:nvSpPr>
+        <p:spPr/>
+        <p:txBody>
+          <a:bodyPr/>
+          <a:lstStyle/>
+          <a:p>
+            <a:pPr lvl="0" indent="0" marL="0">
+              <a:buNone/>
+            </a:pPr>
+            <a:r>
+              <a:rPr/>
+              <a:t>The introduction should synthesize sources rather than provide three disconnected article summaries. Each paragraph should help justify the current study.</a:t>
+            </a:r>
+          </a:p>
+        </p:txBody>
+      </p:sp>
+      <p:sp>
+        <p:nvSpPr>
+          <p:cNvPr id="4" name="Slide Number Placeholder 3"/>
+          <p:cNvSpPr>
+            <a:spLocks noGrp="1"/>
+          </p:cNvSpPr>
+          <p:nvPr>
+            <p:ph type="sldNum" sz="quarter" idx="10"/>
+          </p:nvPr>
+        </p:nvSpPr>
+        <p:spPr/>
+        <p:txBody>
+          <a:bodyPr/>
+          <a:lstStyle/>
+          <a:p>
+            <a:fld id="{18BDFEC3-8487-43E8-A154-7C12CBC1FFF2}" type="slidenum">
+              <a:rPr lang="en-US"/>
+              <a:t>7</a:t>
+            </a:fld>
+            <a:endParaRPr lang="en-US"/>
+          </a:p>
+        </p:txBody>
+      </p:sp>
+    </p:spTree>
+  </p:cSld>
+</p:notes>
+</file>
+
+<file path=ppt/notesSlides/notesSlide7.xml><?xml version="1.0" encoding="utf-8"?>
+<p:notes xmlns:a="http://schemas.openxmlformats.org/drawingml/2006/main" xmlns:r="http://schemas.openxmlformats.org/officeDocument/2006/relationships" xmlns:p="http://schemas.openxmlformats.org/presentationml/2006/main">
+  <p:cSld>
+    <p:spTree>
+      <p:nvGrpSpPr>
+        <p:cNvPr id="1" name=""/>
+        <p:cNvGrpSpPr/>
+        <p:nvPr/>
+      </p:nvGrpSpPr>
+      <p:grpSpPr>
+        <a:xfrm>
+          <a:off x="0" y="0"/>
+          <a:ext cx="0" cy="0"/>
+          <a:chOff x="0" y="0"/>
+          <a:chExt cx="0" cy="0"/>
+        </a:xfrm>
+      </p:grpSpPr>
+      <p:sp>
+        <p:nvSpPr>
+          <p:cNvPr id="2" name="Slide Image Placeholder 1"/>
+          <p:cNvSpPr>
+            <a:spLocks noGrp="1" noRot="1" noChangeAspect="1"/>
+          </p:cNvSpPr>
+          <p:nvPr>
+            <p:ph type="sldImg"/>
+          </p:nvPr>
+        </p:nvSpPr>
+        <p:spPr/>
+      </p:sp>
+      <p:sp>
+        <p:nvSpPr>
+          <p:cNvPr id="3" name="Notes Placeholder 2"/>
+          <p:cNvSpPr>
+            <a:spLocks noGrp="1"/>
+          </p:cNvSpPr>
+          <p:nvPr>
+            <p:ph type="body" idx="1"/>
+          </p:nvPr>
+        </p:nvSpPr>
+        <p:spPr/>
+        <p:txBody>
+          <a:bodyPr/>
+          <a:lstStyle/>
+          <a:p>
+            <a:pPr lvl="0" indent="0" marL="0">
+              <a:buNone/>
+            </a:pPr>
+            <a:r>
+              <a:rPr/>
+              <a:t>References should do argumentative work. Flag citations that are present but not integrated into the paper’s rationale.</a:t>
+            </a:r>
+          </a:p>
+        </p:txBody>
+      </p:sp>
+      <p:sp>
+        <p:nvSpPr>
+          <p:cNvPr id="4" name="Slide Number Placeholder 3"/>
+          <p:cNvSpPr>
+            <a:spLocks noGrp="1"/>
+          </p:cNvSpPr>
+          <p:nvPr>
+            <p:ph type="sldNum" sz="quarter" idx="10"/>
+          </p:nvPr>
+        </p:nvSpPr>
+        <p:spPr/>
+        <p:txBody>
+          <a:bodyPr/>
+          <a:lstStyle/>
+          <a:p>
+            <a:fld id="{18BDFEC3-8487-43E8-A154-7C12CBC1FFF2}" type="slidenum">
+              <a:rPr lang="en-US"/>
+              <a:t>8</a:t>
+            </a:fld>
+            <a:endParaRPr lang="en-US"/>
+          </a:p>
+        </p:txBody>
+      </p:sp>
+    </p:spTree>
+  </p:cSld>
+</p:notes>
+</file>
+
+<file path=ppt/notesSlides/notesSlide8.xml><?xml version="1.0" encoding="utf-8"?>
+<p:notes xmlns:a="http://schemas.openxmlformats.org/drawingml/2006/main" xmlns:r="http://schemas.openxmlformats.org/officeDocument/2006/relationships" xmlns:p="http://schemas.openxmlformats.org/presentationml/2006/main">
+  <p:cSld>
+    <p:spTree>
+      <p:nvGrpSpPr>
+        <p:cNvPr id="1" name=""/>
+        <p:cNvGrpSpPr/>
+        <p:nvPr/>
+      </p:nvGrpSpPr>
+      <p:grpSpPr>
+        <a:xfrm>
+          <a:off x="0" y="0"/>
+          <a:ext cx="0" cy="0"/>
+          <a:chOff x="0" y="0"/>
+          <a:chExt cx="0" cy="0"/>
+        </a:xfrm>
+      </p:grpSpPr>
+      <p:sp>
+        <p:nvSpPr>
+          <p:cNvPr id="2" name="Slide Image Placeholder 1"/>
+          <p:cNvSpPr>
+            <a:spLocks noGrp="1" noRot="1" noChangeAspect="1"/>
+          </p:cNvSpPr>
+          <p:nvPr>
+            <p:ph type="sldImg"/>
+          </p:nvPr>
+        </p:nvSpPr>
+        <p:spPr/>
+      </p:sp>
+      <p:sp>
+        <p:nvSpPr>
+          <p:cNvPr id="3" name="Notes Placeholder 2"/>
+          <p:cNvSpPr>
+            <a:spLocks noGrp="1"/>
+          </p:cNvSpPr>
+          <p:nvPr>
+            <p:ph type="body" idx="1"/>
+          </p:nvPr>
+        </p:nvSpPr>
+        <p:spPr/>
+        <p:txBody>
+          <a:bodyPr/>
+          <a:lstStyle/>
+          <a:p>
+            <a:pPr lvl="0" indent="0" marL="0">
+              <a:buNone/>
+            </a:pPr>
+            <a:r>
+              <a:rPr/>
+              <a:t>If the prediction is directional, the cited rationale should support that direction. Make sure the later method and results analyze the same variables.</a:t>
+            </a:r>
+          </a:p>
+        </p:txBody>
+      </p:sp>
+      <p:sp>
+        <p:nvSpPr>
+          <p:cNvPr id="4" name="Slide Number Placeholder 3"/>
+          <p:cNvSpPr>
+            <a:spLocks noGrp="1"/>
+          </p:cNvSpPr>
+          <p:nvPr>
+            <p:ph type="sldNum" sz="quarter" idx="10"/>
+          </p:nvPr>
+        </p:nvSpPr>
+        <p:spPr/>
+        <p:txBody>
+          <a:bodyPr/>
+          <a:lstStyle/>
+          <a:p>
+            <a:fld id="{18BDFEC3-8487-43E8-A154-7C12CBC1FFF2}" type="slidenum">
+              <a:rPr lang="en-US"/>
+              <a:t>9</a:t>
+            </a:fld>
+            <a:endParaRPr lang="en-US"/>
+          </a:p>
+        </p:txBody>
+      </p:sp>
+    </p:spTree>
+  </p:cSld>
+</p:notes>
+</file>
+
+<file path=ppt/notesSlides/notesSlide9.xml><?xml version="1.0" encoding="utf-8"?>
+<p:notes xmlns:a="http://schemas.openxmlformats.org/drawingml/2006/main" xmlns:r="http://schemas.openxmlformats.org/officeDocument/2006/relationships" xmlns:p="http://schemas.openxmlformats.org/presentationml/2006/main">
+  <p:cSld>
+    <p:spTree>
+      <p:nvGrpSpPr>
+        <p:cNvPr id="1" name=""/>
+        <p:cNvGrpSpPr/>
+        <p:nvPr/>
+      </p:nvGrpSpPr>
+      <p:grpSpPr>
+        <a:xfrm>
+          <a:off x="0" y="0"/>
+          <a:ext cx="0" cy="0"/>
+          <a:chOff x="0" y="0"/>
+          <a:chExt cx="0" cy="0"/>
+        </a:xfrm>
+      </p:grpSpPr>
+      <p:sp>
+        <p:nvSpPr>
+          <p:cNvPr id="2" name="Slide Image Placeholder 1"/>
+          <p:cNvSpPr>
+            <a:spLocks noGrp="1" noRot="1" noChangeAspect="1"/>
+          </p:cNvSpPr>
+          <p:nvPr>
+            <p:ph type="sldImg"/>
+          </p:nvPr>
+        </p:nvSpPr>
+        <p:spPr/>
+      </p:sp>
+      <p:sp>
+        <p:nvSpPr>
+          <p:cNvPr id="3" name="Notes Placeholder 2"/>
+          <p:cNvSpPr>
+            <a:spLocks noGrp="1"/>
+          </p:cNvSpPr>
+          <p:nvPr>
+            <p:ph type="body" idx="1"/>
+          </p:nvPr>
+        </p:nvSpPr>
+        <p:spPr/>
+        <p:txBody>
+          <a:bodyPr/>
+          <a:lstStyle/>
+          <a:p>
+            <a:pPr lvl="0" indent="0" marL="0">
+              <a:buNone/>
+            </a:pPr>
+            <a:r>
+              <a:rPr/>
+              <a:t>The method should be detailed enough to reproduce the analysis without narrating irrelevant interface clicks.</a:t>
+            </a:r>
+          </a:p>
+        </p:txBody>
+      </p:sp>
+      <p:sp>
+        <p:nvSpPr>
+          <p:cNvPr id="4" name="Slide Number Placeholder 3"/>
+          <p:cNvSpPr>
+            <a:spLocks noGrp="1"/>
+          </p:cNvSpPr>
+          <p:nvPr>
+            <p:ph type="sldNum" sz="quarter" idx="10"/>
+          </p:nvPr>
+        </p:nvSpPr>
+        <p:spPr/>
+        <p:txBody>
+          <a:bodyPr/>
+          <a:lstStyle/>
+          <a:p>
+            <a:fld id="{18BDFEC3-8487-43E8-A154-7C12CBC1FFF2}" type="slidenum">
+              <a:rPr lang="en-US"/>
+              <a:t>10</a:t>
+            </a:fld>
+            <a:endParaRPr lang="en-US"/>
+          </a:p>
+        </p:txBody>
+      </p:sp>
+    </p:spTree>
+  </p:cSld>
+</p:notes>
+</file>
+
 <file path=ppt/slideLayouts/slideLayout1.xml><?xml version="1.0" encoding="utf-8"?>
 <p:sldLayout xmlns:a="http://schemas.openxmlformats.org/drawingml/2006/main" xmlns:r="http://schemas.openxmlformats.org/officeDocument/2006/relationships" xmlns:p="http://schemas.openxmlformats.org/presentationml/2006/main" type="title" preserve="1">
   <p:cSld name="Title Slide">
@@ -234,10 +1806,7 @@
               <a:buNone/>
               <a:defRPr sz="2000">
                 <a:solidFill>
-                  <a:schemeClr val="tx1">
-                    <a:lumMod val="75000"/>
-                    <a:lumOff val="25000"/>
-                  </a:schemeClr>
+                  <a:srgbClr val="FFFFFF"/>
                 </a:solidFill>
               </a:defRPr>
             </a:lvl1pPr>
@@ -2979,7 +4548,7 @@
         </a:buClr>
         <a:buFont charset="0" panose="020B0604020202020204" pitchFamily="34" typeface="Arial"/>
         <a:buChar char="•"/>
-        <a:defRPr kern="1200" sz="1800">
+        <a:defRPr kern="1200" sz="2000">
           <a:solidFill>
             <a:schemeClr val="tx1">
               <a:lumMod val="85000"/>
@@ -3003,7 +4572,7 @@
         </a:buClr>
         <a:buFont charset="0" panose="020B0604020202020204" pitchFamily="34" typeface="Arial"/>
         <a:buChar char="•"/>
-        <a:defRPr kern="1200" sz="1600">
+        <a:defRPr kern="1200" sz="2000">
           <a:solidFill>
             <a:schemeClr val="tx1">
               <a:lumMod val="85000"/>
@@ -3027,7 +4596,7 @@
         </a:buClr>
         <a:buFont charset="0" panose="020B0604020202020204" pitchFamily="34" typeface="Arial"/>
         <a:buChar char="•"/>
-        <a:defRPr kern="1200" sz="1600">
+        <a:defRPr kern="1200" sz="2000">
           <a:solidFill>
             <a:schemeClr val="tx1">
               <a:lumMod val="85000"/>
@@ -3051,7 +4620,7 @@
         </a:buClr>
         <a:buFont charset="0" panose="020B0604020202020204" pitchFamily="34" typeface="Arial"/>
         <a:buChar char="•"/>
-        <a:defRPr kern="1200" sz="1600">
+        <a:defRPr kern="1200" sz="2000">
           <a:solidFill>
             <a:schemeClr val="tx1">
               <a:lumMod val="85000"/>
@@ -3075,7 +4644,7 @@
         </a:buClr>
         <a:buFont charset="0" panose="020B0604020202020204" pitchFamily="34" typeface="Arial"/>
         <a:buChar char="•"/>
-        <a:defRPr kern="1200" sz="1600">
+        <a:defRPr kern="1200" sz="2000">
           <a:solidFill>
             <a:schemeClr val="tx1">
               <a:lumMod val="85000"/>
@@ -3099,7 +4668,7 @@
         </a:buClr>
         <a:buFont charset="0" panose="020B0604020202020204" pitchFamily="34" typeface="Arial"/>
         <a:buChar char="•"/>
-        <a:defRPr kern="1200" sz="1600">
+        <a:defRPr kern="1200" sz="2000">
           <a:solidFill>
             <a:schemeClr val="tx1"/>
           </a:solidFill>
@@ -3120,7 +4689,7 @@
         </a:buClr>
         <a:buFont charset="0" panose="020B0604020202020204" pitchFamily="34" typeface="Arial"/>
         <a:buChar char="•"/>
-        <a:defRPr kern="1200" sz="1600">
+        <a:defRPr kern="1200" sz="2000">
           <a:solidFill>
             <a:schemeClr val="tx1"/>
           </a:solidFill>
@@ -3141,7 +4710,7 @@
         </a:buClr>
         <a:buFont charset="0" panose="020B0604020202020204" pitchFamily="34" typeface="Arial"/>
         <a:buChar char="•"/>
-        <a:defRPr baseline="0" kern="1200" sz="1600">
+        <a:defRPr baseline="0" kern="1200" sz="2000">
           <a:solidFill>
             <a:schemeClr val="tx1"/>
           </a:solidFill>
@@ -3162,7 +4731,7 @@
         </a:buClr>
         <a:buFont charset="0" panose="020B0604020202020204" pitchFamily="34" typeface="Arial"/>
         <a:buChar char="•"/>
-        <a:defRPr baseline="0" kern="1200" sz="1600">
+        <a:defRPr baseline="0" kern="1200" sz="2000">
           <a:solidFill>
             <a:schemeClr val="tx1"/>
           </a:solidFill>
@@ -3177,7 +4746,7 @@
         <a:defRPr lang="en-US"/>
       </a:defPPr>
       <a:lvl1pPr algn="l" defTabSz="914400" eaLnBrk="1" hangingPunct="1" latinLnBrk="0" marL="0" rtl="0">
-        <a:defRPr kern="1200" sz="1800">
+        <a:defRPr kern="1200" sz="2000">
           <a:solidFill>
             <a:schemeClr val="tx1"/>
           </a:solidFill>
@@ -3187,7 +4756,7 @@
         </a:defRPr>
       </a:lvl1pPr>
       <a:lvl2pPr algn="l" defTabSz="914400" eaLnBrk="1" hangingPunct="1" latinLnBrk="0" marL="457200" rtl="0">
-        <a:defRPr kern="1200" sz="1800">
+        <a:defRPr kern="1200" sz="2000">
           <a:solidFill>
             <a:schemeClr val="tx1"/>
           </a:solidFill>
@@ -3197,7 +4766,7 @@
         </a:defRPr>
       </a:lvl2pPr>
       <a:lvl3pPr algn="l" defTabSz="914400" eaLnBrk="1" hangingPunct="1" latinLnBrk="0" marL="914400" rtl="0">
-        <a:defRPr kern="1200" sz="1800">
+        <a:defRPr kern="1200" sz="2000">
           <a:solidFill>
             <a:schemeClr val="tx1"/>
           </a:solidFill>
@@ -3207,7 +4776,7 @@
         </a:defRPr>
       </a:lvl3pPr>
       <a:lvl4pPr algn="l" defTabSz="914400" eaLnBrk="1" hangingPunct="1" latinLnBrk="0" marL="1371600" rtl="0">
-        <a:defRPr kern="1200" sz="1800">
+        <a:defRPr kern="1200" sz="2000">
           <a:solidFill>
             <a:schemeClr val="tx1"/>
           </a:solidFill>
@@ -3217,7 +4786,7 @@
         </a:defRPr>
       </a:lvl4pPr>
       <a:lvl5pPr algn="l" defTabSz="914400" eaLnBrk="1" hangingPunct="1" latinLnBrk="0" marL="1828800" rtl="0">
-        <a:defRPr kern="1200" sz="1800">
+        <a:defRPr kern="1200" sz="2000">
           <a:solidFill>
             <a:schemeClr val="tx1"/>
           </a:solidFill>
@@ -3227,7 +4796,7 @@
         </a:defRPr>
       </a:lvl5pPr>
       <a:lvl6pPr algn="l" defTabSz="914400" eaLnBrk="1" hangingPunct="1" latinLnBrk="0" marL="2286000" rtl="0">
-        <a:defRPr kern="1200" sz="1800">
+        <a:defRPr kern="1200" sz="2000">
           <a:solidFill>
             <a:schemeClr val="tx1"/>
           </a:solidFill>
@@ -3237,7 +4806,7 @@
         </a:defRPr>
       </a:lvl6pPr>
       <a:lvl7pPr algn="l" defTabSz="914400" eaLnBrk="1" hangingPunct="1" latinLnBrk="0" marL="2743200" rtl="0">
-        <a:defRPr kern="1200" sz="1800">
+        <a:defRPr kern="1200" sz="2000">
           <a:solidFill>
             <a:schemeClr val="tx1"/>
           </a:solidFill>
@@ -3247,7 +4816,7 @@
         </a:defRPr>
       </a:lvl7pPr>
       <a:lvl8pPr algn="l" defTabSz="914400" eaLnBrk="1" hangingPunct="1" latinLnBrk="0" marL="3200400" rtl="0">
-        <a:defRPr kern="1200" sz="1800">
+        <a:defRPr kern="1200" sz="2000">
           <a:solidFill>
             <a:schemeClr val="tx1"/>
           </a:solidFill>
@@ -3257,7 +4826,7 @@
         </a:defRPr>
       </a:lvl8pPr>
       <a:lvl9pPr algn="l" defTabSz="914400" eaLnBrk="1" hangingPunct="1" latinLnBrk="0" marL="3657600" rtl="0">
-        <a:defRPr kern="1200" sz="1800">
+        <a:defRPr kern="1200" sz="2000">
           <a:solidFill>
             <a:schemeClr val="tx1"/>
           </a:solidFill>
@@ -3321,7 +4890,7 @@
             </a:pPr>
             <a:r>
               <a:rPr/>
-              <a:t>Peer Review</a:t>
+              <a:t>Review the Draft</a:t>
             </a:r>
           </a:p>
         </p:txBody>
@@ -3352,13 +4921,13 @@
             </a:pPr>
             <a:r>
               <a:rPr/>
-              <a:t>Lab 10</a:t>
+              <a:t>Lab 10 · Peer Review and Revision</a:t>
             </a:r>
             <a:br/>
             <a:br/>
             <a:r>
               <a:rPr/>
-              <a:t>PSYCH 350-Lab</a:t>
+              <a:t>PSYC 350 Laboratory</a:t>
             </a:r>
           </a:p>
         </p:txBody>
@@ -3410,237 +4979,98 @@
             </a:pPr>
             <a:r>
               <a:rPr/>
-              <a:t>Weak vs. Strong Feedback</a:t>
-            </a:r>
-          </a:p>
-        </p:txBody>
-      </p:sp>
-      <p:sp>
-        <p:nvSpPr>
-          <p:cNvPr id="1011" name="callout-caution" descr="caution callout: Weak. “Unclear.”“Good job!”“Fix your methods section.”“I didn’t like the discussion.”"/>
-          <p:cNvSpPr/>
+              <a:t>9 Review the method for replication</a:t>
+            </a:r>
+          </a:p>
+        </p:txBody>
+      </p:sp>
+      <p:pic>
+        <p:nvPicPr>
+          <p:cNvPr descr="A humorous recipe-style graphic illustrating that a method section should let another researcher reproduce the work" id="0" name="Picture 1"/>
+          <p:cNvPicPr>
+            <a:picLocks noGrp="1" noChangeAspect="1"/>
+          </p:cNvPicPr>
           <p:nvPr/>
-        </p:nvSpPr>
-        <p:spPr>
+        </p:nvPicPr>
+        <p:blipFill>
+          <a:blip r:embed="rId3"/>
+          <a:stretch>
+            <a:fillRect/>
+          </a:stretch>
+        </p:blipFill>
+        <p:spPr bwMode="auto">
           <a:xfrm>
-            <a:off x="1097280" y="2633472"/>
-            <a:ext cx="9994392" cy="899160"/>
+            <a:off x="1993900" y="2628900"/>
+            <a:ext cx="3098800" cy="3098800"/>
           </a:xfrm>
-          <a:prstGeom prst="roundRect">
-            <a:avLst>
-              <a:gd name="adj" fmla="val 6000"/>
-            </a:avLst>
+          <a:prstGeom prst="rect">
+            <a:avLst/>
           </a:prstGeom>
-          <a:solidFill>
-            <a:srgbClr val="FEFDFA"/>
-          </a:solidFill>
-          <a:ln w="19050">
-            <a:solidFill>
-              <a:srgbClr val="B38F00"/>
-            </a:solidFill>
+          <a:noFill/>
+          <a:ln w="9525">
+            <a:noFill/>
+            <a:headEnd/>
+            <a:tailEnd/>
           </a:ln>
         </p:spPr>
-        <p:txBody>
-          <a:bodyPr lIns="91440" tIns="68580" rIns="91440" bIns="68580" anchor="t" wrap="square">
-            <a:normAutofit/>
-          </a:bodyPr>
-          <a:lstStyle/>
-          <a:p/>
-        </p:txBody>
-      </p:sp>
-      <p:sp>
-        <p:nvSpPr>
-          <p:cNvPr id="1012" name="callout-title" descr=""/>
-          <p:cNvSpPr/>
-          <p:nvPr/>
-        </p:nvSpPr>
-        <p:spPr>
-          <a:xfrm>
-            <a:off x="1097280" y="2633472"/>
-            <a:ext cx="9994392" cy="320040"/>
-          </a:xfrm>
-          <a:prstGeom prst="roundRect">
-            <a:avLst>
-              <a:gd name="adj" fmla="val 6000"/>
-            </a:avLst>
-          </a:prstGeom>
-          <a:solidFill>
-            <a:srgbClr val="B38F00"/>
-          </a:solidFill>
-          <a:ln>
-            <a:noFill/>
-          </a:ln>
-        </p:spPr>
-        <p:txBody>
-          <a:bodyPr lIns="91440" tIns="68580" rIns="91440" bIns="68580" anchor="t" wrap="square">
-            <a:normAutofit/>
-          </a:bodyPr>
-          <a:lstStyle/>
-          <a:p>
-            <a:pPr algn="l"/>
-            <a:r>
-              <a:rPr lang="en-US" sz="1400" b="1" dirty="0">
-                <a:solidFill>
-                  <a:srgbClr val="FEFDFA"/>
-                </a:solidFill>
-              </a:rPr>
-              <a:t>Weak</a:t>
-            </a:r>
-          </a:p>
-        </p:txBody>
-      </p:sp>
-      <p:sp>
-        <p:nvSpPr>
-          <p:cNvPr id="1013" name="callout-body" descr=""/>
-          <p:cNvSpPr/>
-          <p:nvPr/>
-        </p:nvSpPr>
-        <p:spPr>
-          <a:xfrm>
-            <a:off x="1097280" y="2953512"/>
-            <a:ext cx="9994392" cy="579120"/>
-          </a:xfrm>
-          <a:prstGeom prst="roundRect">
-            <a:avLst>
-              <a:gd name="adj" fmla="val 6000"/>
-            </a:avLst>
-          </a:prstGeom>
-          <a:solidFill>
-            <a:srgbClr val="FEFDFA"/>
-          </a:solidFill>
-          <a:ln>
-            <a:noFill/>
-          </a:ln>
-        </p:spPr>
-        <p:txBody>
-          <a:bodyPr lIns="91440" tIns="68580" rIns="91440" bIns="68580" anchor="t" wrap="square">
-            <a:normAutofit/>
-          </a:bodyPr>
-          <a:lstStyle/>
-          <a:p>
-            <a:pPr algn="l"/>
-            <a:r>
-              <a:rPr lang="en-US" sz="1200" b="0" dirty="0">
-                <a:solidFill>
-                  <a:srgbClr val="010B13"/>
-                </a:solidFill>
-              </a:rPr>
-              <a:t>“Unclear.”“Good job!”“Fix your methods section.”“I didn’t like the discussion.”</a:t>
-            </a:r>
-          </a:p>
-        </p:txBody>
-      </p:sp>
-      <p:sp>
-        <p:nvSpPr>
-          <p:cNvPr id="1014" name="callout-tip" descr="tip callout: Strong. “The gap statement is in paragraph 1 but the RQ doesn’t appear until paragraph 4 — I lost the thread. Move the RQ up?”“Participants: how were they recruited? I couldn’t replicate this from what’s written.”“Your F is significant but I can’t tell which groups differed — where are the post-hocs?”"/>
-          <p:cNvSpPr/>
-          <p:nvPr/>
-        </p:nvSpPr>
-        <p:spPr>
-          <a:xfrm>
-            <a:off x="1097280" y="3624072"/>
-            <a:ext cx="9994392" cy="1264920"/>
-          </a:xfrm>
-          <a:prstGeom prst="roundRect">
-            <a:avLst>
-              <a:gd name="adj" fmla="val 6000"/>
-            </a:avLst>
-          </a:prstGeom>
-          <a:solidFill>
-            <a:srgbClr val="FEFDFA"/>
-          </a:solidFill>
-          <a:ln w="19050">
-            <a:solidFill>
-              <a:srgbClr val="009955"/>
-            </a:solidFill>
-          </a:ln>
-        </p:spPr>
-        <p:txBody>
-          <a:bodyPr lIns="91440" tIns="68580" rIns="91440" bIns="68580" anchor="t" wrap="square">
-            <a:normAutofit/>
-          </a:bodyPr>
-          <a:lstStyle/>
-          <a:p/>
-        </p:txBody>
-      </p:sp>
-      <p:sp>
-        <p:nvSpPr>
-          <p:cNvPr id="1015" name="callout-title" descr=""/>
-          <p:cNvSpPr/>
-          <p:nvPr/>
-        </p:nvSpPr>
-        <p:spPr>
-          <a:xfrm>
-            <a:off x="1097280" y="3624072"/>
-            <a:ext cx="9994392" cy="320040"/>
-          </a:xfrm>
-          <a:prstGeom prst="roundRect">
-            <a:avLst>
-              <a:gd name="adj" fmla="val 6000"/>
-            </a:avLst>
-          </a:prstGeom>
-          <a:solidFill>
-            <a:srgbClr val="009955"/>
-          </a:solidFill>
-          <a:ln>
-            <a:noFill/>
-          </a:ln>
-        </p:spPr>
-        <p:txBody>
-          <a:bodyPr lIns="91440" tIns="68580" rIns="91440" bIns="68580" anchor="t" wrap="square">
-            <a:normAutofit/>
-          </a:bodyPr>
-          <a:lstStyle/>
-          <a:p>
-            <a:pPr algn="l"/>
-            <a:r>
-              <a:rPr lang="en-US" sz="1400" b="1" dirty="0">
-                <a:solidFill>
-                  <a:srgbClr val="FEFDFA"/>
-                </a:solidFill>
-              </a:rPr>
-              <a:t>Strong</a:t>
-            </a:r>
-          </a:p>
-        </p:txBody>
-      </p:sp>
-      <p:sp>
-        <p:nvSpPr>
-          <p:cNvPr id="1016" name="callout-body" descr=""/>
-          <p:cNvSpPr/>
-          <p:nvPr/>
-        </p:nvSpPr>
-        <p:spPr>
-          <a:xfrm>
-            <a:off x="1097280" y="3944112"/>
-            <a:ext cx="9994392" cy="944880"/>
-          </a:xfrm>
-          <a:prstGeom prst="roundRect">
-            <a:avLst>
-              <a:gd name="adj" fmla="val 6000"/>
-            </a:avLst>
-          </a:prstGeom>
-          <a:solidFill>
-            <a:srgbClr val="FEFDFA"/>
-          </a:solidFill>
-          <a:ln>
-            <a:noFill/>
-          </a:ln>
-        </p:spPr>
-        <p:txBody>
-          <a:bodyPr lIns="91440" tIns="68580" rIns="91440" bIns="68580" anchor="t" wrap="square">
-            <a:normAutofit/>
-          </a:bodyPr>
-          <a:lstStyle/>
-          <a:p>
-            <a:pPr algn="l"/>
-            <a:r>
-              <a:rPr lang="en-US" sz="1200" b="0" dirty="0">
-                <a:solidFill>
-                  <a:srgbClr val="010B13"/>
-                </a:solidFill>
-              </a:rPr>
-              <a:t>“The gap statement is in paragraph 1 but the RQ doesn’t appear until paragraph 4 — I lost the thread. Move the RQ up?”“Participants: how were they recruited? I couldn’t replicate this from what’s written.”“Your F is significant but I can’t tell which groups differed — where are the post-hocs?”</a:t>
+      </p:pic>
+      <p:sp>
+        <p:nvSpPr>
+          <p:cNvPr id="4" name="Content Placeholder 3"/>
+          <p:cNvSpPr>
+            <a:spLocks noGrp="1"/>
+          </p:cNvSpPr>
+          <p:nvPr>
+            <p:ph idx="2" sz="half"/>
+          </p:nvPr>
+        </p:nvSpPr>
+        <p:spPr/>
+        <p:txBody>
+          <a:bodyPr/>
+          <a:lstStyle/>
+          <a:p>
+            <a:pPr lvl="0" indent="0" marL="0">
+              <a:buNone/>
+            </a:pPr>
+            <a:r>
+              <a:rPr/>
+              <a:t>Read as if you had to repeat the study:</a:t>
+            </a:r>
+          </a:p>
+          <a:p>
+            <a:pPr lvl="0" indent="-457200" marL="457200">
+              <a:buAutoNum type="arabicPeriod"/>
+            </a:pPr>
+            <a:r>
+              <a:rPr/>
+              <a:t>Who or what was sampled?</a:t>
+            </a:r>
+          </a:p>
+          <a:p>
+            <a:pPr lvl="0" indent="-457200" marL="457200">
+              <a:buAutoNum type="arabicPeriod"/>
+            </a:pPr>
+            <a:r>
+              <a:rPr/>
+              <a:t>How were variables measured or coded?</a:t>
+            </a:r>
+          </a:p>
+          <a:p>
+            <a:pPr lvl="0" indent="-457200" marL="457200">
+              <a:buAutoNum type="arabicPeriod"/>
+            </a:pPr>
+            <a:r>
+              <a:rPr/>
+              <a:t>What happened, in order?</a:t>
+            </a:r>
+          </a:p>
+          <a:p>
+            <a:pPr lvl="0" indent="-457200" marL="457200">
+              <a:buAutoNum type="arabicPeriod"/>
+            </a:pPr>
+            <a:r>
+              <a:rPr/>
+              <a:t>What data decisions were made?</a:t>
             </a:r>
           </a:p>
         </p:txBody>
@@ -3692,165 +5122,101 @@
             </a:pPr>
             <a:r>
               <a:rPr/>
-              <a:t>A Formula That Works: Describe → Diagnose → Suggest</a:t>
-            </a:r>
-          </a:p>
-        </p:txBody>
-      </p:sp>
-      <p:sp>
-        <p:nvSpPr>
-          <p:cNvPr id="1017" name="prose" descr=""/>
-          <p:cNvSpPr/>
+              <a:t>10 Review results without rewriting them</a:t>
+            </a:r>
+          </a:p>
+        </p:txBody>
+      </p:sp>
+      <p:sp>
+        <p:nvSpPr>
+          <p:cNvPr id="3" name="Content Placeholder 2"/>
+          <p:cNvSpPr>
+            <a:spLocks noGrp="1"/>
+          </p:cNvSpPr>
+          <p:nvPr>
+            <p:ph idx="1" sz="half"/>
+          </p:nvPr>
+        </p:nvSpPr>
+        <p:spPr/>
+        <p:txBody>
+          <a:bodyPr/>
+          <a:lstStyle/>
+          <a:p>
+            <a:pPr lvl="0" indent="0" marL="0">
+              <a:buNone/>
+            </a:pPr>
+            <a:r>
+              <a:rPr/>
+              <a:t>Check that the Results section:</a:t>
+            </a:r>
+          </a:p>
+          <a:p>
+            <a:pPr lvl="0"/>
+            <a:r>
+              <a:rPr/>
+              <a:t>follows the RH order</a:t>
+            </a:r>
+          </a:p>
+          <a:p>
+            <a:pPr lvl="0"/>
+            <a:r>
+              <a:rPr/>
+              <a:t>reports descriptives before tests</a:t>
+            </a:r>
+          </a:p>
+          <a:p>
+            <a:pPr lvl="0"/>
+            <a:r>
+              <a:rPr/>
+              <a:t>includes required statistics</a:t>
+            </a:r>
+          </a:p>
+          <a:p>
+            <a:pPr lvl="0"/>
+            <a:r>
+              <a:rPr/>
+              <a:t>refers to every table or figure</a:t>
+            </a:r>
+          </a:p>
+          <a:p>
+            <a:pPr lvl="0"/>
+            <a:r>
+              <a:rPr/>
+              <a:t>saves interpretation for Discussion</a:t>
+            </a:r>
+          </a:p>
+        </p:txBody>
+      </p:sp>
+      <p:pic>
+        <p:nvPicPr>
+          <p:cNvPr descr="A marked-up page with highlighted passages, illustrating a reviewer tracing consistency among hypotheses, statistics, tables, and prose" id="0" name="Picture 1"/>
+          <p:cNvPicPr>
+            <a:picLocks noGrp="1" noChangeAspect="1"/>
+          </p:cNvPicPr>
           <p:nvPr/>
-        </p:nvSpPr>
-        <p:spPr>
+        </p:nvPicPr>
+        <p:blipFill>
+          <a:blip r:embed="rId3"/>
+          <a:stretch>
+            <a:fillRect/>
+          </a:stretch>
+        </p:blipFill>
+        <p:spPr bwMode="auto">
           <a:xfrm>
-            <a:off x="1097280" y="2633472"/>
-            <a:ext cx="9994392" cy="548640"/>
+            <a:off x="7505700" y="2628900"/>
+            <a:ext cx="2260600" cy="3098800"/>
           </a:xfrm>
-          <a:prstGeom prst="roundRect">
-            <a:avLst>
-              <a:gd name="adj" fmla="val 6000"/>
-            </a:avLst>
+          <a:prstGeom prst="rect">
+            <a:avLst/>
           </a:prstGeom>
           <a:noFill/>
-          <a:ln>
+          <a:ln w="9525">
             <a:noFill/>
+            <a:headEnd/>
+            <a:tailEnd/>
           </a:ln>
         </p:spPr>
-        <p:txBody>
-          <a:bodyPr lIns="91440" tIns="68580" rIns="91440" bIns="68580" anchor="t" wrap="square">
-            <a:normAutofit/>
-          </a:bodyPr>
-          <a:lstStyle/>
-          <a:p>
-            <a:pPr algn="l"/>
-            <a:r>
-              <a:rPr lang="en-US" sz="1200" b="0" dirty="0">
-                <a:solidFill>
-                  <a:srgbClr val="010B13"/>
-                </a:solidFill>
-              </a:rPr>
-              <a:t>Describe: “Your introduction spends 3 paragraphs on Topic A before mentioning your core variable…”Diagnose: “…so by the time I hit your hypothesis I couldn’t tell how A connects to it.”Suggest: “Try leading with the core variable’s definition and folding A in as background.”</a:t>
-            </a:r>
-          </a:p>
-        </p:txBody>
-      </p:sp>
-      <p:sp>
-        <p:nvSpPr>
-          <p:cNvPr id="1018" name="callout-tip" descr="tip callout: Tip. Notice what’s missing: your taste. You’re reporting what happens in a reader’s head — that’s data the author cannot get any other way."/>
-          <p:cNvSpPr/>
-          <p:nvPr/>
-        </p:nvSpPr>
-        <p:spPr>
-          <a:xfrm>
-            <a:off x="1097280" y="3273552"/>
-            <a:ext cx="9994392" cy="1082040"/>
-          </a:xfrm>
-          <a:prstGeom prst="roundRect">
-            <a:avLst>
-              <a:gd name="adj" fmla="val 6000"/>
-            </a:avLst>
-          </a:prstGeom>
-          <a:solidFill>
-            <a:srgbClr val="FEFDFA"/>
-          </a:solidFill>
-          <a:ln w="19050">
-            <a:solidFill>
-              <a:srgbClr val="009955"/>
-            </a:solidFill>
-          </a:ln>
-        </p:spPr>
-        <p:txBody>
-          <a:bodyPr lIns="91440" tIns="68580" rIns="91440" bIns="68580" anchor="t" wrap="square">
-            <a:normAutofit/>
-          </a:bodyPr>
-          <a:lstStyle/>
-          <a:p/>
-        </p:txBody>
-      </p:sp>
-      <p:sp>
-        <p:nvSpPr>
-          <p:cNvPr id="1019" name="callout-title" descr=""/>
-          <p:cNvSpPr/>
-          <p:nvPr/>
-        </p:nvSpPr>
-        <p:spPr>
-          <a:xfrm>
-            <a:off x="1097280" y="3273552"/>
-            <a:ext cx="9994392" cy="320040"/>
-          </a:xfrm>
-          <a:prstGeom prst="roundRect">
-            <a:avLst>
-              <a:gd name="adj" fmla="val 6000"/>
-            </a:avLst>
-          </a:prstGeom>
-          <a:solidFill>
-            <a:srgbClr val="009955"/>
-          </a:solidFill>
-          <a:ln>
-            <a:noFill/>
-          </a:ln>
-        </p:spPr>
-        <p:txBody>
-          <a:bodyPr lIns="91440" tIns="68580" rIns="91440" bIns="68580" anchor="t" wrap="square">
-            <a:normAutofit/>
-          </a:bodyPr>
-          <a:lstStyle/>
-          <a:p>
-            <a:pPr algn="l"/>
-            <a:r>
-              <a:rPr lang="en-US" sz="1400" b="1" dirty="0">
-                <a:solidFill>
-                  <a:srgbClr val="FEFDFA"/>
-                </a:solidFill>
-              </a:rPr>
-              <a:t>Tip</a:t>
-            </a:r>
-          </a:p>
-        </p:txBody>
-      </p:sp>
-      <p:sp>
-        <p:nvSpPr>
-          <p:cNvPr id="1020" name="callout-body" descr=""/>
-          <p:cNvSpPr/>
-          <p:nvPr/>
-        </p:nvSpPr>
-        <p:spPr>
-          <a:xfrm>
-            <a:off x="1097280" y="3593592"/>
-            <a:ext cx="9994392" cy="762000"/>
-          </a:xfrm>
-          <a:prstGeom prst="roundRect">
-            <a:avLst>
-              <a:gd name="adj" fmla="val 6000"/>
-            </a:avLst>
-          </a:prstGeom>
-          <a:solidFill>
-            <a:srgbClr val="FEFDFA"/>
-          </a:solidFill>
-          <a:ln>
-            <a:noFill/>
-          </a:ln>
-        </p:spPr>
-        <p:txBody>
-          <a:bodyPr lIns="91440" tIns="68580" rIns="91440" bIns="68580" anchor="t" wrap="square">
-            <a:normAutofit/>
-          </a:bodyPr>
-          <a:lstStyle/>
-          <a:p>
-            <a:pPr algn="l"/>
-            <a:r>
-              <a:rPr lang="en-US" sz="1200" b="0" dirty="0">
-                <a:solidFill>
-                  <a:srgbClr val="010B13"/>
-                </a:solidFill>
-              </a:rPr>
-              <a:t>Notice what’s missing: your taste. You’re reporting what happens in a reader’s head — that’s data the author cannot get any other way.</a:t>
-            </a:r>
-          </a:p>
-        </p:txBody>
-      </p:sp>
+      </p:pic>
     </p:spTree>
   </p:cSld>
 </p:sld>
@@ -3883,20 +5249,67 @@
             <p:ph type="title"/>
           </p:nvPr>
         </p:nvSpPr>
-        <p:spPr bwMode="blackWhite">
+        <p:spPr>
           <a:xfrm>
-            <a:off x="1097280" y="2386744"/>
-            <a:ext cx="9997440" cy="1645920"/>
+            <a:off x="1097280" y="964692"/>
+            <a:ext cx="9997440" cy="1188720"/>
           </a:xfrm>
-          <a:solidFill>
-            <a:srgbClr val="FFFFFF"/>
-          </a:solidFill>
-          <a:ln w="38100">
-            <a:solidFill>
-              <a:srgbClr val="404040"/>
-            </a:solidFill>
+        </p:spPr>
+        <p:txBody>
+          <a:bodyPr/>
+          <a:lstStyle/>
+          <a:p>
+            <a:pPr lvl="0" indent="0" marL="0">
+              <a:buNone/>
+            </a:pPr>
+            <a:r>
+              <a:rPr/>
+              <a:t>11 Review the discussion’s story</a:t>
+            </a:r>
+          </a:p>
+        </p:txBody>
+      </p:sp>
+      <p:pic>
+        <p:nvPicPr>
+          <p:cNvPr descr="A humorous breakdown graphic used to illustrate that a discussion should organize findings into a coherent story rather than merely repeat results" id="0" name="Picture 1"/>
+          <p:cNvPicPr>
+            <a:picLocks noGrp="1" noChangeAspect="1"/>
+          </p:cNvPicPr>
+          <p:nvPr/>
+        </p:nvPicPr>
+        <p:blipFill>
+          <a:blip r:embed="rId3"/>
+          <a:stretch>
+            <a:fillRect/>
+          </a:stretch>
+        </p:blipFill>
+        <p:spPr bwMode="auto">
+          <a:xfrm>
+            <a:off x="1968500" y="2628900"/>
+            <a:ext cx="3136900" cy="3098800"/>
+          </a:xfrm>
+          <a:prstGeom prst="rect">
+            <a:avLst/>
+          </a:prstGeom>
+          <a:noFill/>
+          <a:ln w="9525">
+            <a:noFill/>
+            <a:headEnd/>
+            <a:tailEnd/>
           </a:ln>
         </p:spPr>
+      </p:pic>
+      <p:sp>
+        <p:nvSpPr>
+          <p:cNvPr id="4" name="Content Placeholder 3"/>
+          <p:cNvSpPr>
+            <a:spLocks noGrp="1"/>
+          </p:cNvSpPr>
+          <p:nvPr>
+            <p:ph idx="2" sz="half"/>
+          </p:nvPr>
+        </p:nvSpPr>
+        <p:spPr/>
         <p:txBody>
           <a:bodyPr/>
           <a:lstStyle/>
@@ -3906,7 +5319,52 @@
             </a:pPr>
             <a:r>
               <a:rPr/>
-              <a:t>Reviewing Section by Section</a:t>
+              <a:t>Look for:</a:t>
+            </a:r>
+          </a:p>
+          <a:p>
+            <a:pPr lvl="0" indent="-457200" marL="457200">
+              <a:buAutoNum type="arabicPeriod"/>
+            </a:pPr>
+            <a:r>
+              <a:rPr/>
+              <a:t>answers to the research questions</a:t>
+            </a:r>
+          </a:p>
+          <a:p>
+            <a:pPr lvl="0" indent="-457200" marL="457200">
+              <a:buAutoNum type="arabicPeriod"/>
+            </a:pPr>
+            <a:r>
+              <a:rPr/>
+              <a:t>links back to prior literature</a:t>
+            </a:r>
+          </a:p>
+          <a:p>
+            <a:pPr lvl="0" indent="-457200" marL="457200">
+              <a:buAutoNum type="arabicPeriod"/>
+            </a:pPr>
+            <a:r>
+              <a:rPr/>
+              <a:t>calibrated interpretation</a:t>
+            </a:r>
+          </a:p>
+          <a:p>
+            <a:pPr lvl="0" indent="-457200" marL="457200">
+              <a:buAutoNum type="arabicPeriod"/>
+            </a:pPr>
+            <a:r>
+              <a:rPr/>
+              <a:t>validity-specific limitations</a:t>
+            </a:r>
+          </a:p>
+          <a:p>
+            <a:pPr lvl="0" indent="-457200" marL="457200">
+              <a:buAutoNum type="arabicPeriod"/>
+            </a:pPr>
+            <a:r>
+              <a:rPr/>
+              <a:t>a justified next study</a:t>
             </a:r>
           </a:p>
         </p:txBody>
@@ -3958,165 +5416,101 @@
             </a:pPr>
             <a:r>
               <a:rPr/>
-              <a:t>Introduction</a:t>
-            </a:r>
-          </a:p>
-        </p:txBody>
-      </p:sp>
-      <p:sp>
-        <p:nvSpPr>
-          <p:cNvPr id="1021" name="prose" descr=""/>
-          <p:cNvSpPr/>
+              <a:t>12 Save APA polish for last</a:t>
+            </a:r>
+          </a:p>
+        </p:txBody>
+      </p:sp>
+      <p:sp>
+        <p:nvSpPr>
+          <p:cNvPr id="3" name="Content Placeholder 2"/>
+          <p:cNvSpPr>
+            <a:spLocks noGrp="1"/>
+          </p:cNvSpPr>
+          <p:nvPr>
+            <p:ph idx="1" sz="half"/>
+          </p:nvPr>
+        </p:nvSpPr>
+        <p:spPr/>
+        <p:txBody>
+          <a:bodyPr/>
+          <a:lstStyle/>
+          <a:p>
+            <a:pPr lvl="0" indent="0" marL="0">
+              <a:buNone/>
+            </a:pPr>
+            <a:r>
+              <a:rPr/>
+              <a:t>After content and structure, check:</a:t>
+            </a:r>
+          </a:p>
+          <a:p>
+            <a:pPr lvl="0"/>
+            <a:r>
+              <a:rPr/>
+              <a:t>headings and section order</a:t>
+            </a:r>
+          </a:p>
+          <a:p>
+            <a:pPr lvl="0"/>
+            <a:r>
+              <a:rPr/>
+              <a:t>citations and references</a:t>
+            </a:r>
+          </a:p>
+          <a:p>
+            <a:pPr lvl="0"/>
+            <a:r>
+              <a:rPr/>
+              <a:t>statistical notation</a:t>
+            </a:r>
+          </a:p>
+          <a:p>
+            <a:pPr lvl="0"/>
+            <a:r>
+              <a:rPr/>
+              <a:t>table and figure formatting</a:t>
+            </a:r>
+          </a:p>
+          <a:p>
+            <a:pPr lvl="0"/>
+            <a:r>
+              <a:rPr/>
+              <a:t>proofreading and consistency</a:t>
+            </a:r>
+          </a:p>
+        </p:txBody>
+      </p:sp>
+      <p:pic>
+        <p:nvPicPr>
+          <p:cNvPr descr="A collage of APA manuals representing the final style and formatting pass after substantive revision is complete" id="0" name="Picture 1"/>
+          <p:cNvPicPr>
+            <a:picLocks noGrp="1" noChangeAspect="1"/>
+          </p:cNvPicPr>
           <p:nvPr/>
-        </p:nvSpPr>
-        <p:spPr>
+        </p:nvPicPr>
+        <p:blipFill>
+          <a:blip r:embed="rId3"/>
+          <a:stretch>
+            <a:fillRect/>
+          </a:stretch>
+        </p:blipFill>
+        <p:spPr bwMode="auto">
           <a:xfrm>
-            <a:off x="1097280" y="2633472"/>
-            <a:ext cx="9994392" cy="365760"/>
+            <a:off x="7124700" y="2628900"/>
+            <a:ext cx="3022600" cy="3098800"/>
           </a:xfrm>
-          <a:prstGeom prst="roundRect">
-            <a:avLst>
-              <a:gd name="adj" fmla="val 6000"/>
-            </a:avLst>
+          <a:prstGeom prst="rect">
+            <a:avLst/>
           </a:prstGeom>
           <a:noFill/>
-          <a:ln>
+          <a:ln w="9525">
             <a:noFill/>
+            <a:headEnd/>
+            <a:tailEnd/>
           </a:ln>
         </p:spPr>
-        <p:txBody>
-          <a:bodyPr lIns="91440" tIns="68580" rIns="91440" bIns="68580" anchor="t" wrap="square">
-            <a:normAutofit/>
-          </a:bodyPr>
-          <a:lstStyle/>
-          <a:p>
-            <a:pPr algn="l"/>
-            <a:r>
-              <a:rPr lang="en-US" sz="1200" b="0" dirty="0">
-                <a:solidFill>
-                  <a:srgbClr val="010B13"/>
-                </a:solidFill>
-              </a:rPr>
-              <a:t>Does it funnel? General topic → gap → current studyCan you find, in one sentence each:the research question or hypotheses?the gap the study fills?Are key constructs defined and prior work cited?</a:t>
-            </a:r>
-          </a:p>
-        </p:txBody>
-      </p:sp>
-      <p:sp>
-        <p:nvSpPr>
-          <p:cNvPr id="1022" name="callout-tip" descr="tip callout: Tip. Litmus test: after reading only the intro, can you predict what the Method will measure?"/>
-          <p:cNvSpPr/>
-          <p:nvPr/>
-        </p:nvSpPr>
-        <p:spPr>
-          <a:xfrm>
-            <a:off x="1097280" y="3090672"/>
-            <a:ext cx="9994392" cy="899160"/>
-          </a:xfrm>
-          <a:prstGeom prst="roundRect">
-            <a:avLst>
-              <a:gd name="adj" fmla="val 6000"/>
-            </a:avLst>
-          </a:prstGeom>
-          <a:solidFill>
-            <a:srgbClr val="FEFDFA"/>
-          </a:solidFill>
-          <a:ln w="19050">
-            <a:solidFill>
-              <a:srgbClr val="009955"/>
-            </a:solidFill>
-          </a:ln>
-        </p:spPr>
-        <p:txBody>
-          <a:bodyPr lIns="91440" tIns="68580" rIns="91440" bIns="68580" anchor="t" wrap="square">
-            <a:normAutofit/>
-          </a:bodyPr>
-          <a:lstStyle/>
-          <a:p/>
-        </p:txBody>
-      </p:sp>
-      <p:sp>
-        <p:nvSpPr>
-          <p:cNvPr id="1023" name="callout-title" descr=""/>
-          <p:cNvSpPr/>
-          <p:nvPr/>
-        </p:nvSpPr>
-        <p:spPr>
-          <a:xfrm>
-            <a:off x="1097280" y="3090672"/>
-            <a:ext cx="9994392" cy="320040"/>
-          </a:xfrm>
-          <a:prstGeom prst="roundRect">
-            <a:avLst>
-              <a:gd name="adj" fmla="val 6000"/>
-            </a:avLst>
-          </a:prstGeom>
-          <a:solidFill>
-            <a:srgbClr val="009955"/>
-          </a:solidFill>
-          <a:ln>
-            <a:noFill/>
-          </a:ln>
-        </p:spPr>
-        <p:txBody>
-          <a:bodyPr lIns="91440" tIns="68580" rIns="91440" bIns="68580" anchor="t" wrap="square">
-            <a:normAutofit/>
-          </a:bodyPr>
-          <a:lstStyle/>
-          <a:p>
-            <a:pPr algn="l"/>
-            <a:r>
-              <a:rPr lang="en-US" sz="1400" b="1" dirty="0">
-                <a:solidFill>
-                  <a:srgbClr val="FEFDFA"/>
-                </a:solidFill>
-              </a:rPr>
-              <a:t>Tip</a:t>
-            </a:r>
-          </a:p>
-        </p:txBody>
-      </p:sp>
-      <p:sp>
-        <p:nvSpPr>
-          <p:cNvPr id="1024" name="callout-body" descr=""/>
-          <p:cNvSpPr/>
-          <p:nvPr/>
-        </p:nvSpPr>
-        <p:spPr>
-          <a:xfrm>
-            <a:off x="1097280" y="3410712"/>
-            <a:ext cx="9994392" cy="579120"/>
-          </a:xfrm>
-          <a:prstGeom prst="roundRect">
-            <a:avLst>
-              <a:gd name="adj" fmla="val 6000"/>
-            </a:avLst>
-          </a:prstGeom>
-          <a:solidFill>
-            <a:srgbClr val="FEFDFA"/>
-          </a:solidFill>
-          <a:ln>
-            <a:noFill/>
-          </a:ln>
-        </p:spPr>
-        <p:txBody>
-          <a:bodyPr lIns="91440" tIns="68580" rIns="91440" bIns="68580" anchor="t" wrap="square">
-            <a:normAutofit/>
-          </a:bodyPr>
-          <a:lstStyle/>
-          <a:p>
-            <a:pPr algn="l"/>
-            <a:r>
-              <a:rPr lang="en-US" sz="1200" b="0" dirty="0">
-                <a:solidFill>
-                  <a:srgbClr val="010B13"/>
-                </a:solidFill>
-              </a:rPr>
-              <a:t>Litmus test: after reading only the intro, can you predict what the Method will measure?</a:t>
-            </a:r>
-          </a:p>
-        </p:txBody>
-      </p:sp>
+      </p:pic>
     </p:spTree>
   </p:cSld>
 </p:sld>
@@ -4164,200 +5558,98 @@
             </a:pPr>
             <a:r>
               <a:rPr/>
-              <a:t>Method</a:t>
-            </a:r>
-          </a:p>
-        </p:txBody>
-      </p:sp>
-      <p:sp>
-        <p:nvSpPr>
-          <p:cNvPr id="1025" name="prose" descr=""/>
-          <p:cNvSpPr/>
+              <a:t>13 Receive feedback without defending</a:t>
+            </a:r>
+          </a:p>
+        </p:txBody>
+      </p:sp>
+      <p:pic>
+        <p:nvPicPr>
+          <p:cNvPr descr="A cartoon showing how people can interpret the same statement differently, illustrating why reader confusion is useful revision evidence" id="0" name="Picture 1"/>
+          <p:cNvPicPr>
+            <a:picLocks noGrp="1" noChangeAspect="1"/>
+          </p:cNvPicPr>
           <p:nvPr/>
-        </p:nvSpPr>
-        <p:spPr>
+        </p:nvPicPr>
+        <p:blipFill>
+          <a:blip r:embed="rId3"/>
+          <a:stretch>
+            <a:fillRect/>
+          </a:stretch>
+        </p:blipFill>
+        <p:spPr bwMode="auto">
           <a:xfrm>
-            <a:off x="1097280" y="2633472"/>
-            <a:ext cx="9994392" cy="182880"/>
+            <a:off x="1409700" y="2628900"/>
+            <a:ext cx="4267200" cy="3098800"/>
           </a:xfrm>
-          <a:prstGeom prst="roundRect">
-            <a:avLst>
-              <a:gd name="adj" fmla="val 6000"/>
-            </a:avLst>
+          <a:prstGeom prst="rect">
+            <a:avLst/>
           </a:prstGeom>
           <a:noFill/>
-          <a:ln>
+          <a:ln w="9525">
             <a:noFill/>
+            <a:headEnd/>
+            <a:tailEnd/>
           </a:ln>
         </p:spPr>
-        <p:txBody>
-          <a:bodyPr lIns="91440" tIns="68580" rIns="91440" bIns="68580" anchor="t" wrap="square">
-            <a:normAutofit/>
-          </a:bodyPr>
-          <a:lstStyle/>
-          <a:p>
-            <a:pPr algn="l"/>
-            <a:r>
-              <a:rPr lang="en-US" sz="1200" b="0" dirty="0">
-                <a:solidFill>
-                  <a:srgbClr val="010B13"/>
-                </a:solidFill>
-              </a:rPr>
-              <a:t>The recipe test: could you run this study from what’s written?</a:t>
-            </a:r>
-          </a:p>
-        </p:txBody>
-      </p:sp>
-      <p:sp>
-        <p:nvSpPr>
-          <p:cNvPr id="1026" name="prose" descr=""/>
-          <p:cNvSpPr/>
-          <p:nvPr/>
-        </p:nvSpPr>
-        <p:spPr>
-          <a:xfrm>
-            <a:off x="1097280" y="2907792"/>
-            <a:ext cx="9994392" cy="365760"/>
-          </a:xfrm>
-          <a:prstGeom prst="roundRect">
-            <a:avLst>
-              <a:gd name="adj" fmla="val 6000"/>
-            </a:avLst>
-          </a:prstGeom>
-          <a:noFill/>
-          <a:ln>
-            <a:noFill/>
-          </a:ln>
-        </p:spPr>
-        <p:txBody>
-          <a:bodyPr lIns="91440" tIns="68580" rIns="91440" bIns="68580" anchor="t" wrap="square">
-            <a:normAutofit/>
-          </a:bodyPr>
-          <a:lstStyle/>
-          <a:p>
-            <a:pPr algn="l"/>
-            <a:r>
-              <a:rPr lang="en-US" sz="1200" b="0" dirty="0">
-                <a:solidFill>
-                  <a:srgbClr val="010B13"/>
-                </a:solidFill>
-              </a:rPr>
-              <a:t>Participants: who, how many, how selected, relevant demographics?Materials: how was each variable measured? Range of values?Procedure: what actually happened, in order? Where? Design?</a:t>
-            </a:r>
-          </a:p>
-        </p:txBody>
-      </p:sp>
-      <p:sp>
-        <p:nvSpPr>
-          <p:cNvPr id="1027" name="callout-warning" descr="warning callout: Warning. The most common Method problem in drafts: measures are named (“a questionnaire”) but not described (how many items, what scale, what a high score means)."/>
-          <p:cNvSpPr/>
-          <p:nvPr/>
-        </p:nvSpPr>
-        <p:spPr>
-          <a:xfrm>
-            <a:off x="1097280" y="3364992"/>
-            <a:ext cx="9994392" cy="1082040"/>
-          </a:xfrm>
-          <a:prstGeom prst="roundRect">
-            <a:avLst>
-              <a:gd name="adj" fmla="val 6000"/>
-            </a:avLst>
-          </a:prstGeom>
-          <a:solidFill>
-            <a:srgbClr val="FEFDFA"/>
-          </a:solidFill>
-          <a:ln w="19050">
-            <a:solidFill>
-              <a:srgbClr val="CC6600"/>
-            </a:solidFill>
-          </a:ln>
-        </p:spPr>
-        <p:txBody>
-          <a:bodyPr lIns="91440" tIns="68580" rIns="91440" bIns="68580" anchor="t" wrap="square">
-            <a:normAutofit/>
-          </a:bodyPr>
-          <a:lstStyle/>
-          <a:p/>
-        </p:txBody>
-      </p:sp>
-      <p:sp>
-        <p:nvSpPr>
-          <p:cNvPr id="1028" name="callout-title" descr=""/>
-          <p:cNvSpPr/>
-          <p:nvPr/>
-        </p:nvSpPr>
-        <p:spPr>
-          <a:xfrm>
-            <a:off x="1097280" y="3364992"/>
-            <a:ext cx="9994392" cy="320040"/>
-          </a:xfrm>
-          <a:prstGeom prst="roundRect">
-            <a:avLst>
-              <a:gd name="adj" fmla="val 6000"/>
-            </a:avLst>
-          </a:prstGeom>
-          <a:solidFill>
-            <a:srgbClr val="CC6600"/>
-          </a:solidFill>
-          <a:ln>
-            <a:noFill/>
-          </a:ln>
-        </p:spPr>
-        <p:txBody>
-          <a:bodyPr lIns="91440" tIns="68580" rIns="91440" bIns="68580" anchor="t" wrap="square">
-            <a:normAutofit/>
-          </a:bodyPr>
-          <a:lstStyle/>
-          <a:p>
-            <a:pPr algn="l"/>
-            <a:r>
-              <a:rPr lang="en-US" sz="1400" b="1" dirty="0">
-                <a:solidFill>
-                  <a:srgbClr val="FEFDFA"/>
-                </a:solidFill>
-              </a:rPr>
-              <a:t>Warning</a:t>
-            </a:r>
-          </a:p>
-        </p:txBody>
-      </p:sp>
-      <p:sp>
-        <p:nvSpPr>
-          <p:cNvPr id="1029" name="callout-body" descr=""/>
-          <p:cNvSpPr/>
-          <p:nvPr/>
-        </p:nvSpPr>
-        <p:spPr>
-          <a:xfrm>
-            <a:off x="1097280" y="3685032"/>
-            <a:ext cx="9994392" cy="762000"/>
-          </a:xfrm>
-          <a:prstGeom prst="roundRect">
-            <a:avLst>
-              <a:gd name="adj" fmla="val 6000"/>
-            </a:avLst>
-          </a:prstGeom>
-          <a:solidFill>
-            <a:srgbClr val="FEFDFA"/>
-          </a:solidFill>
-          <a:ln>
-            <a:noFill/>
-          </a:ln>
-        </p:spPr>
-        <p:txBody>
-          <a:bodyPr lIns="91440" tIns="68580" rIns="91440" bIns="68580" anchor="t" wrap="square">
-            <a:normAutofit/>
-          </a:bodyPr>
-          <a:lstStyle/>
-          <a:p>
-            <a:pPr algn="l"/>
-            <a:r>
-              <a:rPr lang="en-US" sz="1200" b="0" dirty="0">
-                <a:solidFill>
-                  <a:srgbClr val="010B13"/>
-                </a:solidFill>
-              </a:rPr>
-              <a:t>The most common Method problem in drafts: measures are named (“a questionnaire”) but not described (how many items, what scale, what a high score means).</a:t>
+      </p:pic>
+      <p:sp>
+        <p:nvSpPr>
+          <p:cNvPr id="4" name="Content Placeholder 3"/>
+          <p:cNvSpPr>
+            <a:spLocks noGrp="1"/>
+          </p:cNvSpPr>
+          <p:nvPr>
+            <p:ph idx="2" sz="half"/>
+          </p:nvPr>
+        </p:nvSpPr>
+        <p:spPr/>
+        <p:txBody>
+          <a:bodyPr/>
+          <a:lstStyle/>
+          <a:p>
+            <a:pPr lvl="0" indent="0" marL="0">
+              <a:buNone/>
+            </a:pPr>
+            <a:r>
+              <a:rPr/>
+              <a:t>When the draft returns:</a:t>
+            </a:r>
+          </a:p>
+          <a:p>
+            <a:pPr lvl="0" indent="-457200" marL="457200">
+              <a:buAutoNum type="arabicPeriod"/>
+            </a:pPr>
+            <a:r>
+              <a:rPr/>
+              <a:t>Read every comment.</a:t>
+            </a:r>
+          </a:p>
+          <a:p>
+            <a:pPr lvl="0" indent="-457200" marL="457200">
+              <a:buAutoNum type="arabicPeriod"/>
+            </a:pPr>
+            <a:r>
+              <a:rPr/>
+              <a:t>Find repeated reader problems.</a:t>
+            </a:r>
+          </a:p>
+          <a:p>
+            <a:pPr lvl="0" indent="-457200" marL="457200">
+              <a:buAutoNum type="arabicPeriod"/>
+            </a:pPr>
+            <a:r>
+              <a:rPr/>
+              <a:t>Separate high- from low-impact changes.</a:t>
+            </a:r>
+          </a:p>
+          <a:p>
+            <a:pPr lvl="0" indent="-457200" marL="457200">
+              <a:buAutoNum type="arabicPeriod"/>
+            </a:pPr>
+            <a:r>
+              <a:rPr/>
+              <a:t>Ask for clarification when needed.</a:t>
             </a:r>
           </a:p>
         </p:txBody>
@@ -4409,165 +5701,169 @@
             </a:pPr>
             <a:r>
               <a:rPr/>
-              <a:t>Results</a:t>
-            </a:r>
-          </a:p>
-        </p:txBody>
-      </p:sp>
-      <p:sp>
-        <p:nvSpPr>
-          <p:cNvPr id="1030" name="prose" descr=""/>
-          <p:cNvSpPr/>
-          <p:nvPr/>
-        </p:nvSpPr>
-        <p:spPr>
-          <a:xfrm>
-            <a:off x="1097280" y="2633472"/>
-            <a:ext cx="9994392" cy="548640"/>
-          </a:xfrm>
-          <a:prstGeom prst="roundRect">
-            <a:avLst>
-              <a:gd name="adj" fmla="val 6000"/>
-            </a:avLst>
-          </a:prstGeom>
-          <a:noFill/>
-          <a:ln>
-            <a:noFill/>
-          </a:ln>
-        </p:spPr>
-        <p:txBody>
-          <a:bodyPr lIns="91440" tIns="68580" rIns="91440" bIns="68580" anchor="t" wrap="square">
-            <a:normAutofit/>
-          </a:bodyPr>
-          <a:lstStyle/>
-          <a:p>
-            <a:pPr algn="l"/>
-            <a:r>
-              <a:rPr lang="en-US" sz="1200" b="0" dirty="0">
-                <a:solidFill>
-                  <a:srgbClr val="010B13"/>
-                </a:solidFill>
-              </a:rPr>
-              <a:t>Is every hypothesis answered, in an order you can follow?Does each analysis get a full APA sentence: statistic, dfs, value, p, interpretation?Univariates first? Outliers / transformations reported?Are numbers in the text consistent with any tables?</a:t>
-            </a:r>
-          </a:p>
-        </p:txBody>
-      </p:sp>
-      <p:sp>
-        <p:nvSpPr>
-          <p:cNvPr id="1031" name="callout-tip" descr="tip callout: Tip. Check their Lab 09 work: did a significant F with 3+ groups get post-hocs? Does an r get direction and strength?"/>
-          <p:cNvSpPr/>
-          <p:nvPr/>
-        </p:nvSpPr>
-        <p:spPr>
-          <a:xfrm>
-            <a:off x="1097280" y="3273552"/>
-            <a:ext cx="9994392" cy="899160"/>
-          </a:xfrm>
-          <a:prstGeom prst="roundRect">
-            <a:avLst>
-              <a:gd name="adj" fmla="val 6000"/>
-            </a:avLst>
-          </a:prstGeom>
-          <a:solidFill>
-            <a:srgbClr val="FEFDFA"/>
-          </a:solidFill>
-          <a:ln w="19050">
-            <a:solidFill>
-              <a:srgbClr val="009955"/>
-            </a:solidFill>
-          </a:ln>
-        </p:spPr>
-        <p:txBody>
-          <a:bodyPr lIns="91440" tIns="68580" rIns="91440" bIns="68580" anchor="t" wrap="square">
-            <a:normAutofit/>
-          </a:bodyPr>
-          <a:lstStyle/>
-          <a:p/>
-        </p:txBody>
-      </p:sp>
-      <p:sp>
-        <p:nvSpPr>
-          <p:cNvPr id="1032" name="callout-title" descr=""/>
-          <p:cNvSpPr/>
-          <p:nvPr/>
-        </p:nvSpPr>
-        <p:spPr>
-          <a:xfrm>
-            <a:off x="1097280" y="3273552"/>
-            <a:ext cx="9994392" cy="320040"/>
-          </a:xfrm>
-          <a:prstGeom prst="roundRect">
-            <a:avLst>
-              <a:gd name="adj" fmla="val 6000"/>
-            </a:avLst>
-          </a:prstGeom>
-          <a:solidFill>
-            <a:srgbClr val="009955"/>
-          </a:solidFill>
-          <a:ln>
-            <a:noFill/>
-          </a:ln>
-        </p:spPr>
-        <p:txBody>
-          <a:bodyPr lIns="91440" tIns="68580" rIns="91440" bIns="68580" anchor="t" wrap="square">
-            <a:normAutofit/>
-          </a:bodyPr>
-          <a:lstStyle/>
-          <a:p>
-            <a:pPr algn="l"/>
-            <a:r>
-              <a:rPr lang="en-US" sz="1400" b="1" dirty="0">
-                <a:solidFill>
-                  <a:srgbClr val="FEFDFA"/>
-                </a:solidFill>
-              </a:rPr>
-              <a:t>Tip</a:t>
-            </a:r>
-          </a:p>
-        </p:txBody>
-      </p:sp>
-      <p:sp>
-        <p:nvSpPr>
-          <p:cNvPr id="1033" name="callout-body" descr=""/>
-          <p:cNvSpPr/>
-          <p:nvPr/>
-        </p:nvSpPr>
-        <p:spPr>
-          <a:xfrm>
-            <a:off x="1097280" y="3593592"/>
-            <a:ext cx="9994392" cy="579120"/>
-          </a:xfrm>
-          <a:prstGeom prst="roundRect">
-            <a:avLst>
-              <a:gd name="adj" fmla="val 6000"/>
-            </a:avLst>
-          </a:prstGeom>
-          <a:solidFill>
-            <a:srgbClr val="FEFDFA"/>
-          </a:solidFill>
-          <a:ln>
-            <a:noFill/>
-          </a:ln>
-        </p:spPr>
-        <p:txBody>
-          <a:bodyPr lIns="91440" tIns="68580" rIns="91440" bIns="68580" anchor="t" wrap="square">
-            <a:normAutofit/>
-          </a:bodyPr>
-          <a:lstStyle/>
-          <a:p>
-            <a:pPr algn="l"/>
-            <a:r>
-              <a:rPr lang="en-US" sz="1200" b="0" dirty="0">
-                <a:solidFill>
-                  <a:srgbClr val="010B13"/>
-                </a:solidFill>
-              </a:rPr>
-              <a:t>Check their Lab 09 work: did a significant F with 3+ groups get post-hocs? Does an r get direction and strength?</a:t>
-            </a:r>
-          </a:p>
-        </p:txBody>
-      </p:sp>
+              <a:t>14 Turn comments into a plan</a:t>
+            </a:r>
+          </a:p>
+        </p:txBody>
+      </p:sp>
+      <p:graphicFrame>
+        <p:nvGraphicFramePr>
+          <p:cNvPr id="6" name="Content Placeholder 5"/>
+          <p:cNvGraphicFramePr>
+            <a:graphicFrameLocks noGrp="1"/>
+          </p:cNvGraphicFramePr>
+          <p:nvPr>
+            <p:ph idx="1"/>
+          </p:nvPr>
+        </p:nvGraphicFramePr>
+        <p:xfrm>
+          <a:off x="1092200" y="2628900"/>
+          <a:ext cx="9994900" cy="3098800"/>
+        </p:xfrm>
+        <a:graphic>
+          <a:graphicData uri="http://schemas.openxmlformats.org/drawingml/2006/table">
+            <a:tbl>
+              <a:tblPr firstRow="1" bandRow="1">
+                <a:tableStyleId>{5C22544A-7EE6-4342-B048-85BDC9FD1C3A}</a:tableStyleId>
+              </a:tblPr>
+              <a:tblGrid>
+                <a:gridCol w="4991100"/>
+                <a:gridCol w="4991100"/>
+              </a:tblGrid>
+              <a:tr h="0">
+                <a:tc>
+                  <a:txBody>
+                    <a:bodyPr/>
+                    <a:lstStyle/>
+                    <a:p>
+                      <a:pPr lvl="0" indent="0" marL="0">
+                        <a:buNone/>
+                      </a:pPr>
+                      <a:r>
+                        <a:rPr/>
+                        <a:t>Priority</a:t>
+                      </a:r>
+                    </a:p>
+                  </a:txBody>
+                  <a:tcPr/>
+                </a:tc>
+                <a:tc>
+                  <a:txBody>
+                    <a:bodyPr/>
+                    <a:lstStyle/>
+                    <a:p>
+                      <a:pPr lvl="0" indent="0" marL="0">
+                        <a:buNone/>
+                      </a:pPr>
+                      <a:r>
+                        <a:rPr/>
+                        <a:t>Revision</a:t>
+                      </a:r>
+                    </a:p>
+                  </a:txBody>
+                  <a:tcPr/>
+                </a:tc>
+              </a:tr>
+              <a:tr h="0">
+                <a:tc>
+                  <a:txBody>
+                    <a:bodyPr/>
+                    <a:lstStyle/>
+                    <a:p>
+                      <a:pPr lvl="0" indent="0" marL="0">
+                        <a:buNone/>
+                      </a:pPr>
+                      <a:r>
+                        <a:rPr/>
+                        <a:t>1</a:t>
+                      </a:r>
+                    </a:p>
+                  </a:txBody>
+                </a:tc>
+                <a:tc>
+                  <a:txBody>
+                    <a:bodyPr/>
+                    <a:lstStyle/>
+                    <a:p>
+                      <a:pPr lvl="0" indent="0" marL="0">
+                        <a:buNone/>
+                      </a:pPr>
+                      <a:r>
+                        <a:rPr/>
+                        <a:t>Argument, missing evidence, or wrong analysis</a:t>
+                      </a:r>
+                    </a:p>
+                  </a:txBody>
+                </a:tc>
+              </a:tr>
+              <a:tr h="0">
+                <a:tc>
+                  <a:txBody>
+                    <a:bodyPr/>
+                    <a:lstStyle/>
+                    <a:p>
+                      <a:pPr lvl="0" indent="0" marL="0">
+                        <a:buNone/>
+                      </a:pPr>
+                      <a:r>
+                        <a:rPr/>
+                        <a:t>2</a:t>
+                      </a:r>
+                    </a:p>
+                  </a:txBody>
+                </a:tc>
+                <a:tc>
+                  <a:txBody>
+                    <a:bodyPr/>
+                    <a:lstStyle/>
+                    <a:p>
+                      <a:pPr lvl="0" indent="0" marL="0">
+                        <a:buNone/>
+                      </a:pPr>
+                      <a:r>
+                        <a:rPr/>
+                        <a:t>Organization and explanation</a:t>
+                      </a:r>
+                    </a:p>
+                  </a:txBody>
+                </a:tc>
+              </a:tr>
+              <a:tr h="0">
+                <a:tc>
+                  <a:txBody>
+                    <a:bodyPr/>
+                    <a:lstStyle/>
+                    <a:p>
+                      <a:pPr lvl="0" indent="0" marL="0">
+                        <a:buNone/>
+                      </a:pPr>
+                      <a:r>
+                        <a:rPr/>
+                        <a:t>3</a:t>
+                      </a:r>
+                    </a:p>
+                  </a:txBody>
+                </a:tc>
+                <a:tc>
+                  <a:txBody>
+                    <a:bodyPr/>
+                    <a:lstStyle/>
+                    <a:p>
+                      <a:pPr lvl="0" indent="0" marL="0">
+                        <a:buNone/>
+                      </a:pPr>
+                      <a:r>
+                        <a:rPr/>
+                        <a:t>Sentences, APA details, and proofreading</a:t>
+                      </a:r>
+                    </a:p>
+                  </a:txBody>
+                </a:tc>
+              </a:tr>
+            </a:tbl>
+          </a:graphicData>
+        </a:graphic>
+      </p:graphicFrame>
     </p:spTree>
   </p:cSld>
 </p:sld>
@@ -4615,203 +5911,22 @@
             </a:pPr>
             <a:r>
               <a:rPr/>
-              <a:t>Discussion</a:t>
-            </a:r>
-          </a:p>
-        </p:txBody>
-      </p:sp>
-      <p:sp>
-        <p:nvSpPr>
-          <p:cNvPr id="1034" name="prose" descr=""/>
-          <p:cNvSpPr/>
-          <p:nvPr/>
-        </p:nvSpPr>
-        <p:spPr>
-          <a:xfrm>
-            <a:off x="1097280" y="2633472"/>
-            <a:ext cx="9994392" cy="548640"/>
-          </a:xfrm>
-          <a:prstGeom prst="roundRect">
-            <a:avLst>
-              <a:gd name="adj" fmla="val 6000"/>
-            </a:avLst>
-          </a:prstGeom>
-          <a:noFill/>
-          <a:ln>
-            <a:noFill/>
-          </a:ln>
-        </p:spPr>
-        <p:txBody>
-          <a:bodyPr lIns="91440" tIns="68580" rIns="91440" bIns="68580" anchor="t" wrap="square">
-            <a:normAutofit/>
-          </a:bodyPr>
-          <a:lstStyle/>
-          <a:p>
-            <a:pPr algn="l"/>
-            <a:r>
-              <a:rPr lang="en-US" sz="1200" b="0" dirty="0">
-                <a:solidFill>
-                  <a:srgbClr val="010B13"/>
-                </a:solidFill>
-              </a:rPr>
-              <a:t>Opens with a recap of findings without numbers?Does the interpretation match the actual results (or does it quietly over-claim)?Limitations honest and specific (not “more research is needed”)?Future directions that follow from the limitations?</a:t>
-            </a:r>
-          </a:p>
-        </p:txBody>
-      </p:sp>
-      <p:sp>
-        <p:nvSpPr>
-          <p:cNvPr id="1035" name="callout-caution" descr="caution callout: Caution. Watch for results appearing for the first time in the Discussion — new numbers belong in Results."/>
-          <p:cNvSpPr/>
-          <p:nvPr/>
-        </p:nvSpPr>
-        <p:spPr>
-          <a:xfrm>
-            <a:off x="1097280" y="3273552"/>
-            <a:ext cx="9994392" cy="899160"/>
-          </a:xfrm>
-          <a:prstGeom prst="roundRect">
-            <a:avLst>
-              <a:gd name="adj" fmla="val 6000"/>
-            </a:avLst>
-          </a:prstGeom>
-          <a:solidFill>
-            <a:srgbClr val="FEFDFA"/>
-          </a:solidFill>
-          <a:ln w="19050">
-            <a:solidFill>
-              <a:srgbClr val="B38F00"/>
-            </a:solidFill>
-          </a:ln>
-        </p:spPr>
-        <p:txBody>
-          <a:bodyPr lIns="91440" tIns="68580" rIns="91440" bIns="68580" anchor="t" wrap="square">
-            <a:normAutofit/>
-          </a:bodyPr>
-          <a:lstStyle/>
-          <a:p/>
-        </p:txBody>
-      </p:sp>
-      <p:sp>
-        <p:nvSpPr>
-          <p:cNvPr id="1036" name="callout-title" descr=""/>
-          <p:cNvSpPr/>
-          <p:nvPr/>
-        </p:nvSpPr>
-        <p:spPr>
-          <a:xfrm>
-            <a:off x="1097280" y="3273552"/>
-            <a:ext cx="9994392" cy="320040"/>
-          </a:xfrm>
-          <a:prstGeom prst="roundRect">
-            <a:avLst>
-              <a:gd name="adj" fmla="val 6000"/>
-            </a:avLst>
-          </a:prstGeom>
-          <a:solidFill>
-            <a:srgbClr val="B38F00"/>
-          </a:solidFill>
-          <a:ln>
-            <a:noFill/>
-          </a:ln>
-        </p:spPr>
-        <p:txBody>
-          <a:bodyPr lIns="91440" tIns="68580" rIns="91440" bIns="68580" anchor="t" wrap="square">
-            <a:normAutofit/>
-          </a:bodyPr>
-          <a:lstStyle/>
-          <a:p>
-            <a:pPr algn="l"/>
-            <a:r>
-              <a:rPr lang="en-US" sz="1400" b="1" dirty="0">
-                <a:solidFill>
-                  <a:srgbClr val="FEFDFA"/>
-                </a:solidFill>
-              </a:rPr>
-              <a:t>Caution</a:t>
-            </a:r>
-          </a:p>
-        </p:txBody>
-      </p:sp>
-      <p:sp>
-        <p:nvSpPr>
-          <p:cNvPr id="1037" name="callout-body" descr=""/>
-          <p:cNvSpPr/>
-          <p:nvPr/>
-        </p:nvSpPr>
-        <p:spPr>
-          <a:xfrm>
-            <a:off x="1097280" y="3593592"/>
-            <a:ext cx="9994392" cy="579120"/>
-          </a:xfrm>
-          <a:prstGeom prst="roundRect">
-            <a:avLst>
-              <a:gd name="adj" fmla="val 6000"/>
-            </a:avLst>
-          </a:prstGeom>
-          <a:solidFill>
-            <a:srgbClr val="FEFDFA"/>
-          </a:solidFill>
-          <a:ln>
-            <a:noFill/>
-          </a:ln>
-        </p:spPr>
-        <p:txBody>
-          <a:bodyPr lIns="91440" tIns="68580" rIns="91440" bIns="68580" anchor="t" wrap="square">
-            <a:normAutofit/>
-          </a:bodyPr>
-          <a:lstStyle/>
-          <a:p>
-            <a:pPr algn="l"/>
-            <a:r>
-              <a:rPr lang="en-US" sz="1200" b="0" dirty="0">
-                <a:solidFill>
-                  <a:srgbClr val="010B13"/>
-                </a:solidFill>
-              </a:rPr>
-              <a:t>Watch for results appearing for the first time in the Discussion — new numbers belong in Results.</a:t>
-            </a:r>
-          </a:p>
-        </p:txBody>
-      </p:sp>
-    </p:spTree>
-  </p:cSld>
-</p:sld>
-</file>
-
-<file path=ppt/slides/slide17.xml><?xml version="1.0" encoding="utf-8"?>
-<p:sld xmlns:a="http://schemas.openxmlformats.org/drawingml/2006/main" xmlns:r="http://schemas.openxmlformats.org/officeDocument/2006/relationships" xmlns:p="http://schemas.openxmlformats.org/presentationml/2006/main">
-  <p:cSld>
-    <p:spTree>
-      <p:nvGrpSpPr>
-        <p:cNvPr id="1" name=""/>
-        <p:cNvGrpSpPr/>
-        <p:nvPr/>
-      </p:nvGrpSpPr>
-      <p:grpSpPr>
-        <a:xfrm>
-          <a:off x="0" y="0"/>
-          <a:ext cx="0" cy="0"/>
-          <a:chOff x="0" y="0"/>
-          <a:chExt cx="0" cy="0"/>
-        </a:xfrm>
-      </p:grpSpPr>
-      <p:sp>
-        <p:nvSpPr>
-          <p:cNvPr id="2" name="Title 1"/>
-          <p:cNvSpPr>
-            <a:spLocks noGrp="1"/>
-          </p:cNvSpPr>
-          <p:nvPr>
-            <p:ph type="title"/>
-          </p:nvPr>
-        </p:nvSpPr>
-        <p:spPr>
-          <a:xfrm>
-            <a:off x="1097280" y="964692"/>
-            <a:ext cx="9997440" cy="1188720"/>
-          </a:xfrm>
-        </p:spPr>
+              <a:t>15 Complete both roles</a:t>
+            </a:r>
+          </a:p>
+        </p:txBody>
+      </p:sp>
+      <p:sp>
+        <p:nvSpPr>
+          <p:cNvPr id="3" name="Content Placeholder 2"/>
+          <p:cNvSpPr>
+            <a:spLocks noGrp="1"/>
+          </p:cNvSpPr>
+          <p:nvPr>
+            <p:ph idx="1" sz="half"/>
+          </p:nvPr>
+        </p:nvSpPr>
+        <p:spPr/>
         <p:txBody>
           <a:bodyPr/>
           <a:lstStyle/>
@@ -4820,382 +5935,87 @@
               <a:buNone/>
             </a:pPr>
             <a:r>
-              <a:rPr/>
-              <a:t>APA &amp; Polish (Last, Not First)</a:t>
-            </a:r>
-          </a:p>
-        </p:txBody>
-      </p:sp>
-      <p:sp>
-        <p:nvSpPr>
-          <p:cNvPr id="3" name="Content Placeholder 2"/>
-          <p:cNvSpPr>
-            <a:spLocks noGrp="1"/>
-          </p:cNvSpPr>
-          <p:nvPr>
-            <p:ph idx="1"/>
-          </p:nvPr>
-        </p:nvSpPr>
-        <p:spPr/>
-        <p:txBody>
-          <a:bodyPr/>
-          <a:lstStyle/>
+              <a:rPr b="1"/>
+              <a:t>Reviewer</a:t>
+            </a:r>
+          </a:p>
           <a:p>
             <a:pPr lvl="0" indent="0" marL="0">
               <a:buNone/>
             </a:pPr>
             <a:r>
               <a:rPr/>
-              <a:t>Only after the big stuff:</a:t>
-            </a:r>
-          </a:p>
-          <a:p>
-            <a:pPr lvl="0"/>
-            <a:r>
-              <a:rPr/>
-              <a:t>In-text citations vs. reference list — do they </a:t>
-            </a:r>
+              <a:t>• Finish the worksheet.</a:t>
+            </a:r>
+          </a:p>
+          <a:p>
+            <a:pPr lvl="0" indent="0" marL="0">
+              <a:buNone/>
+            </a:pPr>
+            <a:r>
+              <a:rPr/>
+              <a:t>• Return the annotated draft.</a:t>
+            </a:r>
+          </a:p>
+          <a:p>
+            <a:pPr lvl="0" indent="0" marL="0">
+              <a:buNone/>
+            </a:pPr>
+            <a:r>
+              <a:rPr/>
+              <a:t>• Make comments actionable.</a:t>
+            </a:r>
+          </a:p>
+        </p:txBody>
+      </p:sp>
+      <p:sp>
+        <p:nvSpPr>
+          <p:cNvPr id="4" name="Content Placeholder 3"/>
+          <p:cNvSpPr>
+            <a:spLocks noGrp="1"/>
+          </p:cNvSpPr>
+          <p:nvPr>
+            <p:ph idx="2" sz="half"/>
+          </p:nvPr>
+        </p:nvSpPr>
+        <p:spPr/>
+        <p:txBody>
+          <a:bodyPr/>
+          <a:lstStyle/>
+          <a:p>
+            <a:pPr lvl="0" indent="0" marL="0">
+              <a:buNone/>
+            </a:pPr>
             <a:r>
               <a:rPr b="1"/>
-              <a:t>match</a:t>
-            </a:r>
-            <a:r>
-              <a:rPr/>
-              <a:t>?</a:t>
-            </a:r>
-          </a:p>
-          <a:p>
-            <a:pPr lvl="0"/>
-            <a:r>
-              <a:rPr/>
-              <a:t>Reference format: hanging indent, italics, DOIs</a:t>
-            </a:r>
-          </a:p>
-          <a:p>
-            <a:pPr lvl="0"/>
-            <a:r>
-              <a:rPr/>
-              <a:t>Numbers: statistics italicized, </a:t>
-            </a:r>
-            <a:r>
-              <a:rPr i="1"/>
-              <a:t>p</a:t>
-            </a:r>
-            <a:r>
-              <a:rPr/>
-              <a:t> reported correctly, rounded consistently</a:t>
-            </a:r>
-          </a:p>
-          <a:p>
-            <a:pPr lvl="0"/>
-            <a:r>
-              <a:rPr/>
-              <a:t>Topic sentences &amp; transitions (remember Lab 04!)</a:t>
-            </a:r>
-          </a:p>
-        </p:txBody>
-      </p:sp>
-    </p:spTree>
-  </p:cSld>
-</p:sld>
-</file>
-
-<file path=ppt/slides/slide18.xml><?xml version="1.0" encoding="utf-8"?>
-<p:sld xmlns:a="http://schemas.openxmlformats.org/drawingml/2006/main" xmlns:r="http://schemas.openxmlformats.org/officeDocument/2006/relationships" xmlns:p="http://schemas.openxmlformats.org/presentationml/2006/main">
-  <p:cSld>
-    <p:spTree>
-      <p:nvGrpSpPr>
-        <p:cNvPr id="1" name=""/>
-        <p:cNvGrpSpPr/>
-        <p:nvPr/>
-      </p:nvGrpSpPr>
-      <p:grpSpPr>
-        <a:xfrm>
-          <a:off x="0" y="0"/>
-          <a:ext cx="0" cy="0"/>
-          <a:chOff x="0" y="0"/>
-          <a:chExt cx="0" cy="0"/>
-        </a:xfrm>
-      </p:grpSpPr>
-      <p:sp>
-        <p:nvSpPr>
-          <p:cNvPr id="2" name="Title 1"/>
-          <p:cNvSpPr>
-            <a:spLocks noGrp="1"/>
-          </p:cNvSpPr>
-          <p:nvPr>
-            <p:ph type="title"/>
-          </p:nvPr>
-        </p:nvSpPr>
-        <p:spPr bwMode="blackWhite">
-          <a:xfrm>
-            <a:off x="1097280" y="2386744"/>
-            <a:ext cx="9997440" cy="1645920"/>
-          </a:xfrm>
-          <a:solidFill>
-            <a:srgbClr val="FFFFFF"/>
-          </a:solidFill>
-          <a:ln w="38100">
-            <a:solidFill>
-              <a:srgbClr val="404040"/>
-            </a:solidFill>
-          </a:ln>
-        </p:spPr>
-        <p:txBody>
-          <a:bodyPr/>
-          <a:lstStyle/>
+              <a:t>Author</a:t>
+            </a:r>
+          </a:p>
           <a:p>
             <a:pPr lvl="0" indent="0" marL="0">
               <a:buNone/>
             </a:pPr>
             <a:r>
               <a:rPr/>
-              <a:t>Receiving Feedback</a:t>
-            </a:r>
-          </a:p>
-        </p:txBody>
-      </p:sp>
-    </p:spTree>
-  </p:cSld>
-</p:sld>
-</file>
-
-<file path=ppt/slides/slide19.xml><?xml version="1.0" encoding="utf-8"?>
-<p:sld xmlns:a="http://schemas.openxmlformats.org/drawingml/2006/main" xmlns:r="http://schemas.openxmlformats.org/officeDocument/2006/relationships" xmlns:p="http://schemas.openxmlformats.org/presentationml/2006/main">
-  <p:cSld>
-    <p:spTree>
-      <p:nvGrpSpPr>
-        <p:cNvPr id="1" name=""/>
-        <p:cNvGrpSpPr/>
-        <p:nvPr/>
-      </p:nvGrpSpPr>
-      <p:grpSpPr>
-        <a:xfrm>
-          <a:off x="0" y="0"/>
-          <a:ext cx="0" cy="0"/>
-          <a:chOff x="0" y="0"/>
-          <a:chExt cx="0" cy="0"/>
-        </a:xfrm>
-      </p:grpSpPr>
-      <p:sp>
-        <p:nvSpPr>
-          <p:cNvPr id="2" name="Title 1"/>
-          <p:cNvSpPr>
-            <a:spLocks noGrp="1"/>
-          </p:cNvSpPr>
-          <p:nvPr>
-            <p:ph type="title"/>
-          </p:nvPr>
-        </p:nvSpPr>
-        <p:spPr>
-          <a:xfrm>
-            <a:off x="1097280" y="964692"/>
-            <a:ext cx="9997440" cy="1188720"/>
-          </a:xfrm>
-        </p:spPr>
-        <p:txBody>
-          <a:bodyPr/>
-          <a:lstStyle/>
+              <a:t>• Triage the feedback.</a:t>
+            </a:r>
+          </a:p>
           <a:p>
             <a:pPr lvl="0" indent="0" marL="0">
               <a:buNone/>
             </a:pPr>
             <a:r>
               <a:rPr/>
-              <a:t>Triage, Don’t Defend</a:t>
-            </a:r>
-          </a:p>
-        </p:txBody>
-      </p:sp>
-      <p:sp>
-        <p:nvSpPr>
-          <p:cNvPr id="1038" name="prose" descr=""/>
-          <p:cNvSpPr/>
-          <p:nvPr/>
-        </p:nvSpPr>
-        <p:spPr>
-          <a:xfrm>
-            <a:off x="1097280" y="2633472"/>
-            <a:ext cx="9994392" cy="182880"/>
-          </a:xfrm>
-          <a:prstGeom prst="roundRect">
-            <a:avLst>
-              <a:gd name="adj" fmla="val 6000"/>
-            </a:avLst>
-          </a:prstGeom>
-          <a:noFill/>
-          <a:ln>
-            <a:noFill/>
-          </a:ln>
-        </p:spPr>
-        <p:txBody>
-          <a:bodyPr lIns="91440" tIns="68580" rIns="91440" bIns="68580" anchor="t" wrap="square">
-            <a:normAutofit/>
-          </a:bodyPr>
-          <a:lstStyle/>
-          <a:p>
-            <a:pPr algn="l"/>
-            <a:r>
-              <a:rPr lang="en-US" sz="1200" b="0" dirty="0">
-                <a:solidFill>
-                  <a:srgbClr val="010B13"/>
-                </a:solidFill>
-              </a:rPr>
-              <a:t>When you get your marked-up draft back, sort every comment:</a:t>
-            </a:r>
-          </a:p>
-        </p:txBody>
-      </p:sp>
-      <p:sp>
-        <p:nvSpPr>
-          <p:cNvPr id="1039" name="prose" descr=""/>
-          <p:cNvSpPr/>
-          <p:nvPr/>
-        </p:nvSpPr>
-        <p:spPr>
-          <a:xfrm>
-            <a:off x="1097280" y="2907792"/>
-            <a:ext cx="9994392" cy="548640"/>
-          </a:xfrm>
-          <a:prstGeom prst="roundRect">
-            <a:avLst>
-              <a:gd name="adj" fmla="val 6000"/>
-            </a:avLst>
-          </a:prstGeom>
-          <a:noFill/>
-          <a:ln>
-            <a:noFill/>
-          </a:ln>
-        </p:spPr>
-        <p:txBody>
-          <a:bodyPr lIns="91440" tIns="68580" rIns="91440" bIns="68580" anchor="t" wrap="square">
-            <a:normAutofit/>
-          </a:bodyPr>
-          <a:lstStyle/>
-          <a:p>
-            <a:pPr algn="l"/>
-            <a:r>
-              <a:rPr lang="en-US" sz="1200" b="0" dirty="0">
-                <a:solidFill>
-                  <a:srgbClr val="010B13"/>
-                </a:solidFill>
-              </a:rPr>
-              <a:t>Must fix — reviewer spotted a genuine problem (missing info, broken logic, wrong statistic)Worth considering — style/clarity calls; try the fix, keep it if the paper improvesRespectfully disagree — you had a reason; keep your choice, but make the reason clearer in the text (if one reader tripped, others will)</a:t>
-            </a:r>
-          </a:p>
-        </p:txBody>
-      </p:sp>
-      <p:sp>
-        <p:nvSpPr>
-          <p:cNvPr id="1040" name="callout-tip" descr="tip callout: Tip. The one wrong move: explaining to your reviewer why they’re wrong. They can’t un-trip. The paper has to do the explaining."/>
-          <p:cNvSpPr/>
-          <p:nvPr/>
-        </p:nvSpPr>
-        <p:spPr>
-          <a:xfrm>
-            <a:off x="1097280" y="3547872"/>
-            <a:ext cx="9994392" cy="1082040"/>
-          </a:xfrm>
-          <a:prstGeom prst="roundRect">
-            <a:avLst>
-              <a:gd name="adj" fmla="val 6000"/>
-            </a:avLst>
-          </a:prstGeom>
-          <a:solidFill>
-            <a:srgbClr val="FEFDFA"/>
-          </a:solidFill>
-          <a:ln w="19050">
-            <a:solidFill>
-              <a:srgbClr val="009955"/>
-            </a:solidFill>
-          </a:ln>
-        </p:spPr>
-        <p:txBody>
-          <a:bodyPr lIns="91440" tIns="68580" rIns="91440" bIns="68580" anchor="t" wrap="square">
-            <a:normAutofit/>
-          </a:bodyPr>
-          <a:lstStyle/>
-          <a:p/>
-        </p:txBody>
-      </p:sp>
-      <p:sp>
-        <p:nvSpPr>
-          <p:cNvPr id="1041" name="callout-title" descr=""/>
-          <p:cNvSpPr/>
-          <p:nvPr/>
-        </p:nvSpPr>
-        <p:spPr>
-          <a:xfrm>
-            <a:off x="1097280" y="3547872"/>
-            <a:ext cx="9994392" cy="320040"/>
-          </a:xfrm>
-          <a:prstGeom prst="roundRect">
-            <a:avLst>
-              <a:gd name="adj" fmla="val 6000"/>
-            </a:avLst>
-          </a:prstGeom>
-          <a:solidFill>
-            <a:srgbClr val="009955"/>
-          </a:solidFill>
-          <a:ln>
-            <a:noFill/>
-          </a:ln>
-        </p:spPr>
-        <p:txBody>
-          <a:bodyPr lIns="91440" tIns="68580" rIns="91440" bIns="68580" anchor="t" wrap="square">
-            <a:normAutofit/>
-          </a:bodyPr>
-          <a:lstStyle/>
-          <a:p>
-            <a:pPr algn="l"/>
-            <a:r>
-              <a:rPr lang="en-US" sz="1400" b="1" dirty="0">
-                <a:solidFill>
-                  <a:srgbClr val="FEFDFA"/>
-                </a:solidFill>
-              </a:rPr>
-              <a:t>Tip</a:t>
-            </a:r>
-          </a:p>
-        </p:txBody>
-      </p:sp>
-      <p:sp>
-        <p:nvSpPr>
-          <p:cNvPr id="1042" name="callout-body" descr=""/>
-          <p:cNvSpPr/>
-          <p:nvPr/>
-        </p:nvSpPr>
-        <p:spPr>
-          <a:xfrm>
-            <a:off x="1097280" y="3867912"/>
-            <a:ext cx="9994392" cy="762000"/>
-          </a:xfrm>
-          <a:prstGeom prst="roundRect">
-            <a:avLst>
-              <a:gd name="adj" fmla="val 6000"/>
-            </a:avLst>
-          </a:prstGeom>
-          <a:solidFill>
-            <a:srgbClr val="FEFDFA"/>
-          </a:solidFill>
-          <a:ln>
-            <a:noFill/>
-          </a:ln>
-        </p:spPr>
-        <p:txBody>
-          <a:bodyPr lIns="91440" tIns="68580" rIns="91440" bIns="68580" anchor="t" wrap="square">
-            <a:normAutofit/>
-          </a:bodyPr>
-          <a:lstStyle/>
-          <a:p>
-            <a:pPr algn="l"/>
-            <a:r>
-              <a:rPr lang="en-US" sz="1200" b="0" dirty="0">
-                <a:solidFill>
-                  <a:srgbClr val="010B13"/>
-                </a:solidFill>
-              </a:rPr>
-              <a:t>The one wrong move: explaining to your reviewer why they’re wrong. They can’t un-trip. The paper has to do the explaining.</a:t>
+              <a:t>• Ask what is unclear.</a:t>
+            </a:r>
+          </a:p>
+          <a:p>
+            <a:pPr lvl="0" indent="0" marL="0">
+              <a:buNone/>
+            </a:pPr>
+            <a:r>
+              <a:rPr/>
+              <a:t>• Write the revision plan first.</a:t>
             </a:r>
           </a:p>
         </p:txBody>
@@ -5247,991 +6067,103 @@
             </a:pPr>
             <a:r>
               <a:rPr/>
-              <a:t>Today’s Tasks</a:t>
-            </a:r>
-          </a:p>
-        </p:txBody>
-      </p:sp>
-      <p:sp>
-        <p:nvSpPr>
-          <p:cNvPr id="1001" name="box-post-it" descr="box: . Why peer review matters (and how scientists actually do it)How to give feedback that is specific, kind, and usefulSection-by-section review guide for an APA reportReceiving feedback: triage, don’t defendToday’s workflow + worksheet"/>
-          <p:cNvSpPr/>
+              <a:t>1 Prepare the review exchange</a:t>
+            </a:r>
+          </a:p>
+        </p:txBody>
+      </p:sp>
+      <p:sp>
+        <p:nvSpPr>
+          <p:cNvPr id="3" name="Content Placeholder 2"/>
+          <p:cNvSpPr>
+            <a:spLocks noGrp="1"/>
+          </p:cNvSpPr>
+          <p:nvPr>
+            <p:ph idx="1" sz="half"/>
+          </p:nvPr>
+        </p:nvSpPr>
+        <p:spPr/>
+        <p:txBody>
+          <a:bodyPr/>
+          <a:lstStyle/>
+          <a:p>
+            <a:pPr lvl="0"/>
+            <a:r>
+              <a:rPr b="1"/>
+              <a:t>Worksheet:</a:t>
+            </a:r>
+            <a:r>
+              <a:rPr/>
+              <a:t> Lab 10 Peer Review</a:t>
+            </a:r>
+          </a:p>
+          <a:p>
+            <a:pPr lvl="0"/>
+            <a:r>
+              <a:rPr b="1"/>
+              <a:t>Draft:</a:t>
+            </a:r>
+            <a:r>
+              <a:rPr/>
+              <a:t> complete enough to evaluate</a:t>
+            </a:r>
+          </a:p>
+          <a:p>
+            <a:pPr lvl="0"/>
+            <a:r>
+              <a:rPr b="1"/>
+              <a:t>Role:</a:t>
+            </a:r>
+            <a:r>
+              <a:rPr/>
+              <a:t> reviewer first, author second</a:t>
+            </a:r>
+          </a:p>
+          <a:p>
+            <a:pPr lvl="0" indent="0" marL="0">
+              <a:buNone/>
+            </a:pPr>
+            <a:r>
+              <a:rPr/>
+              <a:t>Today’s path: </a:t>
+            </a:r>
+            <a:r>
+              <a:rPr b="1"/>
+              <a:t>survey → diagnose → suggest → triage → revise</a:t>
+            </a:r>
+          </a:p>
+        </p:txBody>
+      </p:sp>
+      <p:pic>
+        <p:nvPicPr>
+          <p:cNvPr descr="A collage of APA manuals representing the final style and formatting pass after substantive revision is complete" id="0" name="Picture 1"/>
+          <p:cNvPicPr>
+            <a:picLocks noGrp="1" noChangeAspect="1"/>
+          </p:cNvPicPr>
           <p:nvPr/>
-        </p:nvSpPr>
-        <p:spPr>
+        </p:nvPicPr>
+        <p:blipFill>
+          <a:blip r:embed="rId3"/>
+          <a:stretch>
+            <a:fillRect/>
+          </a:stretch>
+        </p:blipFill>
+        <p:spPr bwMode="auto">
           <a:xfrm>
-            <a:off x="1097280" y="2633472"/>
-            <a:ext cx="9994392" cy="731520"/>
+            <a:off x="7124700" y="2628900"/>
+            <a:ext cx="3022600" cy="3098800"/>
           </a:xfrm>
-          <a:prstGeom prst="roundRect">
-            <a:avLst>
-              <a:gd name="adj" fmla="val 6000"/>
-            </a:avLst>
+          <a:prstGeom prst="rect">
+            <a:avLst/>
           </a:prstGeom>
-          <a:solidFill>
-            <a:srgbClr val="FFF9C4"/>
-          </a:solidFill>
-          <a:ln w="19050">
-            <a:solidFill>
-              <a:srgbClr val="CCCCCC"/>
-            </a:solidFill>
+          <a:noFill/>
+          <a:ln w="9525">
+            <a:noFill/>
+            <a:headEnd/>
+            <a:tailEnd/>
           </a:ln>
         </p:spPr>
-        <p:txBody>
-          <a:bodyPr lIns="91440" tIns="68580" rIns="91440" bIns="68580" anchor="t" wrap="square">
-            <a:normAutofit/>
-          </a:bodyPr>
-          <a:lstStyle/>
-          <a:p>
-            <a:pPr algn="l"/>
-            <a:r>
-              <a:rPr lang="en-US" sz="1200" b="0" dirty="0">
-                <a:solidFill>
-                  <a:srgbClr val="010B13"/>
-                </a:solidFill>
-              </a:rPr>
-              <a:t>Why peer review matters (and how scientists actually do it)How to give feedback that is specific, kind, and usefulSection-by-section review guide for an APA reportReceiving feedback: triage, don’t defendToday’s workflow + worksheet</a:t>
-            </a:r>
-          </a:p>
-        </p:txBody>
-      </p:sp>
-      <p:sp>
-        <p:nvSpPr>
-          <p:cNvPr id="1002" name="prose" descr=""/>
-          <p:cNvSpPr/>
-          <p:nvPr/>
-        </p:nvSpPr>
-        <p:spPr>
-          <a:xfrm>
-            <a:off x="1097280" y="3456432"/>
-            <a:ext cx="9994392" cy="365760"/>
-          </a:xfrm>
-          <a:prstGeom prst="roundRect">
-            <a:avLst>
-              <a:gd name="adj" fmla="val 6000"/>
-            </a:avLst>
-          </a:prstGeom>
-          <a:noFill/>
-          <a:ln>
-            <a:noFill/>
-          </a:ln>
-        </p:spPr>
-        <p:txBody>
-          <a:bodyPr lIns="91440" tIns="68580" rIns="91440" bIns="68580" anchor="t" wrap="square">
-            <a:normAutofit/>
-          </a:bodyPr>
-          <a:lstStyle/>
-          <a:p>
-            <a:pPr algn="l"/>
-            <a:r>
-              <a:rPr lang="en-US" sz="1200" b="0" dirty="0">
-                <a:solidFill>
-                  <a:srgbClr val="010B13"/>
-                </a:solidFill>
-              </a:rPr>
-              <a:t>Today has two halves: the skill of reviewing, and the logistics of swapping drafts. Students should leave with concrete comments on a peer’s draft AND a revision plan for their own.</a:t>
-            </a:r>
-          </a:p>
-        </p:txBody>
-      </p:sp>
-    </p:spTree>
-  </p:cSld>
-</p:sld>
-</file>
-
-<file path=ppt/slides/slide20.xml><?xml version="1.0" encoding="utf-8"?>
-<p:sld xmlns:a="http://schemas.openxmlformats.org/drawingml/2006/main" xmlns:r="http://schemas.openxmlformats.org/officeDocument/2006/relationships" xmlns:p="http://schemas.openxmlformats.org/presentationml/2006/main">
-  <p:cSld>
-    <p:spTree>
-      <p:nvGrpSpPr>
-        <p:cNvPr id="1" name=""/>
-        <p:cNvGrpSpPr/>
-        <p:nvPr/>
-      </p:nvGrpSpPr>
-      <p:grpSpPr>
-        <a:xfrm>
-          <a:off x="0" y="0"/>
-          <a:ext cx="0" cy="0"/>
-          <a:chOff x="0" y="0"/>
-          <a:chExt cx="0" cy="0"/>
-        </a:xfrm>
-      </p:grpSpPr>
-      <p:sp>
-        <p:nvSpPr>
-          <p:cNvPr id="2" name="Title 1"/>
-          <p:cNvSpPr>
-            <a:spLocks noGrp="1"/>
-          </p:cNvSpPr>
-          <p:nvPr>
-            <p:ph type="title"/>
-          </p:nvPr>
-        </p:nvSpPr>
-        <p:spPr>
-          <a:xfrm>
-            <a:off x="1097280" y="964692"/>
-            <a:ext cx="9997440" cy="1188720"/>
-          </a:xfrm>
-        </p:spPr>
-        <p:txBody>
-          <a:bodyPr/>
-          <a:lstStyle/>
-          <a:p>
-            <a:pPr lvl="0" indent="0" marL="0">
-              <a:buNone/>
-            </a:pPr>
-            <a:r>
-              <a:rPr/>
-              <a:t>Revision Is a Plan, Not a Mood</a:t>
-            </a:r>
-          </a:p>
-        </p:txBody>
-      </p:sp>
-      <p:sp>
-        <p:nvSpPr>
-          <p:cNvPr id="3" name="Content Placeholder 2"/>
-          <p:cNvSpPr>
-            <a:spLocks noGrp="1"/>
-          </p:cNvSpPr>
-          <p:nvPr>
-            <p:ph idx="1"/>
-          </p:nvPr>
-        </p:nvSpPr>
-        <p:spPr/>
-        <p:txBody>
-          <a:bodyPr/>
-          <a:lstStyle/>
-          <a:p>
-            <a:pPr lvl="0" indent="0" marL="0">
-              <a:buNone/>
-            </a:pPr>
-            <a:r>
-              <a:rPr/>
-              <a:t>Before you leave today:</a:t>
-            </a:r>
-          </a:p>
-          <a:p>
-            <a:pPr lvl="0" indent="-457200" marL="457200">
-              <a:buAutoNum type="arabicPeriod"/>
-            </a:pPr>
-            <a:r>
-              <a:rPr/>
-              <a:t>List the </a:t>
-            </a:r>
-            <a:r>
-              <a:rPr b="1"/>
-              <a:t>three biggest</a:t>
-            </a:r>
-            <a:r>
-              <a:rPr/>
-              <a:t> issues your reviewer found</a:t>
-            </a:r>
-          </a:p>
-          <a:p>
-            <a:pPr lvl="0" indent="-457200" marL="457200">
-              <a:buAutoNum type="arabicPeriod"/>
-            </a:pPr>
-            <a:r>
-              <a:rPr/>
-              <a:t>For each: what will you change, and </a:t>
-            </a:r>
-            <a:r>
-              <a:rPr b="1"/>
-              <a:t>where</a:t>
-            </a:r>
-            <a:r>
-              <a:rPr/>
-              <a:t> in the paper?</a:t>
-            </a:r>
-          </a:p>
-          <a:p>
-            <a:pPr lvl="0" indent="-457200" marL="457200">
-              <a:buAutoNum type="arabicPeriod"/>
-            </a:pPr>
-            <a:r>
-              <a:rPr/>
-              <a:t>What will you do </a:t>
-            </a:r>
-            <a:r>
-              <a:rPr b="1"/>
-              <a:t>first</a:t>
-            </a:r>
-            <a:r>
-              <a:rPr/>
-              <a:t>? (Hint: the structural one, not the comma.)</a:t>
-            </a:r>
-          </a:p>
-        </p:txBody>
-      </p:sp>
-    </p:spTree>
-  </p:cSld>
-</p:sld>
-</file>
-
-<file path=ppt/slides/slide21.xml><?xml version="1.0" encoding="utf-8"?>
-<p:sld xmlns:a="http://schemas.openxmlformats.org/drawingml/2006/main" xmlns:r="http://schemas.openxmlformats.org/officeDocument/2006/relationships" xmlns:p="http://schemas.openxmlformats.org/presentationml/2006/main">
-  <p:cSld>
-    <p:spTree>
-      <p:nvGrpSpPr>
-        <p:cNvPr id="1" name=""/>
-        <p:cNvGrpSpPr/>
-        <p:nvPr/>
-      </p:nvGrpSpPr>
-      <p:grpSpPr>
-        <a:xfrm>
-          <a:off x="0" y="0"/>
-          <a:ext cx="0" cy="0"/>
-          <a:chOff x="0" y="0"/>
-          <a:chExt cx="0" cy="0"/>
-        </a:xfrm>
-      </p:grpSpPr>
-      <p:sp>
-        <p:nvSpPr>
-          <p:cNvPr id="2" name="Title 1"/>
-          <p:cNvSpPr>
-            <a:spLocks noGrp="1"/>
-          </p:cNvSpPr>
-          <p:nvPr>
-            <p:ph type="title"/>
-          </p:nvPr>
-        </p:nvSpPr>
-        <p:spPr bwMode="blackWhite">
-          <a:xfrm>
-            <a:off x="1097280" y="2386744"/>
-            <a:ext cx="9997440" cy="1645920"/>
-          </a:xfrm>
-          <a:solidFill>
-            <a:srgbClr val="FFFFFF"/>
-          </a:solidFill>
-          <a:ln w="38100">
-            <a:solidFill>
-              <a:srgbClr val="404040"/>
-            </a:solidFill>
-          </a:ln>
-        </p:spPr>
-        <p:txBody>
-          <a:bodyPr/>
-          <a:lstStyle/>
-          <a:p>
-            <a:pPr lvl="0" indent="0" marL="0">
-              <a:buNone/>
-            </a:pPr>
-            <a:r>
-              <a:rPr/>
-              <a:t>Today’s Workflow</a:t>
-            </a:r>
-          </a:p>
-        </p:txBody>
-      </p:sp>
-    </p:spTree>
-  </p:cSld>
-</p:sld>
-</file>
-
-<file path=ppt/slides/slide22.xml><?xml version="1.0" encoding="utf-8"?>
-<p:sld xmlns:a="http://schemas.openxmlformats.org/drawingml/2006/main" xmlns:r="http://schemas.openxmlformats.org/officeDocument/2006/relationships" xmlns:p="http://schemas.openxmlformats.org/presentationml/2006/main">
-  <p:cSld>
-    <p:spTree>
-      <p:nvGrpSpPr>
-        <p:cNvPr id="1" name=""/>
-        <p:cNvGrpSpPr/>
-        <p:nvPr/>
-      </p:nvGrpSpPr>
-      <p:grpSpPr>
-        <a:xfrm>
-          <a:off x="0" y="0"/>
-          <a:ext cx="0" cy="0"/>
-          <a:chOff x="0" y="0"/>
-          <a:chExt cx="0" cy="0"/>
-        </a:xfrm>
-      </p:grpSpPr>
-      <p:sp>
-        <p:nvSpPr>
-          <p:cNvPr id="2" name="Title 1"/>
-          <p:cNvSpPr>
-            <a:spLocks noGrp="1"/>
-          </p:cNvSpPr>
-          <p:nvPr>
-            <p:ph type="title"/>
-          </p:nvPr>
-        </p:nvSpPr>
-        <p:spPr>
-          <a:xfrm>
-            <a:off x="1097280" y="964692"/>
-            <a:ext cx="9997440" cy="1188720"/>
-          </a:xfrm>
-        </p:spPr>
-        <p:txBody>
-          <a:bodyPr/>
-          <a:lstStyle/>
-          <a:p>
-            <a:pPr lvl="0" indent="0" marL="0">
-              <a:buNone/>
-            </a:pPr>
-            <a:r>
-              <a:rPr/>
-              <a:t>How This Will Go</a:t>
-            </a:r>
-          </a:p>
-        </p:txBody>
-      </p:sp>
-      <p:sp>
-        <p:nvSpPr>
-          <p:cNvPr id="1043" name="prose" descr=""/>
-          <p:cNvSpPr/>
-          <p:nvPr/>
-        </p:nvSpPr>
-        <p:spPr>
-          <a:xfrm>
-            <a:off x="1097280" y="2633472"/>
-            <a:ext cx="9994392" cy="548640"/>
-          </a:xfrm>
-          <a:prstGeom prst="roundRect">
-            <a:avLst>
-              <a:gd name="adj" fmla="val 6000"/>
-            </a:avLst>
-          </a:prstGeom>
-          <a:noFill/>
-          <a:ln>
-            <a:noFill/>
-          </a:ln>
-        </p:spPr>
-        <p:txBody>
-          <a:bodyPr lIns="91440" tIns="68580" rIns="91440" bIns="68580" anchor="t" wrap="square">
-            <a:normAutofit/>
-          </a:bodyPr>
-          <a:lstStyle/>
-          <a:p>
-            <a:pPr algn="l"/>
-            <a:r>
-              <a:rPr lang="en-US" sz="1200" b="0" dirty="0">
-                <a:solidFill>
-                  <a:srgbClr val="010B13"/>
-                </a:solidFill>
-              </a:rPr>
-              <a:t>Swap drafts with your assigned partner (Canvas pairing)Read once through without commenting — get the whole pictureSecond pass: comment using the worksheet, section by sectionReturn &amp; discuss: 5 minutes each — reviewer summarizes their top 3 points out loudWrite your revision plan (3 biggest issues + first move)</a:t>
-            </a:r>
-          </a:p>
-        </p:txBody>
-      </p:sp>
-      <p:sp>
-        <p:nvSpPr>
-          <p:cNvPr id="1044" name="callout-warning" descr="warning callout: Warning. Silence-reading for the full time, then discussion. Comments without discussion leave too much to interpretation."/>
-          <p:cNvSpPr/>
-          <p:nvPr/>
-        </p:nvSpPr>
-        <p:spPr>
-          <a:xfrm>
-            <a:off x="1097280" y="3273552"/>
-            <a:ext cx="9994392" cy="1082040"/>
-          </a:xfrm>
-          <a:prstGeom prst="roundRect">
-            <a:avLst>
-              <a:gd name="adj" fmla="val 6000"/>
-            </a:avLst>
-          </a:prstGeom>
-          <a:solidFill>
-            <a:srgbClr val="FEFDFA"/>
-          </a:solidFill>
-          <a:ln w="19050">
-            <a:solidFill>
-              <a:srgbClr val="CC6600"/>
-            </a:solidFill>
-          </a:ln>
-        </p:spPr>
-        <p:txBody>
-          <a:bodyPr lIns="91440" tIns="68580" rIns="91440" bIns="68580" anchor="t" wrap="square">
-            <a:normAutofit/>
-          </a:bodyPr>
-          <a:lstStyle/>
-          <a:p/>
-        </p:txBody>
-      </p:sp>
-      <p:sp>
-        <p:nvSpPr>
-          <p:cNvPr id="1045" name="callout-title" descr=""/>
-          <p:cNvSpPr/>
-          <p:nvPr/>
-        </p:nvSpPr>
-        <p:spPr>
-          <a:xfrm>
-            <a:off x="1097280" y="3273552"/>
-            <a:ext cx="9994392" cy="320040"/>
-          </a:xfrm>
-          <a:prstGeom prst="roundRect">
-            <a:avLst>
-              <a:gd name="adj" fmla="val 6000"/>
-            </a:avLst>
-          </a:prstGeom>
-          <a:solidFill>
-            <a:srgbClr val="CC6600"/>
-          </a:solidFill>
-          <a:ln>
-            <a:noFill/>
-          </a:ln>
-        </p:spPr>
-        <p:txBody>
-          <a:bodyPr lIns="91440" tIns="68580" rIns="91440" bIns="68580" anchor="t" wrap="square">
-            <a:normAutofit/>
-          </a:bodyPr>
-          <a:lstStyle/>
-          <a:p>
-            <a:pPr algn="l"/>
-            <a:r>
-              <a:rPr lang="en-US" sz="1400" b="1" dirty="0">
-                <a:solidFill>
-                  <a:srgbClr val="FEFDFA"/>
-                </a:solidFill>
-              </a:rPr>
-              <a:t>Warning</a:t>
-            </a:r>
-          </a:p>
-        </p:txBody>
-      </p:sp>
-      <p:sp>
-        <p:nvSpPr>
-          <p:cNvPr id="1046" name="callout-body" descr=""/>
-          <p:cNvSpPr/>
-          <p:nvPr/>
-        </p:nvSpPr>
-        <p:spPr>
-          <a:xfrm>
-            <a:off x="1097280" y="3593592"/>
-            <a:ext cx="9994392" cy="762000"/>
-          </a:xfrm>
-          <a:prstGeom prst="roundRect">
-            <a:avLst>
-              <a:gd name="adj" fmla="val 6000"/>
-            </a:avLst>
-          </a:prstGeom>
-          <a:solidFill>
-            <a:srgbClr val="FEFDFA"/>
-          </a:solidFill>
-          <a:ln>
-            <a:noFill/>
-          </a:ln>
-        </p:spPr>
-        <p:txBody>
-          <a:bodyPr lIns="91440" tIns="68580" rIns="91440" bIns="68580" anchor="t" wrap="square">
-            <a:normAutofit/>
-          </a:bodyPr>
-          <a:lstStyle/>
-          <a:p>
-            <a:pPr algn="l"/>
-            <a:r>
-              <a:rPr lang="en-US" sz="1200" b="0" dirty="0">
-                <a:solidFill>
-                  <a:srgbClr val="010B13"/>
-                </a:solidFill>
-              </a:rPr>
-              <a:t>Silence-reading for the full time, then discussion. Comments without discussion leave too much to interpretation.</a:t>
-            </a:r>
-          </a:p>
-        </p:txBody>
-      </p:sp>
-    </p:spTree>
-  </p:cSld>
-</p:sld>
-</file>
-
-<file path=ppt/slides/slide23.xml><?xml version="1.0" encoding="utf-8"?>
-<p:sld xmlns:a="http://schemas.openxmlformats.org/drawingml/2006/main" xmlns:r="http://schemas.openxmlformats.org/officeDocument/2006/relationships" xmlns:p="http://schemas.openxmlformats.org/presentationml/2006/main">
-  <p:cSld>
-    <p:spTree>
-      <p:nvGrpSpPr>
-        <p:cNvPr id="1" name=""/>
-        <p:cNvGrpSpPr/>
-        <p:nvPr/>
-      </p:nvGrpSpPr>
-      <p:grpSpPr>
-        <a:xfrm>
-          <a:off x="0" y="0"/>
-          <a:ext cx="0" cy="0"/>
-          <a:chOff x="0" y="0"/>
-          <a:chExt cx="0" cy="0"/>
-        </a:xfrm>
-      </p:grpSpPr>
-      <p:sp>
-        <p:nvSpPr>
-          <p:cNvPr id="2" name="Title 1"/>
-          <p:cNvSpPr>
-            <a:spLocks noGrp="1"/>
-          </p:cNvSpPr>
-          <p:nvPr>
-            <p:ph type="title"/>
-          </p:nvPr>
-        </p:nvSpPr>
-        <p:spPr>
-          <a:xfrm>
-            <a:off x="1097280" y="964692"/>
-            <a:ext cx="9997440" cy="1188720"/>
-          </a:xfrm>
-        </p:spPr>
-        <p:txBody>
-          <a:bodyPr/>
-          <a:lstStyle/>
-          <a:p>
-            <a:pPr lvl="0" indent="0" marL="0">
-              <a:buNone/>
-            </a:pPr>
-            <a:r>
-              <a:rPr/>
-              <a:t>The Worksheet Is Your Checklist</a:t>
-            </a:r>
-          </a:p>
-        </p:txBody>
-      </p:sp>
-      <p:sp>
-        <p:nvSpPr>
-          <p:cNvPr id="1047" name="prose" descr=""/>
-          <p:cNvSpPr/>
-          <p:nvPr/>
-        </p:nvSpPr>
-        <p:spPr>
-          <a:xfrm>
-            <a:off x="1097280" y="2633472"/>
-            <a:ext cx="9994392" cy="182880"/>
-          </a:xfrm>
-          <a:prstGeom prst="roundRect">
-            <a:avLst>
-              <a:gd name="adj" fmla="val 6000"/>
-            </a:avLst>
-          </a:prstGeom>
-          <a:noFill/>
-          <a:ln>
-            <a:noFill/>
-          </a:ln>
-        </p:spPr>
-        <p:txBody>
-          <a:bodyPr lIns="91440" tIns="68580" rIns="91440" bIns="68580" anchor="t" wrap="square">
-            <a:normAutofit/>
-          </a:bodyPr>
-          <a:lstStyle/>
-          <a:p>
-            <a:pPr algn="l"/>
-            <a:r>
-              <a:rPr lang="en-US" sz="1200" b="0" dirty="0">
-                <a:solidFill>
-                  <a:srgbClr val="010B13"/>
-                </a:solidFill>
-              </a:rPr>
-              <a:t>The worksheet mirrors the report:</a:t>
-            </a:r>
-          </a:p>
-        </p:txBody>
-      </p:sp>
-      <p:sp>
-        <p:nvSpPr>
-          <p:cNvPr id="1048" name="prose" descr=""/>
-          <p:cNvSpPr/>
-          <p:nvPr/>
-        </p:nvSpPr>
-        <p:spPr>
-          <a:xfrm>
-            <a:off x="1097280" y="2907792"/>
-            <a:ext cx="9994392" cy="365760"/>
-          </a:xfrm>
-          <a:prstGeom prst="roundRect">
-            <a:avLst>
-              <a:gd name="adj" fmla="val 6000"/>
-            </a:avLst>
-          </a:prstGeom>
-          <a:noFill/>
-          <a:ln>
-            <a:noFill/>
-          </a:ln>
-        </p:spPr>
-        <p:txBody>
-          <a:bodyPr lIns="91440" tIns="68580" rIns="91440" bIns="68580" anchor="t" wrap="square">
-            <a:normAutofit/>
-          </a:bodyPr>
-          <a:lstStyle/>
-          <a:p>
-            <a:pPr algn="l"/>
-            <a:r>
-              <a:rPr lang="en-US" sz="1200" b="0" dirty="0">
-                <a:solidFill>
-                  <a:srgbClr val="010B13"/>
-                </a:solidFill>
-              </a:rPr>
-              <a:t>One block per section (Intro → Method → Results → Discussion → APA)Each block asks for: one strength, one issue, one suggestionFinish with the top 3 priorities for the author</a:t>
-            </a:r>
-          </a:p>
-        </p:txBody>
-      </p:sp>
-      <p:sp>
-        <p:nvSpPr>
-          <p:cNvPr id="1049" name="callout-tip" descr="tip callout: Tip. A strength per section is mandatory. “What’s working” tells the author what not to delete in revision — and it’s the comment they’ll actually remember."/>
-          <p:cNvSpPr/>
-          <p:nvPr/>
-        </p:nvSpPr>
-        <p:spPr>
-          <a:xfrm>
-            <a:off x="1097280" y="3364992"/>
-            <a:ext cx="9994392" cy="1082040"/>
-          </a:xfrm>
-          <a:prstGeom prst="roundRect">
-            <a:avLst>
-              <a:gd name="adj" fmla="val 6000"/>
-            </a:avLst>
-          </a:prstGeom>
-          <a:solidFill>
-            <a:srgbClr val="FEFDFA"/>
-          </a:solidFill>
-          <a:ln w="19050">
-            <a:solidFill>
-              <a:srgbClr val="009955"/>
-            </a:solidFill>
-          </a:ln>
-        </p:spPr>
-        <p:txBody>
-          <a:bodyPr lIns="91440" tIns="68580" rIns="91440" bIns="68580" anchor="t" wrap="square">
-            <a:normAutofit/>
-          </a:bodyPr>
-          <a:lstStyle/>
-          <a:p/>
-        </p:txBody>
-      </p:sp>
-      <p:sp>
-        <p:nvSpPr>
-          <p:cNvPr id="1050" name="callout-title" descr=""/>
-          <p:cNvSpPr/>
-          <p:nvPr/>
-        </p:nvSpPr>
-        <p:spPr>
-          <a:xfrm>
-            <a:off x="1097280" y="3364992"/>
-            <a:ext cx="9994392" cy="320040"/>
-          </a:xfrm>
-          <a:prstGeom prst="roundRect">
-            <a:avLst>
-              <a:gd name="adj" fmla="val 6000"/>
-            </a:avLst>
-          </a:prstGeom>
-          <a:solidFill>
-            <a:srgbClr val="009955"/>
-          </a:solidFill>
-          <a:ln>
-            <a:noFill/>
-          </a:ln>
-        </p:spPr>
-        <p:txBody>
-          <a:bodyPr lIns="91440" tIns="68580" rIns="91440" bIns="68580" anchor="t" wrap="square">
-            <a:normAutofit/>
-          </a:bodyPr>
-          <a:lstStyle/>
-          <a:p>
-            <a:pPr algn="l"/>
-            <a:r>
-              <a:rPr lang="en-US" sz="1400" b="1" dirty="0">
-                <a:solidFill>
-                  <a:srgbClr val="FEFDFA"/>
-                </a:solidFill>
-              </a:rPr>
-              <a:t>Tip</a:t>
-            </a:r>
-          </a:p>
-        </p:txBody>
-      </p:sp>
-      <p:sp>
-        <p:nvSpPr>
-          <p:cNvPr id="1051" name="callout-body" descr=""/>
-          <p:cNvSpPr/>
-          <p:nvPr/>
-        </p:nvSpPr>
-        <p:spPr>
-          <a:xfrm>
-            <a:off x="1097280" y="3685032"/>
-            <a:ext cx="9994392" cy="762000"/>
-          </a:xfrm>
-          <a:prstGeom prst="roundRect">
-            <a:avLst>
-              <a:gd name="adj" fmla="val 6000"/>
-            </a:avLst>
-          </a:prstGeom>
-          <a:solidFill>
-            <a:srgbClr val="FEFDFA"/>
-          </a:solidFill>
-          <a:ln>
-            <a:noFill/>
-          </a:ln>
-        </p:spPr>
-        <p:txBody>
-          <a:bodyPr lIns="91440" tIns="68580" rIns="91440" bIns="68580" anchor="t" wrap="square">
-            <a:normAutofit/>
-          </a:bodyPr>
-          <a:lstStyle/>
-          <a:p>
-            <a:pPr algn="l"/>
-            <a:r>
-              <a:rPr lang="en-US" sz="1200" b="0" dirty="0">
-                <a:solidFill>
-                  <a:srgbClr val="010B13"/>
-                </a:solidFill>
-              </a:rPr>
-              <a:t>A strength per section is mandatory. “What’s working” tells the author what not to delete in revision — and it’s the comment they’ll actually remember.</a:t>
-            </a:r>
-          </a:p>
-        </p:txBody>
-      </p:sp>
-    </p:spTree>
-  </p:cSld>
-</p:sld>
-</file>
-
-<file path=ppt/slides/slide24.xml><?xml version="1.0" encoding="utf-8"?>
-<p:sld xmlns:a="http://schemas.openxmlformats.org/drawingml/2006/main" xmlns:r="http://schemas.openxmlformats.org/officeDocument/2006/relationships" xmlns:p="http://schemas.openxmlformats.org/presentationml/2006/main">
-  <p:cSld>
-    <p:spTree>
-      <p:nvGrpSpPr>
-        <p:cNvPr id="1" name=""/>
-        <p:cNvGrpSpPr/>
-        <p:nvPr/>
-      </p:nvGrpSpPr>
-      <p:grpSpPr>
-        <a:xfrm>
-          <a:off x="0" y="0"/>
-          <a:ext cx="0" cy="0"/>
-          <a:chOff x="0" y="0"/>
-          <a:chExt cx="0" cy="0"/>
-        </a:xfrm>
-      </p:grpSpPr>
-      <p:sp>
-        <p:nvSpPr>
-          <p:cNvPr id="2" name="Title 1"/>
-          <p:cNvSpPr>
-            <a:spLocks noGrp="1"/>
-          </p:cNvSpPr>
-          <p:nvPr>
-            <p:ph type="title"/>
-          </p:nvPr>
-        </p:nvSpPr>
-        <p:spPr bwMode="blackWhite">
-          <a:xfrm>
-            <a:off x="1097280" y="2386744"/>
-            <a:ext cx="9997440" cy="1645920"/>
-          </a:xfrm>
-          <a:solidFill>
-            <a:srgbClr val="FFFFFF"/>
-          </a:solidFill>
-          <a:ln w="38100">
-            <a:solidFill>
-              <a:srgbClr val="404040"/>
-            </a:solidFill>
-          </a:ln>
-        </p:spPr>
-        <p:txBody>
-          <a:bodyPr/>
-          <a:lstStyle/>
-          <a:p>
-            <a:pPr lvl="0" indent="0" marL="0">
-              <a:buNone/>
-            </a:pPr>
-            <a:r>
-              <a:rPr/>
-              <a:t>Questions?</a:t>
-            </a:r>
-          </a:p>
-        </p:txBody>
-      </p:sp>
-    </p:spTree>
-  </p:cSld>
-</p:sld>
-</file>
-
-<file path=ppt/slides/slide25.xml><?xml version="1.0" encoding="utf-8"?>
-<p:sld xmlns:a="http://schemas.openxmlformats.org/drawingml/2006/main" xmlns:r="http://schemas.openxmlformats.org/officeDocument/2006/relationships" xmlns:p="http://schemas.openxmlformats.org/presentationml/2006/main">
-  <p:cSld>
-    <p:spTree>
-      <p:nvGrpSpPr>
-        <p:cNvPr id="1" name=""/>
-        <p:cNvGrpSpPr/>
-        <p:nvPr/>
-      </p:nvGrpSpPr>
-      <p:grpSpPr>
-        <a:xfrm>
-          <a:off x="0" y="0"/>
-          <a:ext cx="0" cy="0"/>
-          <a:chOff x="0" y="0"/>
-          <a:chExt cx="0" cy="0"/>
-        </a:xfrm>
-      </p:grpSpPr>
-      <p:sp>
-        <p:nvSpPr>
-          <p:cNvPr id="2" name="Title 1"/>
-          <p:cNvSpPr>
-            <a:spLocks noGrp="1"/>
-          </p:cNvSpPr>
-          <p:nvPr>
-            <p:ph type="title"/>
-          </p:nvPr>
-        </p:nvSpPr>
-        <p:spPr>
-          <a:xfrm>
-            <a:off x="1097280" y="964692"/>
-            <a:ext cx="9997440" cy="1188720"/>
-          </a:xfrm>
-        </p:spPr>
-        <p:txBody>
-          <a:bodyPr/>
-          <a:lstStyle/>
-          <a:p>
-            <a:pPr lvl="0" indent="0" marL="0">
-              <a:buNone/>
-            </a:pPr>
-            <a:r>
-              <a:rPr/>
-              <a:t>Looking Ahead</a:t>
-            </a:r>
-          </a:p>
-        </p:txBody>
-      </p:sp>
-      <p:sp>
-        <p:nvSpPr>
-          <p:cNvPr id="3" name="Content Placeholder 2"/>
-          <p:cNvSpPr>
-            <a:spLocks noGrp="1"/>
-          </p:cNvSpPr>
-          <p:nvPr>
-            <p:ph idx="1"/>
-          </p:nvPr>
-        </p:nvSpPr>
-        <p:spPr/>
-        <p:txBody>
-          <a:bodyPr/>
-          <a:lstStyle/>
-          <a:p>
-            <a:pPr lvl="0"/>
-            <a:r>
-              <a:rPr b="1"/>
-              <a:t>Revise</a:t>
-            </a:r>
-            <a:r>
-              <a:rPr/>
-              <a:t> using your feedback + plan — the improved draft is the foundation for the rest of the semester</a:t>
-            </a:r>
-          </a:p>
-          <a:p>
-            <a:pPr lvl="0"/>
-            <a:r>
-              <a:rPr b="1"/>
-              <a:t>Lab 11:</a:t>
-            </a:r>
-            <a:r>
-              <a:rPr/>
-              <a:t> multi-group analyses — your results are about to get more complex, so a clean draft matters</a:t>
-            </a:r>
-          </a:p>
-        </p:txBody>
-      </p:sp>
-    </p:spTree>
-  </p:cSld>
-</p:sld>
-</file>
-
-<file path=ppt/slides/slide26.xml><?xml version="1.0" encoding="utf-8"?>
-<p:sld xmlns:a="http://schemas.openxmlformats.org/drawingml/2006/main" xmlns:r="http://schemas.openxmlformats.org/officeDocument/2006/relationships" xmlns:p="http://schemas.openxmlformats.org/presentationml/2006/main">
-  <p:cSld>
-    <p:spTree>
-      <p:nvGrpSpPr>
-        <p:cNvPr id="1" name=""/>
-        <p:cNvGrpSpPr/>
-        <p:nvPr/>
-      </p:nvGrpSpPr>
-      <p:grpSpPr>
-        <a:xfrm>
-          <a:off x="0" y="0"/>
-          <a:ext cx="0" cy="0"/>
-          <a:chOff x="0" y="0"/>
-          <a:chExt cx="0" cy="0"/>
-        </a:xfrm>
-      </p:grpSpPr>
-      <p:sp>
-        <p:nvSpPr>
-          <p:cNvPr id="2" name="Title 1"/>
-          <p:cNvSpPr>
-            <a:spLocks noGrp="1"/>
-          </p:cNvSpPr>
-          <p:nvPr>
-            <p:ph type="title"/>
-          </p:nvPr>
-        </p:nvSpPr>
-        <p:spPr>
-          <a:xfrm>
-            <a:off x="1097280" y="964692"/>
-            <a:ext cx="9997440" cy="1188720"/>
-          </a:xfrm>
-        </p:spPr>
-        <p:txBody>
-          <a:bodyPr/>
-          <a:lstStyle/>
-          <a:p>
-            <a:pPr lvl="0" indent="0" marL="0">
-              <a:buNone/>
-            </a:pPr>
-            <a:r>
-              <a:rPr/>
-              <a:t>Assignments &amp; Reminders</a:t>
-            </a:r>
-          </a:p>
-        </p:txBody>
-      </p:sp>
-      <p:sp>
-        <p:nvSpPr>
-          <p:cNvPr id="3" name="Content Placeholder 2"/>
-          <p:cNvSpPr>
-            <a:spLocks noGrp="1"/>
-          </p:cNvSpPr>
-          <p:nvPr>
-            <p:ph idx="1"/>
-          </p:nvPr>
-        </p:nvSpPr>
-        <p:spPr/>
-        <p:txBody>
-          <a:bodyPr/>
-          <a:lstStyle/>
-          <a:p>
-            <a:pPr lvl="0" indent="0" marL="0">
-              <a:buNone/>
-            </a:pPr>
-            <a:r>
-              <a:rPr b="1"/>
-              <a:t>Given this week:</a:t>
-            </a:r>
-          </a:p>
-          <a:p>
-            <a:pPr lvl="0"/>
-            <a:r>
-              <a:rPr/>
-              <a:t>Complete Research Project Report</a:t>
-            </a:r>
-          </a:p>
-          <a:p>
-            <a:pPr lvl="0" indent="0" marL="0">
-              <a:buNone/>
-            </a:pPr>
-            <a:r>
-              <a:rPr b="1"/>
-              <a:t>Due this week:</a:t>
-            </a:r>
-          </a:p>
-          <a:p>
-            <a:pPr lvl="0"/>
-            <a:r>
-              <a:rPr/>
-              <a:t>Complete DRAFT Research Project Report</a:t>
-            </a:r>
-          </a:p>
-          <a:p>
-            <a:pPr lvl="0" indent="0" marL="0">
-              <a:buNone/>
-            </a:pPr>
-            <a:r>
-              <a:rPr/>
-              <a:t>Submit to your lab section in Canvas by 11:59pm the day before your lab meets.</a:t>
-            </a:r>
-          </a:p>
-        </p:txBody>
-      </p:sp>
+      </p:pic>
     </p:spTree>
   </p:cSld>
 </p:sld>
@@ -6279,19 +6211,49 @@
             </a:pPr>
             <a:r>
               <a:rPr/>
-              <a:t>What You Need Today</a:t>
-            </a:r>
-          </a:p>
-        </p:txBody>
-      </p:sp>
-      <p:sp>
-        <p:nvSpPr>
-          <p:cNvPr id="3" name="Content Placeholder 2"/>
-          <p:cNvSpPr>
-            <a:spLocks noGrp="1"/>
-          </p:cNvSpPr>
-          <p:nvPr>
-            <p:ph idx="1"/>
+              <a:t>2 Peer review serves the reader</a:t>
+            </a:r>
+          </a:p>
+        </p:txBody>
+      </p:sp>
+      <p:pic>
+        <p:nvPicPr>
+          <p:cNvPr descr="A cartoon showing how people can interpret the same statement differently, illustrating why reader confusion is useful revision evidence" id="0" name="Picture 1"/>
+          <p:cNvPicPr>
+            <a:picLocks noGrp="1" noChangeAspect="1"/>
+          </p:cNvPicPr>
+          <p:nvPr/>
+        </p:nvPicPr>
+        <p:blipFill>
+          <a:blip r:embed="rId3"/>
+          <a:stretch>
+            <a:fillRect/>
+          </a:stretch>
+        </p:blipFill>
+        <p:spPr bwMode="auto">
+          <a:xfrm>
+            <a:off x="1409700" y="2628900"/>
+            <a:ext cx="4267200" cy="3098800"/>
+          </a:xfrm>
+          <a:prstGeom prst="rect">
+            <a:avLst/>
+          </a:prstGeom>
+          <a:noFill/>
+          <a:ln w="9525">
+            <a:noFill/>
+            <a:headEnd/>
+            <a:tailEnd/>
+          </a:ln>
+        </p:spPr>
+      </p:pic>
+      <p:sp>
+        <p:nvSpPr>
+          <p:cNvPr id="4" name="Content Placeholder 3"/>
+          <p:cNvSpPr>
+            <a:spLocks noGrp="1"/>
+          </p:cNvSpPr>
+          <p:nvPr>
+            <p:ph idx="2" sz="half"/>
           </p:nvPr>
         </p:nvSpPr>
         <p:spPr/>
@@ -6304,15 +6266,34 @@
             </a:pPr>
             <a:r>
               <a:rPr/>
-              <a:t>Everything for this week is linked on the next slides – and always on the lab page under </a:t>
-            </a:r>
-            <a:r>
-              <a:rPr b="1"/>
-              <a:t>Handouts &amp; References</a:t>
-            </a:r>
-            <a:r>
-              <a:rPr/>
-              <a:t>.</a:t>
+              <a:t>A useful review tells the author:</a:t>
+            </a:r>
+          </a:p>
+          <a:p>
+            <a:pPr lvl="0" indent="-457200" marL="457200">
+              <a:buAutoNum type="arabicPeriod"/>
+            </a:pPr>
+            <a:r>
+              <a:rPr/>
+              <a:t>what the draft communicates</a:t>
+            </a:r>
+          </a:p>
+          <a:p>
+            <a:pPr lvl="0" indent="-457200" marL="457200">
+              <a:buAutoNum type="arabicPeriod"/>
+            </a:pPr>
+            <a:r>
+              <a:rPr/>
+              <a:t>where the reader is unsure</a:t>
+            </a:r>
+          </a:p>
+          <a:p>
+            <a:pPr lvl="0" indent="-457200" marL="457200">
+              <a:buAutoNum type="arabicPeriod"/>
+            </a:pPr>
+            <a:r>
+              <a:rPr/>
+              <a:t>a revision to try</a:t>
             </a:r>
           </a:p>
           <a:p>
@@ -6321,15 +6302,7 @@
             </a:pPr>
             <a:r>
               <a:rPr/>
-              <a:t>Open these </a:t>
-            </a:r>
-            <a:r>
-              <a:rPr b="1"/>
-              <a:t>before we start</a:t>
-            </a:r>
-            <a:r>
-              <a:rPr/>
-              <a:t> so you can follow along.</a:t>
+              <a:t>Report the reading experience; do not grade the writer.</a:t>
             </a:r>
           </a:p>
         </p:txBody>
@@ -6381,107 +6354,94 @@
             </a:pPr>
             <a:r>
               <a:rPr/>
-              <a:t>Additional Materials</a:t>
-            </a:r>
-          </a:p>
-        </p:txBody>
-      </p:sp>
-      <p:sp>
-        <p:nvSpPr>
-          <p:cNvPr id="1003" name="card-blue" descr="card: [book icon]. Peer review Intro Method Results Discussion [Word document]"/>
-          <p:cNvSpPr/>
+              <a:t>3 Read once for the whole paper</a:t>
+            </a:r>
+          </a:p>
+        </p:txBody>
+      </p:sp>
+      <p:sp>
+        <p:nvSpPr>
+          <p:cNvPr id="3" name="Content Placeholder 2"/>
+          <p:cNvSpPr>
+            <a:spLocks noGrp="1"/>
+          </p:cNvSpPr>
+          <p:nvPr>
+            <p:ph idx="1" sz="half"/>
+          </p:nvPr>
+        </p:nvSpPr>
+        <p:spPr/>
+        <p:txBody>
+          <a:bodyPr/>
+          <a:lstStyle/>
+          <a:p>
+            <a:pPr lvl="0" indent="0" marL="0">
+              <a:buNone/>
+            </a:pPr>
+            <a:r>
+              <a:rPr/>
+              <a:t>On the first pass, ask:</a:t>
+            </a:r>
+          </a:p>
+          <a:p>
+            <a:pPr lvl="0"/>
+            <a:r>
+              <a:rPr/>
+              <a:t>What is the paper’s main question?</a:t>
+            </a:r>
+          </a:p>
+          <a:p>
+            <a:pPr lvl="0"/>
+            <a:r>
+              <a:rPr/>
+              <a:t>What story connects the sections?</a:t>
+            </a:r>
+          </a:p>
+          <a:p>
+            <a:pPr lvl="0"/>
+            <a:r>
+              <a:rPr/>
+              <a:t>Where is the organization clear?</a:t>
+            </a:r>
+          </a:p>
+          <a:p>
+            <a:pPr lvl="0"/>
+            <a:r>
+              <a:rPr/>
+              <a:t>Where do you lose the thread?</a:t>
+            </a:r>
+          </a:p>
+        </p:txBody>
+      </p:sp>
+      <p:pic>
+        <p:nvPicPr>
+          <p:cNvPr descr="A funnel narrowing from a broad opening to a focused point, illustrating the expected structure of a research introduction" id="0" name="Picture 1"/>
+          <p:cNvPicPr>
+            <a:picLocks noGrp="1" noChangeAspect="1"/>
+          </p:cNvPicPr>
           <p:nvPr/>
-        </p:nvSpPr>
-        <p:spPr>
+        </p:nvPicPr>
+        <p:blipFill>
+          <a:blip r:embed="rId3"/>
+          <a:stretch>
+            <a:fillRect/>
+          </a:stretch>
+        </p:blipFill>
+        <p:spPr bwMode="auto">
           <a:xfrm>
-            <a:off x="1097280" y="2633472"/>
-            <a:ext cx="3270504" cy="944880"/>
+            <a:off x="7086600" y="2628900"/>
+            <a:ext cx="3098800" cy="3098800"/>
           </a:xfrm>
-          <a:prstGeom prst="roundRect">
-            <a:avLst>
-              <a:gd name="adj" fmla="val 6000"/>
-            </a:avLst>
+          <a:prstGeom prst="rect">
+            <a:avLst/>
           </a:prstGeom>
-          <a:solidFill>
-            <a:srgbClr val="FEFDFA"/>
-          </a:solidFill>
-          <a:ln w="19050">
-            <a:solidFill>
-              <a:srgbClr val="CCCCCC"/>
-            </a:solidFill>
+          <a:noFill/>
+          <a:ln w="9525">
+            <a:noFill/>
+            <a:headEnd/>
+            <a:tailEnd/>
           </a:ln>
         </p:spPr>
-        <p:txBody>
-          <a:bodyPr lIns="91440" tIns="68580" rIns="91440" bIns="68580" anchor="t" wrap="square">
-            <a:normAutofit/>
-          </a:bodyPr>
-          <a:lstStyle/>
-          <a:p>
-            <a:pPr algn="l"/>
-            <a:r>
-              <a:rPr lang="en-US" sz="1400" b="1" dirty="0">
-                <a:solidFill>
-                  <a:srgbClr val="005D84"/>
-                </a:solidFill>
-              </a:rPr>
-              <a:t>[book icon]</a:t>
-            </a:r>
-          </a:p>
-          <a:p>
-            <a:pPr algn="l"/>
-            <a:r>
-              <a:rPr lang="en-US" sz="1200" b="0" dirty="0">
-                <a:solidFill>
-                  <a:srgbClr val="010B13"/>
-                </a:solidFill>
-              </a:rPr>
-              <a:t>Peer review Intro Method Results Discussion</a:t>
-            </a:r>
-          </a:p>
-          <a:p>
-            <a:pPr algn="l"/>
-            <a:r>
-              <a:rPr lang="en-US" sz="1200" b="0" dirty="0">
-                <a:solidFill>
-                  <a:srgbClr val="010B13"/>
-                </a:solidFill>
-              </a:rPr>
-              <a:t>[Word document]</a:t>
-            </a:r>
-          </a:p>
-        </p:txBody>
-      </p:sp>
-      <p:sp>
-        <p:nvSpPr>
-          <p:cNvPr id="1004" name="card-rail" descr=""/>
-          <p:cNvSpPr/>
-          <p:nvPr/>
-        </p:nvSpPr>
-        <p:spPr>
-          <a:xfrm>
-            <a:off x="1097280" y="2633472"/>
-            <a:ext cx="54864" cy="944880"/>
-          </a:xfrm>
-          <a:prstGeom prst="roundRect">
-            <a:avLst>
-              <a:gd name="adj" fmla="val 20000"/>
-            </a:avLst>
-          </a:prstGeom>
-          <a:solidFill>
-            <a:srgbClr val="005D84"/>
-          </a:solidFill>
-          <a:ln>
-            <a:noFill/>
-          </a:ln>
-        </p:spPr>
-        <p:txBody>
-          <a:bodyPr lIns="91440" tIns="68580" rIns="91440" bIns="68580" anchor="t" wrap="square">
-            <a:normAutofit/>
-          </a:bodyPr>
-          <a:lstStyle/>
-          <a:p/>
-        </p:txBody>
-      </p:sp>
+      </p:pic>
     </p:spTree>
   </p:cSld>
 </p:sld>
@@ -6514,19 +6474,11 @@
             <p:ph type="title"/>
           </p:nvPr>
         </p:nvSpPr>
-        <p:spPr bwMode="blackWhite">
+        <p:spPr>
           <a:xfrm>
-            <a:off x="1097280" y="2386744"/>
-            <a:ext cx="9997440" cy="1645920"/>
+            <a:off x="1097280" y="964692"/>
+            <a:ext cx="9997440" cy="1188720"/>
           </a:xfrm>
-          <a:solidFill>
-            <a:srgbClr val="FFFFFF"/>
-          </a:solidFill>
-          <a:ln w="38100">
-            <a:solidFill>
-              <a:srgbClr val="404040"/>
-            </a:solidFill>
-          </a:ln>
         </p:spPr>
         <p:txBody>
           <a:bodyPr/>
@@ -6537,7 +6489,62 @@
             </a:pPr>
             <a:r>
               <a:rPr/>
-              <a:t>Why Peer Review?</a:t>
+              <a:t>4 Use one feedback formula</a:t>
+            </a:r>
+          </a:p>
+        </p:txBody>
+      </p:sp>
+      <p:sp>
+        <p:nvSpPr>
+          <p:cNvPr id="3" name="Content Placeholder 2"/>
+          <p:cNvSpPr>
+            <a:spLocks noGrp="1"/>
+          </p:cNvSpPr>
+          <p:nvPr>
+            <p:ph idx="1"/>
+          </p:nvPr>
+        </p:nvSpPr>
+        <p:spPr/>
+        <p:txBody>
+          <a:bodyPr/>
+          <a:lstStyle/>
+          <a:p>
+            <a:pPr lvl="0" indent="-457200" marL="457200">
+              <a:buAutoNum type="arabicPeriod"/>
+            </a:pPr>
+            <a:r>
+              <a:rPr b="1"/>
+              <a:t>Describe:</a:t>
+            </a:r>
+            <a:r>
+              <a:rPr/>
+              <a:t> What did you notice?</a:t>
+            </a:r>
+          </a:p>
+          <a:p>
+            <a:pPr lvl="0" indent="-457200" marL="457200">
+              <a:buAutoNum type="arabicPeriod"/>
+            </a:pPr>
+            <a:r>
+              <a:rPr b="1"/>
+              <a:t>Diagnose:</a:t>
+            </a:r>
+            <a:r>
+              <a:rPr/>
+              <a:t> Why does it affect the reader?</a:t>
+            </a:r>
+          </a:p>
+          <a:p>
+            <a:pPr lvl="0" indent="-457200" marL="457200">
+              <a:buAutoNum type="arabicPeriod"/>
+            </a:pPr>
+            <a:r>
+              <a:rPr b="1"/>
+              <a:t>Suggest:</a:t>
+            </a:r>
+            <a:r>
+              <a:rPr/>
+              <a:t> What realistic move comes next?</a:t>
             </a:r>
           </a:p>
         </p:txBody>
@@ -6589,7 +6596,7 @@
             </a:pPr>
             <a:r>
               <a:rPr/>
-              <a:t>Science Runs on Peer Review</a:t>
+              <a:t>5 Make comments specific</a:t>
             </a:r>
           </a:p>
         </p:txBody>
@@ -6601,68 +6608,63 @@
             <a:spLocks noGrp="1"/>
           </p:cNvSpPr>
           <p:nvPr>
-            <p:ph idx="1"/>
-          </p:nvPr>
-        </p:nvSpPr>
-        <p:spPr/>
-        <p:txBody>
-          <a:bodyPr/>
-          <a:lstStyle/>
-          <a:p>
-            <a:pPr lvl="0"/>
-            <a:r>
-              <a:rPr/>
-              <a:t>Every published article you’ve read this semester survived review by </a:t>
-            </a:r>
+            <p:ph idx="1" sz="half"/>
+          </p:nvPr>
+        </p:nvSpPr>
+        <p:spPr/>
+        <p:txBody>
+          <a:bodyPr/>
+          <a:lstStyle/>
+          <a:p>
+            <a:pPr lvl="0" indent="0" marL="0">
+              <a:buNone/>
+            </a:pPr>
             <a:r>
               <a:rPr b="1"/>
-              <a:t>2–4 anonymous peers</a:t>
-            </a:r>
-            <a:r>
-              <a:rPr/>
-              <a:t> before publication</a:t>
-            </a:r>
-          </a:p>
-          <a:p>
-            <a:pPr lvl="0"/>
-            <a:r>
-              <a:rPr/>
-              <a:t>Reviewers catch what authors </a:t>
-            </a:r>
+              <a:t>Weak</a:t>
+            </a:r>
+          </a:p>
+          <a:p>
+            <a:pPr lvl="0" indent="0" marL="0">
+              <a:buNone/>
+            </a:pPr>
+            <a:r>
+              <a:rPr/>
+              <a:t>This section is confusing.</a:t>
+            </a:r>
+          </a:p>
+        </p:txBody>
+      </p:sp>
+      <p:sp>
+        <p:nvSpPr>
+          <p:cNvPr id="4" name="Content Placeholder 3"/>
+          <p:cNvSpPr>
+            <a:spLocks noGrp="1"/>
+          </p:cNvSpPr>
+          <p:nvPr>
+            <p:ph idx="2" sz="half"/>
+          </p:nvPr>
+        </p:nvSpPr>
+        <p:spPr/>
+        <p:txBody>
+          <a:bodyPr/>
+          <a:lstStyle/>
+          <a:p>
+            <a:pPr lvl="0" indent="0" marL="0">
+              <a:buNone/>
+            </a:pPr>
             <a:r>
               <a:rPr b="1"/>
-              <a:t>can’t see</a:t>
-            </a:r>
-            <a:r>
-              <a:rPr/>
-              <a:t> — you are the worst editor of your own writing because you know what you </a:t>
-            </a:r>
-            <a:r>
-              <a:rPr i="1"/>
-              <a:t>meant</a:t>
-            </a:r>
-          </a:p>
-          <a:p>
-            <a:pPr lvl="0"/>
-            <a:r>
-              <a:rPr/>
-              <a:t>Learning to </a:t>
-            </a:r>
-            <a:r>
-              <a:rPr b="1"/>
-              <a:t>review</a:t>
-            </a:r>
-            <a:r>
-              <a:rPr/>
-              <a:t> makes you a better </a:t>
-            </a:r>
-            <a:r>
-              <a:rPr b="1"/>
-              <a:t>writer</a:t>
-            </a:r>
-            <a:r>
-              <a:rPr/>
-              <a:t>: the questions you ask of a peer’s draft are the ones you’ll start asking of your own</a:t>
+              <a:t>Useful</a:t>
+            </a:r>
+          </a:p>
+          <a:p>
+            <a:pPr lvl="0" indent="0" marL="0">
+              <a:buNone/>
+            </a:pPr>
+            <a:r>
+              <a:rPr/>
+              <a:t>This paragraph introduces a new construct without connecting it to the core variable. Add a transition and define that relationship.</a:t>
             </a:r>
           </a:p>
         </p:txBody>
@@ -6714,237 +6716,107 @@
             </a:pPr>
             <a:r>
               <a:rPr/>
-              <a:t>Two Roles Today</a:t>
-            </a:r>
-          </a:p>
-        </p:txBody>
-      </p:sp>
-      <p:sp>
-        <p:nvSpPr>
-          <p:cNvPr id="1005" name="callout-tip" descr="tip callout: As a reviewer. Your job is to make their paper better. Not to rewrite it, not to grade it — to show them where a real reader gets lost."/>
-          <p:cNvSpPr/>
+              <a:t>6 Review the introduction’s funnel</a:t>
+            </a:r>
+          </a:p>
+        </p:txBody>
+      </p:sp>
+      <p:pic>
+        <p:nvPicPr>
+          <p:cNvPr descr="A funnel narrowing from a broad opening to a focused point, illustrating the expected structure of a research introduction" id="0" name="Picture 1"/>
+          <p:cNvPicPr>
+            <a:picLocks noGrp="1" noChangeAspect="1"/>
+          </p:cNvPicPr>
           <p:nvPr/>
-        </p:nvSpPr>
-        <p:spPr>
+        </p:nvPicPr>
+        <p:blipFill>
+          <a:blip r:embed="rId3"/>
+          <a:stretch>
+            <a:fillRect/>
+          </a:stretch>
+        </p:blipFill>
+        <p:spPr bwMode="auto">
           <a:xfrm>
-            <a:off x="1097280" y="2633472"/>
-            <a:ext cx="9994392" cy="1082040"/>
+            <a:off x="1993900" y="2628900"/>
+            <a:ext cx="3098800" cy="3098800"/>
           </a:xfrm>
-          <a:prstGeom prst="roundRect">
-            <a:avLst>
-              <a:gd name="adj" fmla="val 6000"/>
-            </a:avLst>
+          <a:prstGeom prst="rect">
+            <a:avLst/>
           </a:prstGeom>
-          <a:solidFill>
-            <a:srgbClr val="FEFDFA"/>
-          </a:solidFill>
-          <a:ln w="19050">
-            <a:solidFill>
-              <a:srgbClr val="009955"/>
-            </a:solidFill>
+          <a:noFill/>
+          <a:ln w="9525">
+            <a:noFill/>
+            <a:headEnd/>
+            <a:tailEnd/>
           </a:ln>
         </p:spPr>
-        <p:txBody>
-          <a:bodyPr lIns="91440" tIns="68580" rIns="91440" bIns="68580" anchor="t" wrap="square">
-            <a:normAutofit/>
-          </a:bodyPr>
-          <a:lstStyle/>
-          <a:p/>
-        </p:txBody>
-      </p:sp>
-      <p:sp>
-        <p:nvSpPr>
-          <p:cNvPr id="1006" name="callout-title" descr=""/>
-          <p:cNvSpPr/>
-          <p:nvPr/>
-        </p:nvSpPr>
-        <p:spPr>
-          <a:xfrm>
-            <a:off x="1097280" y="2633472"/>
-            <a:ext cx="9994392" cy="320040"/>
-          </a:xfrm>
-          <a:prstGeom prst="roundRect">
-            <a:avLst>
-              <a:gd name="adj" fmla="val 6000"/>
-            </a:avLst>
-          </a:prstGeom>
-          <a:solidFill>
-            <a:srgbClr val="009955"/>
-          </a:solidFill>
-          <a:ln>
-            <a:noFill/>
-          </a:ln>
-        </p:spPr>
-        <p:txBody>
-          <a:bodyPr lIns="91440" tIns="68580" rIns="91440" bIns="68580" anchor="t" wrap="square">
-            <a:normAutofit/>
-          </a:bodyPr>
-          <a:lstStyle/>
-          <a:p>
-            <a:pPr algn="l"/>
-            <a:r>
-              <a:rPr lang="en-US" sz="1400" b="1" dirty="0">
-                <a:solidFill>
-                  <a:srgbClr val="FEFDFA"/>
-                </a:solidFill>
-              </a:rPr>
-              <a:t>As a reviewer</a:t>
-            </a:r>
-          </a:p>
-        </p:txBody>
-      </p:sp>
-      <p:sp>
-        <p:nvSpPr>
-          <p:cNvPr id="1007" name="callout-body" descr=""/>
-          <p:cNvSpPr/>
-          <p:nvPr/>
-        </p:nvSpPr>
-        <p:spPr>
-          <a:xfrm>
-            <a:off x="1097280" y="2953512"/>
-            <a:ext cx="9994392" cy="762000"/>
-          </a:xfrm>
-          <a:prstGeom prst="roundRect">
-            <a:avLst>
-              <a:gd name="adj" fmla="val 6000"/>
-            </a:avLst>
-          </a:prstGeom>
-          <a:solidFill>
-            <a:srgbClr val="FEFDFA"/>
-          </a:solidFill>
-          <a:ln>
-            <a:noFill/>
-          </a:ln>
-        </p:spPr>
-        <p:txBody>
-          <a:bodyPr lIns="91440" tIns="68580" rIns="91440" bIns="68580" anchor="t" wrap="square">
-            <a:normAutofit/>
-          </a:bodyPr>
-          <a:lstStyle/>
-          <a:p>
-            <a:pPr algn="l"/>
-            <a:r>
-              <a:rPr lang="en-US" sz="1200" b="0" dirty="0">
-                <a:solidFill>
-                  <a:srgbClr val="010B13"/>
-                </a:solidFill>
-              </a:rPr>
-              <a:t>Your job is to make their paper better. Not to rewrite it, not to grade it — to show them where a real reader gets lost.</a:t>
-            </a:r>
-          </a:p>
-        </p:txBody>
-      </p:sp>
-      <p:sp>
-        <p:nvSpPr>
-          <p:cNvPr id="1008" name="callout-note" descr="note callout: As an author. Your job is to listen, take notes, and decide what to fix. The draft is being reviewed — not you."/>
-          <p:cNvSpPr/>
-          <p:nvPr/>
-        </p:nvSpPr>
-        <p:spPr>
-          <a:xfrm>
-            <a:off x="1097280" y="3806952"/>
-            <a:ext cx="9994392" cy="899160"/>
-          </a:xfrm>
-          <a:prstGeom prst="roundRect">
-            <a:avLst>
-              <a:gd name="adj" fmla="val 6000"/>
-            </a:avLst>
-          </a:prstGeom>
-          <a:solidFill>
-            <a:srgbClr val="FEFDFA"/>
-          </a:solidFill>
-          <a:ln w="19050">
-            <a:solidFill>
-              <a:srgbClr val="0066CC"/>
-            </a:solidFill>
-          </a:ln>
-        </p:spPr>
-        <p:txBody>
-          <a:bodyPr lIns="91440" tIns="68580" rIns="91440" bIns="68580" anchor="t" wrap="square">
-            <a:normAutofit/>
-          </a:bodyPr>
-          <a:lstStyle/>
-          <a:p/>
-        </p:txBody>
-      </p:sp>
-      <p:sp>
-        <p:nvSpPr>
-          <p:cNvPr id="1009" name="callout-title" descr=""/>
-          <p:cNvSpPr/>
-          <p:nvPr/>
-        </p:nvSpPr>
-        <p:spPr>
-          <a:xfrm>
-            <a:off x="1097280" y="3806952"/>
-            <a:ext cx="9994392" cy="320040"/>
-          </a:xfrm>
-          <a:prstGeom prst="roundRect">
-            <a:avLst>
-              <a:gd name="adj" fmla="val 6000"/>
-            </a:avLst>
-          </a:prstGeom>
-          <a:solidFill>
-            <a:srgbClr val="0066CC"/>
-          </a:solidFill>
-          <a:ln>
-            <a:noFill/>
-          </a:ln>
-        </p:spPr>
-        <p:txBody>
-          <a:bodyPr lIns="91440" tIns="68580" rIns="91440" bIns="68580" anchor="t" wrap="square">
-            <a:normAutofit/>
-          </a:bodyPr>
-          <a:lstStyle/>
-          <a:p>
-            <a:pPr algn="l"/>
-            <a:r>
-              <a:rPr lang="en-US" sz="1400" b="1" dirty="0">
-                <a:solidFill>
-                  <a:srgbClr val="FEFDFA"/>
-                </a:solidFill>
-              </a:rPr>
-              <a:t>As an author</a:t>
-            </a:r>
-          </a:p>
-        </p:txBody>
-      </p:sp>
-      <p:sp>
-        <p:nvSpPr>
-          <p:cNvPr id="1010" name="callout-body" descr=""/>
-          <p:cNvSpPr/>
-          <p:nvPr/>
-        </p:nvSpPr>
-        <p:spPr>
-          <a:xfrm>
-            <a:off x="1097280" y="4126992"/>
-            <a:ext cx="9994392" cy="579120"/>
-          </a:xfrm>
-          <a:prstGeom prst="roundRect">
-            <a:avLst>
-              <a:gd name="adj" fmla="val 6000"/>
-            </a:avLst>
-          </a:prstGeom>
-          <a:solidFill>
-            <a:srgbClr val="FEFDFA"/>
-          </a:solidFill>
-          <a:ln>
-            <a:noFill/>
-          </a:ln>
-        </p:spPr>
-        <p:txBody>
-          <a:bodyPr lIns="91440" tIns="68580" rIns="91440" bIns="68580" anchor="t" wrap="square">
-            <a:normAutofit/>
-          </a:bodyPr>
-          <a:lstStyle/>
-          <a:p>
-            <a:pPr algn="l"/>
-            <a:r>
-              <a:rPr lang="en-US" sz="1200" b="0" dirty="0">
-                <a:solidFill>
-                  <a:srgbClr val="010B13"/>
-                </a:solidFill>
-              </a:rPr>
-              <a:t>Your job is to listen, take notes, and decide what to fix. The draft is being reviewed — not you.</a:t>
+      </p:pic>
+      <p:sp>
+        <p:nvSpPr>
+          <p:cNvPr id="4" name="Content Placeholder 3"/>
+          <p:cNvSpPr>
+            <a:spLocks noGrp="1"/>
+          </p:cNvSpPr>
+          <p:nvPr>
+            <p:ph idx="2" sz="half"/>
+          </p:nvPr>
+        </p:nvSpPr>
+        <p:spPr/>
+        <p:txBody>
+          <a:bodyPr/>
+          <a:lstStyle/>
+          <a:p>
+            <a:pPr lvl="0" indent="0" marL="0">
+              <a:buNone/>
+            </a:pPr>
+            <a:r>
+              <a:rPr/>
+              <a:t>Does the introduction narrow from:</a:t>
+            </a:r>
+          </a:p>
+          <a:p>
+            <a:pPr lvl="0" indent="-457200" marL="457200">
+              <a:buAutoNum type="arabicPeriod"/>
+            </a:pPr>
+            <a:r>
+              <a:rPr/>
+              <a:t>topic and construct</a:t>
+            </a:r>
+          </a:p>
+          <a:p>
+            <a:pPr lvl="0" indent="-457200" marL="457200">
+              <a:buAutoNum type="arabicPeriod"/>
+            </a:pPr>
+            <a:r>
+              <a:rPr/>
+              <a:t>prior evidence</a:t>
+            </a:r>
+          </a:p>
+          <a:p>
+            <a:pPr lvl="0" indent="-457200" marL="457200">
+              <a:buAutoNum type="arabicPeriod"/>
+            </a:pPr>
+            <a:r>
+              <a:rPr/>
+              <a:t>unresolved gap</a:t>
+            </a:r>
+          </a:p>
+          <a:p>
+            <a:pPr lvl="0" indent="-457200" marL="457200">
+              <a:buAutoNum type="arabicPeriod"/>
+            </a:pPr>
+            <a:r>
+              <a:rPr/>
+              <a:t>current question</a:t>
+            </a:r>
+          </a:p>
+          <a:p>
+            <a:pPr lvl="0" indent="-457200" marL="457200">
+              <a:buAutoNum type="arabicPeriod"/>
+            </a:pPr>
+            <a:r>
+              <a:rPr/>
+              <a:t>directional hypotheses</a:t>
             </a:r>
           </a:p>
         </p:txBody>
@@ -6981,20 +6853,67 @@
             <p:ph type="title"/>
           </p:nvPr>
         </p:nvSpPr>
-        <p:spPr bwMode="blackWhite">
+        <p:spPr>
           <a:xfrm>
-            <a:off x="1097280" y="2386744"/>
-            <a:ext cx="9997440" cy="1645920"/>
+            <a:off x="1097280" y="964692"/>
+            <a:ext cx="9997440" cy="1188720"/>
           </a:xfrm>
-          <a:solidFill>
-            <a:srgbClr val="FFFFFF"/>
-          </a:solidFill>
-          <a:ln w="38100">
-            <a:solidFill>
-              <a:srgbClr val="404040"/>
-            </a:solidFill>
+        </p:spPr>
+        <p:txBody>
+          <a:bodyPr/>
+          <a:lstStyle/>
+          <a:p>
+            <a:pPr lvl="0" indent="0" marL="0">
+              <a:buNone/>
+            </a:pPr>
+            <a:r>
+              <a:rPr/>
+              <a:t>7 Test every cited article</a:t>
+            </a:r>
+          </a:p>
+        </p:txBody>
+      </p:sp>
+      <p:pic>
+        <p:nvPicPr>
+          <p:cNvPr descr="An annotated research-article abstract illustrating how a reviewer checks what a cited study actually found and how it supports the draft" id="0" name="Picture 1"/>
+          <p:cNvPicPr>
+            <a:picLocks noGrp="1" noChangeAspect="1"/>
+          </p:cNvPicPr>
+          <p:nvPr/>
+        </p:nvPicPr>
+        <p:blipFill>
+          <a:blip r:embed="rId3"/>
+          <a:stretch>
+            <a:fillRect/>
+          </a:stretch>
+        </p:blipFill>
+        <p:spPr bwMode="auto">
+          <a:xfrm>
+            <a:off x="1244600" y="2628900"/>
+            <a:ext cx="4597400" cy="3098800"/>
+          </a:xfrm>
+          <a:prstGeom prst="rect">
+            <a:avLst/>
+          </a:prstGeom>
+          <a:noFill/>
+          <a:ln w="9525">
+            <a:noFill/>
+            <a:headEnd/>
+            <a:tailEnd/>
           </a:ln>
         </p:spPr>
+      </p:pic>
+      <p:sp>
+        <p:nvSpPr>
+          <p:cNvPr id="4" name="Content Placeholder 3"/>
+          <p:cNvSpPr>
+            <a:spLocks noGrp="1"/>
+          </p:cNvSpPr>
+          <p:nvPr>
+            <p:ph idx="2" sz="half"/>
+          </p:nvPr>
+        </p:nvSpPr>
+        <p:spPr/>
         <p:txBody>
           <a:bodyPr/>
           <a:lstStyle/>
@@ -7004,7 +6923,35 @@
             </a:pPr>
             <a:r>
               <a:rPr/>
-              <a:t>Giving Good Feedback</a:t>
+              <a:t>For each source, ask:</a:t>
+            </a:r>
+          </a:p>
+          <a:p>
+            <a:pPr lvl="0"/>
+            <a:r>
+              <a:rPr/>
+              <a:t>Why is it here?</a:t>
+            </a:r>
+          </a:p>
+          <a:p>
+            <a:pPr lvl="0"/>
+            <a:r>
+              <a:rPr/>
+              <a:t>What claim does it support?</a:t>
+            </a:r>
+          </a:p>
+          <a:p>
+            <a:pPr lvl="0"/>
+            <a:r>
+              <a:rPr/>
+              <a:t>Is its design described accurately?</a:t>
+            </a:r>
+          </a:p>
+          <a:p>
+            <a:pPr lvl="0"/>
+            <a:r>
+              <a:rPr/>
+              <a:t>Does the next sentence explain its relevance?</a:t>
             </a:r>
           </a:p>
         </p:txBody>
@@ -7056,7 +7003,7 @@
             </a:pPr>
             <a:r>
               <a:rPr/>
-              <a:t>The Golden Rules</a:t>
+              <a:t>8 Check each hypothesis</a:t>
             </a:r>
           </a:p>
         </p:txBody>
@@ -7068,75 +7015,82 @@
             <a:spLocks noGrp="1"/>
           </p:cNvSpPr>
           <p:nvPr>
-            <p:ph idx="1"/>
-          </p:nvPr>
-        </p:nvSpPr>
-        <p:spPr/>
-        <p:txBody>
-          <a:bodyPr/>
-          <a:lstStyle/>
-          <a:p>
-            <a:pPr lvl="0" indent="-457200" marL="457200">
-              <a:buAutoNum type="arabicPeriod"/>
+            <p:ph idx="1" sz="half"/>
+          </p:nvPr>
+        </p:nvSpPr>
+        <p:spPr/>
+        <p:txBody>
+          <a:bodyPr/>
+          <a:lstStyle/>
+          <a:p>
+            <a:pPr lvl="0" indent="0" marL="0">
+              <a:buNone/>
+            </a:pPr>
+            <a:r>
+              <a:rPr/>
+              <a:t>A reader should be able to identify:</a:t>
+            </a:r>
+          </a:p>
+          <a:p>
+            <a:pPr lvl="0"/>
+            <a:r>
+              <a:rPr/>
+              <a:t>the variables</a:t>
+            </a:r>
+          </a:p>
+          <a:p>
+            <a:pPr lvl="0"/>
+            <a:r>
+              <a:rPr/>
+              <a:t>groups or levels</a:t>
+            </a:r>
+          </a:p>
+          <a:p>
+            <a:pPr lvl="0"/>
+            <a:r>
+              <a:rPr/>
+              <a:t>the predicted direction</a:t>
+            </a:r>
+          </a:p>
+          <a:p>
+            <a:pPr lvl="0"/>
+            <a:r>
+              <a:rPr/>
+              <a:t>the connection to prior evidence</a:t>
+            </a:r>
+          </a:p>
+        </p:txBody>
+      </p:sp>
+      <p:sp>
+        <p:nvSpPr>
+          <p:cNvPr id="4" name="Content Placeholder 3"/>
+          <p:cNvSpPr>
+            <a:spLocks noGrp="1"/>
+          </p:cNvSpPr>
+          <p:nvPr>
+            <p:ph idx="2" sz="half"/>
+          </p:nvPr>
+        </p:nvSpPr>
+        <p:spPr/>
+        <p:txBody>
+          <a:bodyPr/>
+          <a:lstStyle/>
+          <a:p>
+            <a:pPr lvl="0" indent="0" marL="0">
+              <a:buNone/>
             </a:pPr>
             <a:r>
               <a:rPr b="1"/>
-              <a:t>Global before local</a:t>
-            </a:r>
-            <a:r>
-              <a:rPr/>
-              <a:t> — organization and argument first; commas and typos last (a polished paragraph in the wrong place is still in the wrong place)</a:t>
-            </a:r>
-          </a:p>
-          <a:p>
-            <a:pPr lvl="0" indent="-457200" marL="457200">
-              <a:buAutoNum type="arabicPeriod"/>
-            </a:pPr>
-            <a:r>
-              <a:rPr b="1"/>
-              <a:t>Critique the paper, not the person</a:t>
-            </a:r>
-            <a:r>
-              <a:rPr/>
-              <a:t> — “this paragraph lost me” not “you’re confusing”</a:t>
-            </a:r>
-          </a:p>
-          <a:p>
-            <a:pPr lvl="0" indent="-457200" marL="457200">
-              <a:buAutoNum type="arabicPeriod"/>
-            </a:pPr>
-            <a:r>
-              <a:rPr b="1"/>
-              <a:t>Specific beats vague</a:t>
-            </a:r>
-            <a:r>
-              <a:rPr/>
-              <a:t> — point to </a:t>
-            </a:r>
-            <a:r>
-              <a:rPr i="1"/>
-              <a:t>where</a:t>
-            </a:r>
-            <a:r>
-              <a:rPr/>
-              <a:t> and say </a:t>
-            </a:r>
-            <a:r>
-              <a:rPr i="1"/>
-              <a:t>why</a:t>
-            </a:r>
-          </a:p>
-          <a:p>
-            <a:pPr lvl="0" indent="-457200" marL="457200">
-              <a:buAutoNum type="arabicPeriod"/>
-            </a:pPr>
-            <a:r>
-              <a:rPr b="1"/>
-              <a:t>Every criticism deserves a suggestion</a:t>
-            </a:r>
-            <a:r>
-              <a:rPr/>
-              <a:t> — tell them what would fix it</a:t>
+              <a:t>Read it aloud</a:t>
+            </a:r>
+          </a:p>
+          <a:p>
+            <a:pPr lvl="0" indent="0" marL="0">
+              <a:buNone/>
+            </a:pPr>
+            <a:r>
+              <a:rPr/>
+              <a:t>Could a classmate sketch the expected pattern from the sentence alone?</a:t>
             </a:r>
           </a:p>
         </p:txBody>
@@ -7163,7 +7117,7 @@
         <a:srgbClr val="E8E3CE"/>
       </a:lt2>
       <a:accent1>
-        <a:srgbClr val="F6A21D"/>
+        <a:srgbClr val="B65B00"/>
       </a:accent1>
       <a:accent2>
         <a:srgbClr val="5E5E5E"/>

--- a/labs/lab10/slides/slides.pptx
+++ b/labs/lab10/slides/slides.pptx
@@ -5,7 +5,7 @@
     <p:sldMasterId id="2147483696" r:id="rId1"/>
   </p:sldMasterIdLst>
   <p:notesMasterIdLst>
-    <p:notesMasterId r:id="rId18"/>
+    <p:notesMasterId r:id="rId17"/>
   </p:notesMasterIdLst>
   <p:sldIdLst>
     <p:sldId id="256" r:id="rId2"/>
@@ -23,7 +23,6 @@
     <p:sldId id="268" r:id="rId14"/>
     <p:sldId id="269" r:id="rId15"/>
     <p:sldId id="270" r:id="rId16"/>
-    <p:sldId id="271" r:id="rId17"/>
   </p:sldIdLst>
   <p:sldSz cx="12192000" cy="6858000"/>
   <p:notesSz cx="6858000" cy="9144000"/>
@@ -528,7 +527,7 @@
             </a:pPr>
             <a:r>
               <a:rPr/>
-              <a:t>Pair students and confirm that each person has a readable draft. The worksheet structures two distinct tasks: giving feedback and planning a response.</a:t>
+              <a:t>The course page asks students to bring two printed copies. The worksheet begins with structure and appearance, then moves through the paper’s content. These slides support that review; use the worksheet for the full set of items.</a:t>
             </a:r>
           </a:p>
         </p:txBody>
@@ -610,7 +609,7 @@
             </a:pPr>
             <a:r>
               <a:rPr/>
-              <a:t>The reviewer should compare the prose, tables, and hypotheses for consistency. Numbers should agree across all three.</a:t>
+              <a:t>Read the abstract after reviewing the full paper so you can compare the summary with the study itself. Use the worksheet’s two comment spaces to identify what could be shortened and what is missing.</a:t>
             </a:r>
           </a:p>
         </p:txBody>
@@ -632,7 +631,7 @@
           <a:p>
             <a:fld id="{18BDFEC3-8487-43E8-A154-7C12CBC1FFF2}" type="slidenum">
               <a:rPr lang="en-US"/>
-              <a:t>11</a:t>
+              <a:t>14</a:t>
             </a:fld>
             <a:endParaRPr lang="en-US"/>
           </a:p>
@@ -692,7 +691,7 @@
             </a:pPr>
             <a:r>
               <a:rPr/>
-              <a:t>The discussion should explain what the results mean without simply repeating the results section or making claims the design cannot support.</a:t>
+              <a:t>Both the author and reviewer sign the worksheet’s grading page. The author keeps that page attached to the completed review and submits the review with the final research report. Allow time to clarify comments. Address content and analysis problems before sentence edits; a separate revision plan is not required.</a:t>
             </a:r>
           </a:p>
         </p:txBody>
@@ -714,335 +713,7 @@
           <a:p>
             <a:fld id="{18BDFEC3-8487-43E8-A154-7C12CBC1FFF2}" type="slidenum">
               <a:rPr lang="en-US"/>
-              <a:t>12</a:t>
-            </a:fld>
-            <a:endParaRPr lang="en-US"/>
-          </a:p>
-        </p:txBody>
-      </p:sp>
-    </p:spTree>
-  </p:cSld>
-</p:notes>
-</file>
-
-<file path=ppt/notesSlides/notesSlide12.xml><?xml version="1.0" encoding="utf-8"?>
-<p:notes xmlns:a="http://schemas.openxmlformats.org/drawingml/2006/main" xmlns:r="http://schemas.openxmlformats.org/officeDocument/2006/relationships" xmlns:p="http://schemas.openxmlformats.org/presentationml/2006/main">
-  <p:cSld>
-    <p:spTree>
-      <p:nvGrpSpPr>
-        <p:cNvPr id="1" name=""/>
-        <p:cNvGrpSpPr/>
-        <p:nvPr/>
-      </p:nvGrpSpPr>
-      <p:grpSpPr>
-        <a:xfrm>
-          <a:off x="0" y="0"/>
-          <a:ext cx="0" cy="0"/>
-          <a:chOff x="0" y="0"/>
-          <a:chExt cx="0" cy="0"/>
-        </a:xfrm>
-      </p:grpSpPr>
-      <p:sp>
-        <p:nvSpPr>
-          <p:cNvPr id="2" name="Slide Image Placeholder 1"/>
-          <p:cNvSpPr>
-            <a:spLocks noGrp="1" noRot="1" noChangeAspect="1"/>
-          </p:cNvSpPr>
-          <p:nvPr>
-            <p:ph type="sldImg"/>
-          </p:nvPr>
-        </p:nvSpPr>
-        <p:spPr/>
-      </p:sp>
-      <p:sp>
-        <p:nvSpPr>
-          <p:cNvPr id="3" name="Notes Placeholder 2"/>
-          <p:cNvSpPr>
-            <a:spLocks noGrp="1"/>
-          </p:cNvSpPr>
-          <p:nvPr>
-            <p:ph type="body" idx="1"/>
-          </p:nvPr>
-        </p:nvSpPr>
-        <p:spPr/>
-        <p:txBody>
-          <a:bodyPr/>
-          <a:lstStyle/>
-          <a:p>
-            <a:pPr lvl="0" indent="0" marL="0">
-              <a:buNone/>
-            </a:pPr>
-            <a:r>
-              <a:rPr/>
-              <a:t>Surface edits matter, but they should not consume the time needed for major revisions. The worksheet deliberately orders content review before polish.</a:t>
-            </a:r>
-          </a:p>
-        </p:txBody>
-      </p:sp>
-      <p:sp>
-        <p:nvSpPr>
-          <p:cNvPr id="4" name="Slide Number Placeholder 3"/>
-          <p:cNvSpPr>
-            <a:spLocks noGrp="1"/>
-          </p:cNvSpPr>
-          <p:nvPr>
-            <p:ph type="sldNum" sz="quarter" idx="10"/>
-          </p:nvPr>
-        </p:nvSpPr>
-        <p:spPr/>
-        <p:txBody>
-          <a:bodyPr/>
-          <a:lstStyle/>
-          <a:p>
-            <a:fld id="{18BDFEC3-8487-43E8-A154-7C12CBC1FFF2}" type="slidenum">
-              <a:rPr lang="en-US"/>
-              <a:t>13</a:t>
-            </a:fld>
-            <a:endParaRPr lang="en-US"/>
-          </a:p>
-        </p:txBody>
-      </p:sp>
-    </p:spTree>
-  </p:cSld>
-</p:notes>
-</file>
-
-<file path=ppt/notesSlides/notesSlide13.xml><?xml version="1.0" encoding="utf-8"?>
-<p:notes xmlns:a="http://schemas.openxmlformats.org/drawingml/2006/main" xmlns:r="http://schemas.openxmlformats.org/officeDocument/2006/relationships" xmlns:p="http://schemas.openxmlformats.org/presentationml/2006/main">
-  <p:cSld>
-    <p:spTree>
-      <p:nvGrpSpPr>
-        <p:cNvPr id="1" name=""/>
-        <p:cNvGrpSpPr/>
-        <p:nvPr/>
-      </p:nvGrpSpPr>
-      <p:grpSpPr>
-        <a:xfrm>
-          <a:off x="0" y="0"/>
-          <a:ext cx="0" cy="0"/>
-          <a:chOff x="0" y="0"/>
-          <a:chExt cx="0" cy="0"/>
-        </a:xfrm>
-      </p:grpSpPr>
-      <p:sp>
-        <p:nvSpPr>
-          <p:cNvPr id="2" name="Slide Image Placeholder 1"/>
-          <p:cNvSpPr>
-            <a:spLocks noGrp="1" noRot="1" noChangeAspect="1"/>
-          </p:cNvSpPr>
-          <p:nvPr>
-            <p:ph type="sldImg"/>
-          </p:nvPr>
-        </p:nvSpPr>
-        <p:spPr/>
-      </p:sp>
-      <p:sp>
-        <p:nvSpPr>
-          <p:cNvPr id="3" name="Notes Placeholder 2"/>
-          <p:cNvSpPr>
-            <a:spLocks noGrp="1"/>
-          </p:cNvSpPr>
-          <p:nvPr>
-            <p:ph type="body" idx="1"/>
-          </p:nvPr>
-        </p:nvSpPr>
-        <p:spPr/>
-        <p:txBody>
-          <a:bodyPr/>
-          <a:lstStyle/>
-          <a:p>
-            <a:pPr lvl="0" indent="0" marL="0">
-              <a:buNone/>
-            </a:pPr>
-            <a:r>
-              <a:rPr/>
-              <a:t>The author does not need to accept every suggestion. They do need to understand the reader problem each comment reveals.</a:t>
-            </a:r>
-          </a:p>
-        </p:txBody>
-      </p:sp>
-      <p:sp>
-        <p:nvSpPr>
-          <p:cNvPr id="4" name="Slide Number Placeholder 3"/>
-          <p:cNvSpPr>
-            <a:spLocks noGrp="1"/>
-          </p:cNvSpPr>
-          <p:nvPr>
-            <p:ph type="sldNum" sz="quarter" idx="10"/>
-          </p:nvPr>
-        </p:nvSpPr>
-        <p:spPr/>
-        <p:txBody>
-          <a:bodyPr/>
-          <a:lstStyle/>
-          <a:p>
-            <a:fld id="{18BDFEC3-8487-43E8-A154-7C12CBC1FFF2}" type="slidenum">
-              <a:rPr lang="en-US"/>
-              <a:t>14</a:t>
-            </a:fld>
-            <a:endParaRPr lang="en-US"/>
-          </a:p>
-        </p:txBody>
-      </p:sp>
-    </p:spTree>
-  </p:cSld>
-</p:notes>
-</file>
-
-<file path=ppt/notesSlides/notesSlide14.xml><?xml version="1.0" encoding="utf-8"?>
-<p:notes xmlns:a="http://schemas.openxmlformats.org/drawingml/2006/main" xmlns:r="http://schemas.openxmlformats.org/officeDocument/2006/relationships" xmlns:p="http://schemas.openxmlformats.org/presentationml/2006/main">
-  <p:cSld>
-    <p:spTree>
-      <p:nvGrpSpPr>
-        <p:cNvPr id="1" name=""/>
-        <p:cNvGrpSpPr/>
-        <p:nvPr/>
-      </p:nvGrpSpPr>
-      <p:grpSpPr>
-        <a:xfrm>
-          <a:off x="0" y="0"/>
-          <a:ext cx="0" cy="0"/>
-          <a:chOff x="0" y="0"/>
-          <a:chExt cx="0" cy="0"/>
-        </a:xfrm>
-      </p:grpSpPr>
-      <p:sp>
-        <p:nvSpPr>
-          <p:cNvPr id="2" name="Slide Image Placeholder 1"/>
-          <p:cNvSpPr>
-            <a:spLocks noGrp="1" noRot="1" noChangeAspect="1"/>
-          </p:cNvSpPr>
-          <p:nvPr>
-            <p:ph type="sldImg"/>
-          </p:nvPr>
-        </p:nvSpPr>
-        <p:spPr/>
-      </p:sp>
-      <p:sp>
-        <p:nvSpPr>
-          <p:cNvPr id="3" name="Notes Placeholder 2"/>
-          <p:cNvSpPr>
-            <a:spLocks noGrp="1"/>
-          </p:cNvSpPr>
-          <p:nvPr>
-            <p:ph type="body" idx="1"/>
-          </p:nvPr>
-        </p:nvSpPr>
-        <p:spPr/>
-        <p:txBody>
-          <a:bodyPr/>
-          <a:lstStyle/>
-          <a:p>
-            <a:pPr lvl="0" indent="0" marL="0">
-              <a:buNone/>
-            </a:pPr>
-            <a:r>
-              <a:rPr/>
-              <a:t>Encourage authors to write a short action list. Revising in priority order prevents polishing text that will later be deleted or moved.</a:t>
-            </a:r>
-          </a:p>
-        </p:txBody>
-      </p:sp>
-      <p:sp>
-        <p:nvSpPr>
-          <p:cNvPr id="4" name="Slide Number Placeholder 3"/>
-          <p:cNvSpPr>
-            <a:spLocks noGrp="1"/>
-          </p:cNvSpPr>
-          <p:nvPr>
-            <p:ph type="sldNum" sz="quarter" idx="10"/>
-          </p:nvPr>
-        </p:nvSpPr>
-        <p:spPr/>
-        <p:txBody>
-          <a:bodyPr/>
-          <a:lstStyle/>
-          <a:p>
-            <a:fld id="{18BDFEC3-8487-43E8-A154-7C12CBC1FFF2}" type="slidenum">
-              <a:rPr lang="en-US"/>
               <a:t>15</a:t>
-            </a:fld>
-            <a:endParaRPr lang="en-US"/>
-          </a:p>
-        </p:txBody>
-      </p:sp>
-    </p:spTree>
-  </p:cSld>
-</p:notes>
-</file>
-
-<file path=ppt/notesSlides/notesSlide15.xml><?xml version="1.0" encoding="utf-8"?>
-<p:notes xmlns:a="http://schemas.openxmlformats.org/drawingml/2006/main" xmlns:r="http://schemas.openxmlformats.org/officeDocument/2006/relationships" xmlns:p="http://schemas.openxmlformats.org/presentationml/2006/main">
-  <p:cSld>
-    <p:spTree>
-      <p:nvGrpSpPr>
-        <p:cNvPr id="1" name=""/>
-        <p:cNvGrpSpPr/>
-        <p:nvPr/>
-      </p:nvGrpSpPr>
-      <p:grpSpPr>
-        <a:xfrm>
-          <a:off x="0" y="0"/>
-          <a:ext cx="0" cy="0"/>
-          <a:chOff x="0" y="0"/>
-          <a:chExt cx="0" cy="0"/>
-        </a:xfrm>
-      </p:grpSpPr>
-      <p:sp>
-        <p:nvSpPr>
-          <p:cNvPr id="2" name="Slide Image Placeholder 1"/>
-          <p:cNvSpPr>
-            <a:spLocks noGrp="1" noRot="1" noChangeAspect="1"/>
-          </p:cNvSpPr>
-          <p:nvPr>
-            <p:ph type="sldImg"/>
-          </p:nvPr>
-        </p:nvSpPr>
-        <p:spPr/>
-      </p:sp>
-      <p:sp>
-        <p:nvSpPr>
-          <p:cNvPr id="3" name="Notes Placeholder 2"/>
-          <p:cNvSpPr>
-            <a:spLocks noGrp="1"/>
-          </p:cNvSpPr>
-          <p:nvPr>
-            <p:ph type="body" idx="1"/>
-          </p:nvPr>
-        </p:nvSpPr>
-        <p:spPr/>
-        <p:txBody>
-          <a:bodyPr/>
-          <a:lstStyle/>
-          <a:p>
-            <a:pPr lvl="0" indent="0" marL="0">
-              <a:buNone/>
-            </a:pPr>
-            <a:r>
-              <a:rPr/>
-              <a:t>Leave enough time for the exchange back and the author’s revision plan. Both giving and using feedback are assessed skills.</a:t>
-            </a:r>
-          </a:p>
-        </p:txBody>
-      </p:sp>
-      <p:sp>
-        <p:nvSpPr>
-          <p:cNvPr id="4" name="Slide Number Placeholder 3"/>
-          <p:cNvSpPr>
-            <a:spLocks noGrp="1"/>
-          </p:cNvSpPr>
-          <p:nvPr>
-            <p:ph type="sldNum" sz="quarter" idx="10"/>
-          </p:nvPr>
-        </p:nvSpPr>
-        <p:spPr/>
-        <p:txBody>
-          <a:bodyPr/>
-          <a:lstStyle/>
-          <a:p>
-            <a:fld id="{18BDFEC3-8487-43E8-A154-7C12CBC1FFF2}" type="slidenum">
-              <a:rPr lang="en-US"/>
-              <a:t>16</a:t>
             </a:fld>
             <a:endParaRPr lang="en-US"/>
           </a:p>
@@ -1102,7 +773,7 @@
             </a:pPr>
             <a:r>
               <a:rPr/>
-              <a:t>The reviewer is not grading or rewriting the paper. Their job is to provide evidence about the reading experience and actionable revision ideas.</a:t>
+              <a:t>Every bullet needs a response. A check without a page number is incomplete under the worksheet instructions. Throughout the review, identify typos, misspellings, and awkward sentences, and suggest clearer wording where needed.</a:t>
             </a:r>
           </a:p>
         </p:txBody>
@@ -1184,7 +855,7 @@
             </a:pPr>
             <a:r>
               <a:rPr/>
-              <a:t>Do not begin by correcting commas. The worksheet’s first pass focuses on overall structure and appearance.</a:t>
+              <a:t>This is an example of useful feedback, not a required wording formula. Keep comments focused on the draft. A reviewer can describe what was unclear without supplying a replacement paragraph.</a:t>
             </a:r>
           </a:p>
         </p:txBody>
@@ -1266,7 +937,7 @@
             </a:pPr>
             <a:r>
               <a:rPr/>
-              <a:t>Model an example aloud. “This paragraph is bad” offers no diagnosis or next step; naming the missing connection makes the feedback usable.</a:t>
+              <a:t>Follow the assignment’s formatting requirements. Check that every in-text citation has a reference entry and every reference entry is cited in the paper. This is the worksheet’s first pass; continue checking sentence clarity as you read for content.</a:t>
             </a:r>
           </a:p>
         </p:txBody>
@@ -1348,7 +1019,7 @@
             </a:pPr>
             <a:r>
               <a:rPr/>
-              <a:t>Specific feedback points to a location, a reader effect, and an action. The reviewer can offer options without dictating exact wording.</a:t>
+              <a:t>Review each article’s citation, role, and level of detail. Then consider the set: does the order help readers follow the reasoning, and does the introduction explain how the studies connect? An introduction needs more than separate article summaries.</a:t>
             </a:r>
           </a:p>
         </p:txBody>
@@ -1370,7 +1041,7 @@
           <a:p>
             <a:fld id="{18BDFEC3-8487-43E8-A154-7C12CBC1FFF2}" type="slidenum">
               <a:rPr lang="en-US"/>
-              <a:t>6</a:t>
+              <a:t>7</a:t>
             </a:fld>
             <a:endParaRPr lang="en-US"/>
           </a:p>
@@ -1430,7 +1101,7 @@
             </a:pPr>
             <a:r>
               <a:rPr/>
-              <a:t>The introduction should synthesize sources rather than provide three disconnected article summaries. Each paragraph should help justify the current study.</a:t>
+              <a:t>The worksheet asks for research hypotheses: what the author expects to find. Correlation and chi-square concern associations; the ANOVA options concern mean comparisons. Avoid describing means for a correlation or chi-square, or a mean difference “between the IV and DV.” Check that the Method and Results use the same variables as the hypotheses.</a:t>
             </a:r>
           </a:p>
         </p:txBody>
@@ -1452,7 +1123,7 @@
           <a:p>
             <a:fld id="{18BDFEC3-8487-43E8-A154-7C12CBC1FFF2}" type="slidenum">
               <a:rPr lang="en-US"/>
-              <a:t>7</a:t>
+              <a:t>8</a:t>
             </a:fld>
             <a:endParaRPr lang="en-US"/>
           </a:p>
@@ -1512,7 +1183,7 @@
             </a:pPr>
             <a:r>
               <a:rPr/>
-              <a:t>References should do argumentative work. Flag citations that are present but not integrated into the paper’s rationale.</a:t>
+              <a:t>Ingredient names alone do not tell someone how to make the soup. Similarly, naming a questionnaire does not explain its format or what it measures. Check the participant count, recruitment, measures, scale citations where needed, and procedure. The worksheet also asks for an appropriate sample summary and a correctly formatted table or figure referenced in the text.</a:t>
             </a:r>
           </a:p>
         </p:txBody>
@@ -1534,7 +1205,7 @@
           <a:p>
             <a:fld id="{18BDFEC3-8487-43E8-A154-7C12CBC1FFF2}" type="slidenum">
               <a:rPr lang="en-US"/>
-              <a:t>8</a:t>
+              <a:t>10</a:t>
             </a:fld>
             <a:endParaRPr lang="en-US"/>
           </a:p>
@@ -1594,7 +1265,7 @@
             </a:pPr>
             <a:r>
               <a:rPr/>
-              <a:t>If the prediction is directional, the cited rationale should support that direction. Make sure the later method and results analyze the same variables.</a:t>
+              <a:t>Check the statistics appropriate to the test, including r, chi-square, or F, degrees of freedom, MSe where required, and p. Compare the stated significance with the reported p value. Association language belongs with correlation or chi-square; mean-comparison language belongs with ANOVA. Use the worksheet to check the reporting details.</a:t>
             </a:r>
           </a:p>
         </p:txBody>
@@ -1616,7 +1287,7 @@
           <a:p>
             <a:fld id="{18BDFEC3-8487-43E8-A154-7C12CBC1FFF2}" type="slidenum">
               <a:rPr lang="en-US"/>
-              <a:t>9</a:t>
+              <a:t>11</a:t>
             </a:fld>
             <a:endParaRPr lang="en-US"/>
           </a:p>
@@ -1676,7 +1347,7 @@
             </a:pPr>
             <a:r>
               <a:rPr/>
-              <a:t>The method should be detailed enough to reproduce the analysis without narrating irrelevant interface clicks.</a:t>
+              <a:t>The meme is a reminder to compare the explanation with the findings. The worksheet asks whether the results replicate, differ from, or extend earlier work. The proposed next study needs a question, an expected pattern, and a reason it would be useful. Keep the interpretation within what the design and data support.</a:t>
             </a:r>
           </a:p>
         </p:txBody>
@@ -1698,7 +1369,7 @@
           <a:p>
             <a:fld id="{18BDFEC3-8487-43E8-A154-7C12CBC1FFF2}" type="slidenum">
               <a:rPr lang="en-US"/>
-              <a:t>10</a:t>
+              <a:t>13</a:t>
             </a:fld>
             <a:endParaRPr lang="en-US"/>
           </a:p>
@@ -2967,8 +2638,8 @@
         </p:nvSpPr>
         <p:spPr>
           <a:xfrm>
-            <a:off x="1583436" y="2313433"/>
-            <a:ext cx="4270248" cy="704087"/>
+            <a:off x="1097280" y="2313433"/>
+            <a:ext cx="4907280" cy="548640"/>
           </a:xfrm>
         </p:spPr>
         <p:txBody>
@@ -3040,8 +2711,8 @@
         </p:nvSpPr>
         <p:spPr>
           <a:xfrm>
-            <a:off x="1583436" y="3143250"/>
-            <a:ext cx="4270248" cy="2596776"/>
+            <a:off x="1097280" y="2926080"/>
+            <a:ext cx="4907280" cy="3177540"/>
           </a:xfrm>
         </p:spPr>
         <p:txBody>
@@ -3097,8 +2768,8 @@
         </p:nvSpPr>
         <p:spPr>
           <a:xfrm>
-            <a:off x="6338316" y="3143250"/>
-            <a:ext cx="4253484" cy="2596776"/>
+            <a:off x="6187440" y="2926080"/>
+            <a:ext cx="4907280" cy="3177540"/>
           </a:xfrm>
         </p:spPr>
         <p:txBody>
@@ -3158,8 +2829,8 @@
         </p:nvSpPr>
         <p:spPr>
           <a:xfrm>
-            <a:off x="6338316" y="2313433"/>
-            <a:ext cx="4270248" cy="704087"/>
+            <a:off x="6187440" y="2313433"/>
+            <a:ext cx="4907280" cy="548640"/>
           </a:xfrm>
         </p:spPr>
         <p:txBody>
@@ -3294,7 +2965,12 @@
             <p:ph type="title"/>
           </p:nvPr>
         </p:nvSpPr>
-        <p:spPr/>
+        <p:spPr>
+          <a:xfrm>
+            <a:off x="1097280" y="964692"/>
+            <a:ext cx="9997440" cy="1188720"/>
+          </a:xfrm>
+        </p:spPr>
         <p:txBody>
           <a:bodyPr/>
           <a:lstStyle/>
@@ -4979,14 +4655,14 @@
             </a:pPr>
             <a:r>
               <a:rPr/>
-              <a:t>9 Review the method for replication</a:t>
+              <a:t>7 Check the Method and sample summary (continued)</a:t>
             </a:r>
           </a:p>
         </p:txBody>
       </p:sp>
       <p:pic>
         <p:nvPicPr>
-          <p:cNvPr descr="A humorous recipe-style graphic illustrating that a method section should let another researcher reproduce the work" id="0" name="Picture 1"/>
+          <p:cNvPr descr="Illustration of a bowl of Greek soup surrounded by lemons, eggs, chicken, rice, and salt; the ingredients are shown without amounts or preparation steps" id="0" name="Picture 1"/>
           <p:cNvPicPr>
             <a:picLocks noGrp="1" noChangeAspect="1"/>
           </p:cNvPicPr>
@@ -5029,48 +4705,31 @@
           <a:bodyPr/>
           <a:lstStyle/>
           <a:p>
-            <a:pPr lvl="0" indent="0" marL="0">
-              <a:buNone/>
-            </a:pPr>
+            <a:pPr lvl="0"/>
             <a:r>
               <a:rPr/>
-              <a:t>Read as if you had to repeat the study:</a:t>
-            </a:r>
-          </a:p>
-          <a:p>
-            <a:pPr lvl="0" indent="-457200" marL="457200">
-              <a:buAutoNum type="arabicPeriod"/>
-            </a:pPr>
+              <a:t>Who participated, and how were they recruited?</a:t>
+            </a:r>
+          </a:p>
+          <a:p>
+            <a:pPr lvl="0"/>
             <a:r>
               <a:rPr/>
-              <a:t>Who or what was sampled?</a:t>
-            </a:r>
-          </a:p>
-          <a:p>
-            <a:pPr lvl="0" indent="-457200" marL="457200">
-              <a:buAutoNum type="arabicPeriod"/>
-            </a:pPr>
+              <a:t>How were the variables measured?</a:t>
+            </a:r>
+          </a:p>
+          <a:p>
+            <a:pPr lvl="0"/>
             <a:r>
               <a:rPr/>
-              <a:t>How were variables measured or coded?</a:t>
-            </a:r>
-          </a:p>
-          <a:p>
-            <a:pPr lvl="0" indent="-457200" marL="457200">
-              <a:buAutoNum type="arabicPeriod"/>
-            </a:pPr>
+              <a:t>Who collected the data, and where?</a:t>
+            </a:r>
+          </a:p>
+          <a:p>
+            <a:pPr lvl="0"/>
             <a:r>
               <a:rPr/>
-              <a:t>What happened, in order?</a:t>
-            </a:r>
-          </a:p>
-          <a:p>
-            <a:pPr lvl="0" indent="-457200" marL="457200">
-              <a:buAutoNum type="arabicPeriod"/>
-            </a:pPr>
-            <a:r>
-              <a:rPr/>
-              <a:t>What data decisions were made?</a:t>
+              <a:t>Does the sample summary match Table 1?</a:t>
             </a:r>
           </a:p>
         </p:txBody>
@@ -5122,7 +4781,7 @@
             </a:pPr>
             <a:r>
               <a:rPr/>
-              <a:t>10 Review results without rewriting them</a:t>
+              <a:t>8 Match each result to its hypothesis</a:t>
             </a:r>
           </a:p>
         </p:txBody>
@@ -5134,7 +4793,7 @@
             <a:spLocks noGrp="1"/>
           </p:cNvSpPr>
           <p:nvPr>
-            <p:ph idx="1" sz="half"/>
+            <p:ph idx="1"/>
           </p:nvPr>
         </p:nvSpPr>
         <p:spPr/>
@@ -5147,76 +4806,46 @@
             </a:pPr>
             <a:r>
               <a:rPr/>
-              <a:t>Check that the Results section:</a:t>
+              <a:t>[Pass 2 · Results]</a:t>
             </a:r>
           </a:p>
           <a:p>
             <a:pPr lvl="0"/>
             <a:r>
               <a:rPr/>
-              <a:t>follows the RH order</a:t>
+              <a:t>Same variables and planned test</a:t>
             </a:r>
           </a:p>
           <a:p>
             <a:pPr lvl="0"/>
             <a:r>
               <a:rPr/>
-              <a:t>reports descriptives before tests</a:t>
+              <a:t>Required statistics and a consistent significance statement</a:t>
             </a:r>
           </a:p>
           <a:p>
             <a:pPr lvl="0"/>
             <a:r>
               <a:rPr/>
-              <a:t>includes required statistics</a:t>
+              <a:t>Direction or pattern described accurately</a:t>
             </a:r>
           </a:p>
           <a:p>
             <a:pPr lvl="0"/>
             <a:r>
               <a:rPr/>
-              <a:t>refers to every table or figure</a:t>
+              <a:t>Text, tables, and figures that agree</a:t>
             </a:r>
           </a:p>
           <a:p>
             <a:pPr lvl="0"/>
             <a:r>
               <a:rPr/>
-              <a:t>saves interpretation for Discussion</a:t>
-            </a:r>
-          </a:p>
-        </p:txBody>
-      </p:sp>
-      <p:pic>
-        <p:nvPicPr>
-          <p:cNvPr descr="A marked-up page with highlighted passages, illustrating a reviewer tracing consistency among hypotheses, statistics, tables, and prose" id="0" name="Picture 1"/>
-          <p:cNvPicPr>
-            <a:picLocks noGrp="1" noChangeAspect="1"/>
-          </p:cNvPicPr>
-          <p:nvPr/>
-        </p:nvPicPr>
-        <p:blipFill>
-          <a:blip r:embed="rId3"/>
-          <a:stretch>
-            <a:fillRect/>
-          </a:stretch>
-        </p:blipFill>
-        <p:spPr bwMode="auto">
-          <a:xfrm>
-            <a:off x="7505700" y="2628900"/>
-            <a:ext cx="2260600" cy="3098800"/>
-          </a:xfrm>
-          <a:prstGeom prst="rect">
-            <a:avLst/>
-          </a:prstGeom>
-          <a:noFill/>
-          <a:ln w="9525">
-            <a:noFill/>
-            <a:headEnd/>
-            <a:tailEnd/>
-          </a:ln>
-        </p:spPr>
-      </p:pic>
+              <a:t>Every table and figure referenced in the text</a:t>
+            </a:r>
+          </a:p>
+        </p:txBody>
+      </p:sp>
     </p:spTree>
   </p:cSld>
 </p:sld>
@@ -5264,49 +4893,19 @@
             </a:pPr>
             <a:r>
               <a:rPr/>
-              <a:t>11 Review the discussion’s story</a:t>
-            </a:r>
-          </a:p>
-        </p:txBody>
-      </p:sp>
-      <p:pic>
-        <p:nvPicPr>
-          <p:cNvPr descr="A humorous breakdown graphic used to illustrate that a discussion should organize findings into a coherent story rather than merely repeat results" id="0" name="Picture 1"/>
-          <p:cNvPicPr>
-            <a:picLocks noGrp="1" noChangeAspect="1"/>
-          </p:cNvPicPr>
-          <p:nvPr/>
-        </p:nvPicPr>
-        <p:blipFill>
-          <a:blip r:embed="rId3"/>
-          <a:stretch>
-            <a:fillRect/>
-          </a:stretch>
-        </p:blipFill>
-        <p:spPr bwMode="auto">
-          <a:xfrm>
-            <a:off x="1968500" y="2628900"/>
-            <a:ext cx="3136900" cy="3098800"/>
-          </a:xfrm>
-          <a:prstGeom prst="rect">
-            <a:avLst/>
-          </a:prstGeom>
-          <a:noFill/>
-          <a:ln w="9525">
-            <a:noFill/>
-            <a:headEnd/>
-            <a:tailEnd/>
-          </a:ln>
-        </p:spPr>
-      </p:pic>
-      <p:sp>
-        <p:nvSpPr>
-          <p:cNvPr id="4" name="Content Placeholder 3"/>
-          <p:cNvSpPr>
-            <a:spLocks noGrp="1"/>
-          </p:cNvSpPr>
-          <p:nvPr>
-            <p:ph idx="2" sz="half"/>
+              <a:t>9 Explain findings and the next study</a:t>
+            </a:r>
+          </a:p>
+        </p:txBody>
+      </p:sp>
+      <p:sp>
+        <p:nvSpPr>
+          <p:cNvPr id="3" name="Content Placeholder 2"/>
+          <p:cNvSpPr>
+            <a:spLocks noGrp="1"/>
+          </p:cNvSpPr>
+          <p:nvPr>
+            <p:ph idx="1"/>
           </p:nvPr>
         </p:nvSpPr>
         <p:spPr/>
@@ -5319,52 +4918,7 @@
             </a:pPr>
             <a:r>
               <a:rPr/>
-              <a:t>Look for:</a:t>
-            </a:r>
-          </a:p>
-          <a:p>
-            <a:pPr lvl="0" indent="-457200" marL="457200">
-              <a:buAutoNum type="arabicPeriod"/>
-            </a:pPr>
-            <a:r>
-              <a:rPr/>
-              <a:t>answers to the research questions</a:t>
-            </a:r>
-          </a:p>
-          <a:p>
-            <a:pPr lvl="0" indent="-457200" marL="457200">
-              <a:buAutoNum type="arabicPeriod"/>
-            </a:pPr>
-            <a:r>
-              <a:rPr/>
-              <a:t>links back to prior literature</a:t>
-            </a:r>
-          </a:p>
-          <a:p>
-            <a:pPr lvl="0" indent="-457200" marL="457200">
-              <a:buAutoNum type="arabicPeriod"/>
-            </a:pPr>
-            <a:r>
-              <a:rPr/>
-              <a:t>calibrated interpretation</a:t>
-            </a:r>
-          </a:p>
-          <a:p>
-            <a:pPr lvl="0" indent="-457200" marL="457200">
-              <a:buAutoNum type="arabicPeriod"/>
-            </a:pPr>
-            <a:r>
-              <a:rPr/>
-              <a:t>validity-specific limitations</a:t>
-            </a:r>
-          </a:p>
-          <a:p>
-            <a:pPr lvl="0" indent="-457200" marL="457200">
-              <a:buAutoNum type="arabicPeriod"/>
-            </a:pPr>
-            <a:r>
-              <a:rPr/>
-              <a:t>a justified next study</a:t>
+              <a:t>[Pass 2 · Discussion]</a:t>
             </a:r>
           </a:p>
         </p:txBody>
@@ -5416,74 +4970,14 @@
             </a:pPr>
             <a:r>
               <a:rPr/>
-              <a:t>12 Save APA polish for last</a:t>
-            </a:r>
-          </a:p>
-        </p:txBody>
-      </p:sp>
-      <p:sp>
-        <p:nvSpPr>
-          <p:cNvPr id="3" name="Content Placeholder 2"/>
-          <p:cNvSpPr>
-            <a:spLocks noGrp="1"/>
-          </p:cNvSpPr>
-          <p:nvPr>
-            <p:ph idx="1" sz="half"/>
-          </p:nvPr>
-        </p:nvSpPr>
-        <p:spPr/>
-        <p:txBody>
-          <a:bodyPr/>
-          <a:lstStyle/>
-          <a:p>
-            <a:pPr lvl="0" indent="0" marL="0">
-              <a:buNone/>
-            </a:pPr>
-            <a:r>
-              <a:rPr/>
-              <a:t>After content and structure, check:</a:t>
-            </a:r>
-          </a:p>
-          <a:p>
-            <a:pPr lvl="0"/>
-            <a:r>
-              <a:rPr/>
-              <a:t>headings and section order</a:t>
-            </a:r>
-          </a:p>
-          <a:p>
-            <a:pPr lvl="0"/>
-            <a:r>
-              <a:rPr/>
-              <a:t>citations and references</a:t>
-            </a:r>
-          </a:p>
-          <a:p>
-            <a:pPr lvl="0"/>
-            <a:r>
-              <a:rPr/>
-              <a:t>statistical notation</a:t>
-            </a:r>
-          </a:p>
-          <a:p>
-            <a:pPr lvl="0"/>
-            <a:r>
-              <a:rPr/>
-              <a:t>table and figure formatting</a:t>
-            </a:r>
-          </a:p>
-          <a:p>
-            <a:pPr lvl="0"/>
-            <a:r>
-              <a:rPr/>
-              <a:t>proofreading and consistency</a:t>
+              <a:t>9 Explain findings and the next study (continued)</a:t>
             </a:r>
           </a:p>
         </p:txBody>
       </p:sp>
       <p:pic>
         <p:nvPicPr>
-          <p:cNvPr descr="A collage of APA manuals representing the final style and formatting pass after substantive revision is complete" id="0" name="Picture 1"/>
+          <p:cNvPr descr="Two Spider-Man figures point at each other beneath the captions Let the data speak for themselves and Let the data speak for my implicit assumptions" id="0" name="Picture 1"/>
           <p:cNvPicPr>
             <a:picLocks noGrp="1" noChangeAspect="1"/>
           </p:cNvPicPr>
@@ -5497,8 +4991,8 @@
         </p:blipFill>
         <p:spPr bwMode="auto">
           <a:xfrm>
-            <a:off x="7124700" y="2628900"/>
-            <a:ext cx="3022600" cy="3098800"/>
+            <a:off x="1409700" y="2628900"/>
+            <a:ext cx="4267200" cy="3098800"/>
           </a:xfrm>
           <a:prstGeom prst="rect">
             <a:avLst/>
@@ -5511,6 +5005,50 @@
           </a:ln>
         </p:spPr>
       </p:pic>
+      <p:sp>
+        <p:nvSpPr>
+          <p:cNvPr id="4" name="Content Placeholder 3"/>
+          <p:cNvSpPr>
+            <a:spLocks noGrp="1"/>
+          </p:cNvSpPr>
+          <p:nvPr>
+            <p:ph idx="2" sz="half"/>
+          </p:nvPr>
+        </p:nvSpPr>
+        <p:spPr/>
+        <p:txBody>
+          <a:bodyPr/>
+          <a:lstStyle/>
+          <a:p>
+            <a:pPr lvl="0"/>
+            <a:r>
+              <a:rPr/>
+              <a:t>What do the findings show together?</a:t>
+            </a:r>
+          </a:p>
+          <a:p>
+            <a:pPr lvl="0"/>
+            <a:r>
+              <a:rPr/>
+              <a:t>How do they relate to the introduction’s studies?</a:t>
+            </a:r>
+          </a:p>
+          <a:p>
+            <a:pPr lvl="0"/>
+            <a:r>
+              <a:rPr/>
+              <a:t>What should the next study test, and why?</a:t>
+            </a:r>
+          </a:p>
+          <a:p>
+            <a:pPr lvl="0"/>
+            <a:r>
+              <a:rPr/>
+              <a:t>What pattern would that study predict?</a:t>
+            </a:r>
+          </a:p>
+        </p:txBody>
+      </p:sp>
     </p:spTree>
   </p:cSld>
 </p:sld>
@@ -5558,49 +5096,19 @@
             </a:pPr>
             <a:r>
               <a:rPr/>
-              <a:t>13 Receive feedback without defending</a:t>
-            </a:r>
-          </a:p>
-        </p:txBody>
-      </p:sp>
-      <p:pic>
-        <p:nvPicPr>
-          <p:cNvPr descr="A cartoon showing how people can interpret the same statement differently, illustrating why reader confusion is useful revision evidence" id="0" name="Picture 1"/>
-          <p:cNvPicPr>
-            <a:picLocks noGrp="1" noChangeAspect="1"/>
-          </p:cNvPicPr>
-          <p:nvPr/>
-        </p:nvPicPr>
-        <p:blipFill>
-          <a:blip r:embed="rId3"/>
-          <a:stretch>
-            <a:fillRect/>
-          </a:stretch>
-        </p:blipFill>
-        <p:spPr bwMode="auto">
-          <a:xfrm>
-            <a:off x="1409700" y="2628900"/>
-            <a:ext cx="4267200" cy="3098800"/>
-          </a:xfrm>
-          <a:prstGeom prst="rect">
-            <a:avLst/>
-          </a:prstGeom>
-          <a:noFill/>
-          <a:ln w="9525">
-            <a:noFill/>
-            <a:headEnd/>
-            <a:tailEnd/>
-          </a:ln>
-        </p:spPr>
-      </p:pic>
-      <p:sp>
-        <p:nvSpPr>
-          <p:cNvPr id="4" name="Content Placeholder 3"/>
-          <p:cNvSpPr>
-            <a:spLocks noGrp="1"/>
-          </p:cNvSpPr>
-          <p:nvPr>
-            <p:ph idx="2" sz="half"/>
+              <a:t>10 Read the abstract last</a:t>
+            </a:r>
+          </a:p>
+        </p:txBody>
+      </p:sp>
+      <p:sp>
+        <p:nvSpPr>
+          <p:cNvPr id="3" name="Content Placeholder 2"/>
+          <p:cNvSpPr>
+            <a:spLocks noGrp="1"/>
+          </p:cNvSpPr>
+          <p:nvPr>
+            <p:ph idx="1"/>
           </p:nvPr>
         </p:nvSpPr>
         <p:spPr/>
@@ -5613,43 +5121,28 @@
             </a:pPr>
             <a:r>
               <a:rPr/>
-              <a:t>When the draft returns:</a:t>
-            </a:r>
-          </a:p>
-          <a:p>
-            <a:pPr lvl="0" indent="-457200" marL="457200">
-              <a:buAutoNum type="arabicPeriod"/>
-            </a:pPr>
+              <a:t>[Final content check]</a:t>
+            </a:r>
+          </a:p>
+          <a:p>
+            <a:pPr lvl="0"/>
             <a:r>
               <a:rPr/>
-              <a:t>Read every comment.</a:t>
-            </a:r>
-          </a:p>
-          <a:p>
-            <a:pPr lvl="0" indent="-457200" marL="457200">
-              <a:buAutoNum type="arabicPeriod"/>
-            </a:pPr>
+              <a:t>Does it accurately summarize the paper?</a:t>
+            </a:r>
+          </a:p>
+          <a:p>
+            <a:pPr lvl="0"/>
             <a:r>
               <a:rPr/>
-              <a:t>Find repeated reader problems.</a:t>
-            </a:r>
-          </a:p>
-          <a:p>
-            <a:pPr lvl="0" indent="-457200" marL="457200">
-              <a:buAutoNum type="arabicPeriod"/>
-            </a:pPr>
+              <a:t>What could be shortened?</a:t>
+            </a:r>
+          </a:p>
+          <a:p>
+            <a:pPr lvl="0"/>
             <a:r>
               <a:rPr/>
-              <a:t>Separate high- from low-impact changes.</a:t>
-            </a:r>
-          </a:p>
-          <a:p>
-            <a:pPr lvl="0" indent="-457200" marL="457200">
-              <a:buAutoNum type="arabicPeriod"/>
-            </a:pPr>
-            <a:r>
-              <a:rPr/>
-              <a:t>Ask for clarification when needed.</a:t>
+              <a:t>What is missing?</a:t>
             </a:r>
           </a:p>
         </p:txBody>
@@ -5701,323 +5194,213 @@
             </a:pPr>
             <a:r>
               <a:rPr/>
-              <a:t>14 Turn comments into a plan</a:t>
-            </a:r>
-          </a:p>
-        </p:txBody>
-      </p:sp>
-      <p:graphicFrame>
-        <p:nvGraphicFramePr>
-          <p:cNvPr id="6" name="Content Placeholder 5"/>
-          <p:cNvGraphicFramePr>
-            <a:graphicFrameLocks noGrp="1"/>
-          </p:cNvGraphicFramePr>
-          <p:nvPr>
-            <p:ph idx="1"/>
-          </p:nvPr>
-        </p:nvGraphicFramePr>
-        <p:xfrm>
-          <a:off x="1092200" y="2628900"/>
-          <a:ext cx="9994900" cy="3098800"/>
-        </p:xfrm>
-        <a:graphic>
-          <a:graphicData uri="http://schemas.openxmlformats.org/drawingml/2006/table">
-            <a:tbl>
-              <a:tblPr firstRow="1" bandRow="1">
-                <a:tableStyleId>{5C22544A-7EE6-4342-B048-85BDC9FD1C3A}</a:tableStyleId>
-              </a:tblPr>
-              <a:tblGrid>
-                <a:gridCol w="4991100"/>
-                <a:gridCol w="4991100"/>
-              </a:tblGrid>
-              <a:tr h="0">
-                <a:tc>
-                  <a:txBody>
-                    <a:bodyPr/>
-                    <a:lstStyle/>
-                    <a:p>
-                      <a:pPr lvl="0" indent="0" marL="0">
-                        <a:buNone/>
-                      </a:pPr>
-                      <a:r>
-                        <a:rPr/>
-                        <a:t>Priority</a:t>
-                      </a:r>
-                    </a:p>
-                  </a:txBody>
-                  <a:tcPr/>
-                </a:tc>
-                <a:tc>
-                  <a:txBody>
-                    <a:bodyPr/>
-                    <a:lstStyle/>
-                    <a:p>
-                      <a:pPr lvl="0" indent="0" marL="0">
-                        <a:buNone/>
-                      </a:pPr>
-                      <a:r>
-                        <a:rPr/>
-                        <a:t>Revision</a:t>
-                      </a:r>
-                    </a:p>
-                  </a:txBody>
-                  <a:tcPr/>
-                </a:tc>
-              </a:tr>
-              <a:tr h="0">
-                <a:tc>
-                  <a:txBody>
-                    <a:bodyPr/>
-                    <a:lstStyle/>
-                    <a:p>
-                      <a:pPr lvl="0" indent="0" marL="0">
-                        <a:buNone/>
-                      </a:pPr>
-                      <a:r>
-                        <a:rPr/>
-                        <a:t>1</a:t>
-                      </a:r>
-                    </a:p>
-                  </a:txBody>
-                </a:tc>
-                <a:tc>
-                  <a:txBody>
-                    <a:bodyPr/>
-                    <a:lstStyle/>
-                    <a:p>
-                      <a:pPr lvl="0" indent="0" marL="0">
-                        <a:buNone/>
-                      </a:pPr>
-                      <a:r>
-                        <a:rPr/>
-                        <a:t>Argument, missing evidence, or wrong analysis</a:t>
-                      </a:r>
-                    </a:p>
-                  </a:txBody>
-                </a:tc>
-              </a:tr>
-              <a:tr h="0">
-                <a:tc>
-                  <a:txBody>
-                    <a:bodyPr/>
-                    <a:lstStyle/>
-                    <a:p>
-                      <a:pPr lvl="0" indent="0" marL="0">
-                        <a:buNone/>
-                      </a:pPr>
-                      <a:r>
-                        <a:rPr/>
-                        <a:t>2</a:t>
-                      </a:r>
-                    </a:p>
-                  </a:txBody>
-                </a:tc>
-                <a:tc>
-                  <a:txBody>
-                    <a:bodyPr/>
-                    <a:lstStyle/>
-                    <a:p>
-                      <a:pPr lvl="0" indent="0" marL="0">
-                        <a:buNone/>
-                      </a:pPr>
-                      <a:r>
-                        <a:rPr/>
-                        <a:t>Organization and explanation</a:t>
-                      </a:r>
-                    </a:p>
-                  </a:txBody>
-                </a:tc>
-              </a:tr>
-              <a:tr h="0">
-                <a:tc>
-                  <a:txBody>
-                    <a:bodyPr/>
-                    <a:lstStyle/>
-                    <a:p>
-                      <a:pPr lvl="0" indent="0" marL="0">
-                        <a:buNone/>
-                      </a:pPr>
-                      <a:r>
-                        <a:rPr/>
-                        <a:t>3</a:t>
-                      </a:r>
-                    </a:p>
-                  </a:txBody>
-                </a:tc>
-                <a:tc>
-                  <a:txBody>
-                    <a:bodyPr/>
-                    <a:lstStyle/>
-                    <a:p>
-                      <a:pPr lvl="0" indent="0" marL="0">
-                        <a:buNone/>
-                      </a:pPr>
-                      <a:r>
-                        <a:rPr/>
-                        <a:t>Sentences, APA details, and proofreading</a:t>
-                      </a:r>
-                    </a:p>
-                  </a:txBody>
-                </a:tc>
-              </a:tr>
-            </a:tbl>
-          </a:graphicData>
-        </a:graphic>
-      </p:graphicFrame>
-    </p:spTree>
-  </p:cSld>
-</p:sld>
-</file>
-
-<file path=ppt/slides/slide16.xml><?xml version="1.0" encoding="utf-8"?>
-<p:sld xmlns:a="http://schemas.openxmlformats.org/drawingml/2006/main" xmlns:r="http://schemas.openxmlformats.org/officeDocument/2006/relationships" xmlns:p="http://schemas.openxmlformats.org/presentationml/2006/main">
-  <p:cSld>
-    <p:spTree>
-      <p:nvGrpSpPr>
-        <p:cNvPr id="1" name=""/>
-        <p:cNvGrpSpPr/>
-        <p:nvPr/>
-      </p:nvGrpSpPr>
-      <p:grpSpPr>
-        <a:xfrm>
-          <a:off x="0" y="0"/>
-          <a:ext cx="0" cy="0"/>
-          <a:chOff x="0" y="0"/>
-          <a:chExt cx="0" cy="0"/>
-        </a:xfrm>
-      </p:grpSpPr>
-      <p:sp>
-        <p:nvSpPr>
-          <p:cNvPr id="2" name="Title 1"/>
-          <p:cNvSpPr>
-            <a:spLocks noGrp="1"/>
-          </p:cNvSpPr>
-          <p:nvPr>
-            <p:ph type="title"/>
-          </p:nvPr>
+              <a:t>11 Sign and return the review</a:t>
+            </a:r>
+          </a:p>
+        </p:txBody>
+      </p:sp>
+      <p:sp>
+        <p:nvSpPr>
+          <p:cNvPr id="1013" name="card-steel" descr="card: Reviewer. • Respond to every worksheet item and sign • Return the review and annotated draft"/>
+          <p:cNvSpPr/>
+          <p:nvPr/>
         </p:nvSpPr>
         <p:spPr>
           <a:xfrm>
-            <a:off x="1097280" y="964692"/>
-            <a:ext cx="9997440" cy="1188720"/>
-          </a:xfrm>
-        </p:spPr>
-        <p:txBody>
-          <a:bodyPr/>
-          <a:lstStyle/>
-          <a:p>
-            <a:pPr lvl="0" indent="0" marL="0">
-              <a:buNone/>
-            </a:pPr>
-            <a:r>
-              <a:rPr/>
-              <a:t>15 Complete both roles</a:t>
-            </a:r>
-          </a:p>
-        </p:txBody>
-      </p:sp>
-      <p:sp>
-        <p:nvSpPr>
-          <p:cNvPr id="3" name="Content Placeholder 2"/>
-          <p:cNvSpPr>
-            <a:spLocks noGrp="1"/>
-          </p:cNvSpPr>
-          <p:nvPr>
-            <p:ph idx="1" sz="half"/>
-          </p:nvPr>
-        </p:nvSpPr>
-        <p:spPr/>
-        <p:txBody>
-          <a:bodyPr/>
-          <a:lstStyle/>
-          <a:p>
-            <a:pPr lvl="0" indent="0" marL="0">
-              <a:buNone/>
-            </a:pPr>
-            <a:r>
-              <a:rPr b="1"/>
+            <a:off x="1097280" y="2633472"/>
+            <a:ext cx="4924044" cy="1920240"/>
+          </a:xfrm>
+          <a:prstGeom prst="roundRect">
+            <a:avLst>
+              <a:gd name="adj" fmla="val 6000"/>
+            </a:avLst>
+          </a:prstGeom>
+          <a:solidFill>
+            <a:srgbClr val="FEFDFA"/>
+          </a:solidFill>
+          <a:ln w="19050">
+            <a:solidFill>
+              <a:srgbClr val="CCCCCC"/>
+            </a:solidFill>
+          </a:ln>
+        </p:spPr>
+        <p:txBody>
+          <a:bodyPr lIns="182880" tIns="182880" rIns="182880" bIns="182880" anchor="t" wrap="square">
+            <a:normAutofit/>
+          </a:bodyPr>
+          <a:lstStyle/>
+          <a:p>
+            <a:pPr algn="l"/>
+            <a:r>
+              <a:rPr lang="en-US" sz="2200" b="1" dirty="0">
+                <a:solidFill>
+                  <a:srgbClr val="010B13"/>
+                </a:solidFill>
+              </a:rPr>
               <a:t>Reviewer</a:t>
             </a:r>
           </a:p>
           <a:p>
-            <a:pPr lvl="0" indent="0" marL="0">
-              <a:buNone/>
-            </a:pPr>
-            <a:r>
-              <a:rPr/>
-              <a:t>• Finish the worksheet.</a:t>
-            </a:r>
-          </a:p>
-          <a:p>
-            <a:pPr lvl="0" indent="0" marL="0">
-              <a:buNone/>
-            </a:pPr>
-            <a:r>
-              <a:rPr/>
-              <a:t>• Return the annotated draft.</a:t>
-            </a:r>
-          </a:p>
-          <a:p>
-            <a:pPr lvl="0" indent="0" marL="0">
-              <a:buNone/>
-            </a:pPr>
-            <a:r>
-              <a:rPr/>
-              <a:t>• Make comments actionable.</a:t>
-            </a:r>
-          </a:p>
-        </p:txBody>
-      </p:sp>
-      <p:sp>
-        <p:nvSpPr>
-          <p:cNvPr id="4" name="Content Placeholder 3"/>
-          <p:cNvSpPr>
-            <a:spLocks noGrp="1"/>
-          </p:cNvSpPr>
-          <p:nvPr>
-            <p:ph idx="2" sz="half"/>
-          </p:nvPr>
-        </p:nvSpPr>
-        <p:spPr/>
-        <p:txBody>
-          <a:bodyPr/>
-          <a:lstStyle/>
-          <a:p>
-            <a:pPr lvl="0" indent="0" marL="0">
-              <a:buNone/>
-            </a:pPr>
-            <a:r>
-              <a:rPr b="1"/>
+            <a:pPr algn="l"/>
+            <a:r>
+              <a:rPr lang="en-US" sz="2000" b="0" dirty="0">
+                <a:solidFill>
+                  <a:srgbClr val="010B13"/>
+                </a:solidFill>
+              </a:rPr>
+              <a:t>• Respond to every worksheet item and sign</a:t>
+            </a:r>
+          </a:p>
+          <a:p>
+            <a:pPr algn="l"/>
+            <a:r>
+              <a:rPr lang="en-US" sz="2000" b="0" dirty="0">
+                <a:solidFill>
+                  <a:srgbClr val="010B13"/>
+                </a:solidFill>
+              </a:rPr>
+              <a:t>• Return the review and annotated draft</a:t>
+            </a:r>
+          </a:p>
+        </p:txBody>
+      </p:sp>
+      <p:sp>
+        <p:nvSpPr>
+          <p:cNvPr id="1014" name="card-rail" descr="">
+            <a:extLst>
+              <a:ext uri="{C183D7F6-B498-43B3-948B-1728B52AA6E4}">
+                <adec:decorative xmlns:adec="http://schemas.microsoft.com/office/drawing/2017/decorative" val="1"/>
+              </a:ext>
+            </a:extLst>
+          </p:cNvPr>
+          <p:cNvSpPr/>
+          <p:nvPr/>
+        </p:nvSpPr>
+        <p:spPr>
+          <a:xfrm>
+            <a:off x="1097280" y="2633472"/>
+            <a:ext cx="54864" cy="1920240"/>
+          </a:xfrm>
+          <a:prstGeom prst="roundRect">
+            <a:avLst>
+              <a:gd name="adj" fmla="val 20000"/>
+            </a:avLst>
+          </a:prstGeom>
+          <a:solidFill>
+            <a:srgbClr val="010B13"/>
+          </a:solidFill>
+          <a:ln>
+            <a:noFill/>
+          </a:ln>
+        </p:spPr>
+        <p:txBody>
+          <a:bodyPr lIns="182880" tIns="182880" rIns="182880" bIns="182880" anchor="t" wrap="square">
+            <a:normAutofit/>
+          </a:bodyPr>
+          <a:lstStyle/>
+          <a:p/>
+        </p:txBody>
+      </p:sp>
+      <p:sp>
+        <p:nvSpPr>
+          <p:cNvPr id="1015" name="card-steel" descr="card: Author. • Sign the worksheet and keep it with the review • Submit the signed review with your final report"/>
+          <p:cNvSpPr/>
+          <p:nvPr/>
+        </p:nvSpPr>
+        <p:spPr>
+          <a:xfrm>
+            <a:off x="6167628" y="2633472"/>
+            <a:ext cx="4924044" cy="1920240"/>
+          </a:xfrm>
+          <a:prstGeom prst="roundRect">
+            <a:avLst>
+              <a:gd name="adj" fmla="val 6000"/>
+            </a:avLst>
+          </a:prstGeom>
+          <a:solidFill>
+            <a:srgbClr val="FEFDFA"/>
+          </a:solidFill>
+          <a:ln w="19050">
+            <a:solidFill>
+              <a:srgbClr val="CCCCCC"/>
+            </a:solidFill>
+          </a:ln>
+        </p:spPr>
+        <p:txBody>
+          <a:bodyPr lIns="182880" tIns="182880" rIns="182880" bIns="182880" anchor="t" wrap="square">
+            <a:normAutofit/>
+          </a:bodyPr>
+          <a:lstStyle/>
+          <a:p>
+            <a:pPr algn="l"/>
+            <a:r>
+              <a:rPr lang="en-US" sz="2200" b="1" dirty="0">
+                <a:solidFill>
+                  <a:srgbClr val="010B13"/>
+                </a:solidFill>
+              </a:rPr>
               <a:t>Author</a:t>
             </a:r>
           </a:p>
           <a:p>
-            <a:pPr lvl="0" indent="0" marL="0">
-              <a:buNone/>
-            </a:pPr>
-            <a:r>
-              <a:rPr/>
-              <a:t>• Triage the feedback.</a:t>
-            </a:r>
-          </a:p>
-          <a:p>
-            <a:pPr lvl="0" indent="0" marL="0">
-              <a:buNone/>
-            </a:pPr>
-            <a:r>
-              <a:rPr/>
-              <a:t>• Ask what is unclear.</a:t>
-            </a:r>
-          </a:p>
-          <a:p>
-            <a:pPr lvl="0" indent="0" marL="0">
-              <a:buNone/>
-            </a:pPr>
-            <a:r>
-              <a:rPr/>
-              <a:t>• Write the revision plan first.</a:t>
-            </a:r>
-          </a:p>
+            <a:pPr algn="l"/>
+            <a:r>
+              <a:rPr lang="en-US" sz="2000" b="0" dirty="0">
+                <a:solidFill>
+                  <a:srgbClr val="010B13"/>
+                </a:solidFill>
+              </a:rPr>
+              <a:t>• Sign the worksheet and keep it with the review</a:t>
+            </a:r>
+          </a:p>
+          <a:p>
+            <a:pPr algn="l"/>
+            <a:r>
+              <a:rPr lang="en-US" sz="2000" b="0" dirty="0">
+                <a:solidFill>
+                  <a:srgbClr val="010B13"/>
+                </a:solidFill>
+              </a:rPr>
+              <a:t>• Submit the signed review with your final report</a:t>
+            </a:r>
+          </a:p>
+        </p:txBody>
+      </p:sp>
+      <p:sp>
+        <p:nvSpPr>
+          <p:cNvPr id="1016" name="card-rail" descr="">
+            <a:extLst>
+              <a:ext uri="{C183D7F6-B498-43B3-948B-1728B52AA6E4}">
+                <adec:decorative xmlns:adec="http://schemas.microsoft.com/office/drawing/2017/decorative" val="1"/>
+              </a:ext>
+            </a:extLst>
+          </p:cNvPr>
+          <p:cNvSpPr/>
+          <p:nvPr/>
+        </p:nvSpPr>
+        <p:spPr>
+          <a:xfrm>
+            <a:off x="6167628" y="2633472"/>
+            <a:ext cx="54864" cy="1920240"/>
+          </a:xfrm>
+          <a:prstGeom prst="roundRect">
+            <a:avLst>
+              <a:gd name="adj" fmla="val 20000"/>
+            </a:avLst>
+          </a:prstGeom>
+          <a:solidFill>
+            <a:srgbClr val="010B13"/>
+          </a:solidFill>
+          <a:ln>
+            <a:noFill/>
+          </a:ln>
+        </p:spPr>
+        <p:txBody>
+          <a:bodyPr lIns="182880" tIns="182880" rIns="182880" bIns="182880" anchor="t" wrap="square">
+            <a:normAutofit/>
+          </a:bodyPr>
+          <a:lstStyle/>
+          <a:p/>
         </p:txBody>
       </p:sp>
     </p:spTree>
@@ -6067,103 +5450,227 @@
             </a:pPr>
             <a:r>
               <a:rPr/>
-              <a:t>1 Prepare the review exchange</a:t>
-            </a:r>
-          </a:p>
-        </p:txBody>
-      </p:sp>
-      <p:sp>
-        <p:nvSpPr>
-          <p:cNvPr id="3" name="Content Placeholder 2"/>
-          <p:cNvSpPr>
-            <a:spLocks noGrp="1"/>
-          </p:cNvSpPr>
-          <p:nvPr>
-            <p:ph idx="1" sz="half"/>
-          </p:nvPr>
-        </p:nvSpPr>
-        <p:spPr/>
-        <p:txBody>
-          <a:bodyPr/>
-          <a:lstStyle/>
-          <a:p>
-            <a:pPr lvl="0"/>
-            <a:r>
-              <a:rPr b="1"/>
-              <a:t>Worksheet:</a:t>
-            </a:r>
-            <a:r>
-              <a:rPr/>
-              <a:t> Lab 10 Peer Review</a:t>
-            </a:r>
-          </a:p>
-          <a:p>
-            <a:pPr lvl="0"/>
-            <a:r>
-              <a:rPr b="1"/>
-              <a:t>Draft:</a:t>
-            </a:r>
-            <a:r>
-              <a:rPr/>
-              <a:t> complete enough to evaluate</a:t>
-            </a:r>
-          </a:p>
-          <a:p>
-            <a:pPr lvl="0"/>
-            <a:r>
-              <a:rPr b="1"/>
-              <a:t>Role:</a:t>
-            </a:r>
-            <a:r>
-              <a:rPr/>
-              <a:t> reviewer first, author second</a:t>
-            </a:r>
-          </a:p>
-          <a:p>
-            <a:pPr lvl="0" indent="0" marL="0">
-              <a:buNone/>
-            </a:pPr>
-            <a:r>
-              <a:rPr/>
-              <a:t>Today’s path: </a:t>
-            </a:r>
-            <a:r>
-              <a:rPr b="1"/>
-              <a:t>survey → diagnose → suggest → triage → revise</a:t>
-            </a:r>
-          </a:p>
-        </p:txBody>
-      </p:sp>
-      <p:pic>
-        <p:nvPicPr>
-          <p:cNvPr descr="A collage of APA manuals representing the final style and formatting pass after substantive revision is complete" id="0" name="Picture 1"/>
-          <p:cNvPicPr>
-            <a:picLocks noGrp="1" noChangeAspect="1"/>
-          </p:cNvPicPr>
+              <a:t>1 Prepare the peer review</a:t>
+            </a:r>
+          </a:p>
+        </p:txBody>
+      </p:sp>
+      <p:sp>
+        <p:nvSpPr>
+          <p:cNvPr id="1001" name="card-steel" descr="card: Review worksheet. Lab 10 worksheet (Word) Use the worksheet to guide both passes"/>
+          <p:cNvSpPr/>
           <p:nvPr/>
-        </p:nvPicPr>
-        <p:blipFill>
-          <a:blip r:embed="rId3"/>
-          <a:stretch>
-            <a:fillRect/>
-          </a:stretch>
-        </p:blipFill>
-        <p:spPr bwMode="auto">
-          <a:xfrm>
-            <a:off x="7124700" y="2628900"/>
-            <a:ext cx="3022600" cy="3098800"/>
-          </a:xfrm>
-          <a:prstGeom prst="rect">
-            <a:avLst/>
+        </p:nvSpPr>
+        <p:spPr>
+          <a:xfrm>
+            <a:off x="1097280" y="2633472"/>
+            <a:ext cx="4924044" cy="1615440"/>
+          </a:xfrm>
+          <a:prstGeom prst="roundRect">
+            <a:avLst>
+              <a:gd name="adj" fmla="val 6000"/>
+            </a:avLst>
           </a:prstGeom>
-          <a:noFill/>
-          <a:ln w="9525">
+          <a:solidFill>
+            <a:srgbClr val="FEFDFA"/>
+          </a:solidFill>
+          <a:ln w="19050">
+            <a:solidFill>
+              <a:srgbClr val="CCCCCC"/>
+            </a:solidFill>
+          </a:ln>
+        </p:spPr>
+        <p:txBody>
+          <a:bodyPr lIns="182880" tIns="182880" rIns="182880" bIns="182880" anchor="t" wrap="square">
+            <a:normAutofit/>
+          </a:bodyPr>
+          <a:lstStyle/>
+          <a:p>
+            <a:pPr algn="l"/>
+            <a:r>
+              <a:rPr lang="en-US" sz="2200" b="1" dirty="0">
+                <a:solidFill>
+                  <a:srgbClr val="010B13"/>
+                </a:solidFill>
+              </a:rPr>
+              <a:t>Review worksheet</a:t>
+            </a:r>
+          </a:p>
+          <a:p>
+            <a:pPr algn="l"/>
+            <a:r>
+              <a:rPr lang="en-US" sz="2000" b="0" dirty="0">
+                <a:solidFill>
+                  <a:srgbClr val="010B13"/>
+                </a:solidFill>
+                <a:hlinkClick r:id="rId3"/>
+              </a:rPr>
+              <a:t>Lab 10 worksheet (Word)</a:t>
+            </a:r>
+          </a:p>
+          <a:p>
+            <a:pPr algn="l"/>
+            <a:r>
+              <a:rPr lang="en-US" sz="2000" b="0" dirty="0">
+                <a:solidFill>
+                  <a:srgbClr val="010B13"/>
+                </a:solidFill>
+              </a:rPr>
+              <a:t>Use the worksheet to guide both passes</a:t>
+            </a:r>
+          </a:p>
+        </p:txBody>
+      </p:sp>
+      <p:sp>
+        <p:nvSpPr>
+          <p:cNvPr id="1002" name="card-rail" descr="">
+            <a:extLst>
+              <a:ext uri="{C183D7F6-B498-43B3-948B-1728B52AA6E4}">
+                <adec:decorative xmlns:adec="http://schemas.microsoft.com/office/drawing/2017/decorative" val="1"/>
+              </a:ext>
+            </a:extLst>
+          </p:cNvPr>
+          <p:cNvSpPr/>
+          <p:nvPr/>
+        </p:nvSpPr>
+        <p:spPr>
+          <a:xfrm>
+            <a:off x="1097280" y="2633472"/>
+            <a:ext cx="54864" cy="1615440"/>
+          </a:xfrm>
+          <a:prstGeom prst="roundRect">
+            <a:avLst>
+              <a:gd name="adj" fmla="val 20000"/>
+            </a:avLst>
+          </a:prstGeom>
+          <a:solidFill>
+            <a:srgbClr val="010B13"/>
+          </a:solidFill>
+          <a:ln>
             <a:noFill/>
-            <a:headEnd/>
-            <a:tailEnd/>
           </a:ln>
         </p:spPr>
-      </p:pic>
+        <p:txBody>
+          <a:bodyPr lIns="182880" tIns="182880" rIns="182880" bIns="182880" anchor="t" wrap="square">
+            <a:normAutofit/>
+          </a:bodyPr>
+          <a:lstStyle/>
+          <a:p/>
+        </p:txBody>
+      </p:sp>
+      <p:sp>
+        <p:nvSpPr>
+          <p:cNvPr id="1003" name="card-steel" descr="card: Bring your draft. • Bring two printed copies of your complete draft • Exchange drafts with a classmate • Keep the worksheet beside the paper"/>
+          <p:cNvSpPr/>
+          <p:nvPr/>
+        </p:nvSpPr>
+        <p:spPr>
+          <a:xfrm>
+            <a:off x="6167628" y="2633472"/>
+            <a:ext cx="4924044" cy="2529840"/>
+          </a:xfrm>
+          <a:prstGeom prst="roundRect">
+            <a:avLst>
+              <a:gd name="adj" fmla="val 6000"/>
+            </a:avLst>
+          </a:prstGeom>
+          <a:solidFill>
+            <a:srgbClr val="FEFDFA"/>
+          </a:solidFill>
+          <a:ln w="19050">
+            <a:solidFill>
+              <a:srgbClr val="CCCCCC"/>
+            </a:solidFill>
+          </a:ln>
+        </p:spPr>
+        <p:txBody>
+          <a:bodyPr lIns="182880" tIns="182880" rIns="182880" bIns="182880" anchor="t" wrap="square">
+            <a:normAutofit/>
+          </a:bodyPr>
+          <a:lstStyle/>
+          <a:p>
+            <a:pPr algn="l"/>
+            <a:r>
+              <a:rPr lang="en-US" sz="2200" b="1" dirty="0">
+                <a:solidFill>
+                  <a:srgbClr val="010B13"/>
+                </a:solidFill>
+              </a:rPr>
+              <a:t>Bring your draft</a:t>
+            </a:r>
+          </a:p>
+          <a:p>
+            <a:pPr algn="l"/>
+            <a:r>
+              <a:rPr lang="en-US" sz="2000" b="0" dirty="0">
+                <a:solidFill>
+                  <a:srgbClr val="010B13"/>
+                </a:solidFill>
+              </a:rPr>
+              <a:t>• Bring two printed copies of your complete draft</a:t>
+            </a:r>
+          </a:p>
+          <a:p>
+            <a:pPr algn="l"/>
+            <a:r>
+              <a:rPr lang="en-US" sz="2000" b="0" dirty="0">
+                <a:solidFill>
+                  <a:srgbClr val="010B13"/>
+                </a:solidFill>
+              </a:rPr>
+              <a:t>• Exchange drafts with a classmate</a:t>
+            </a:r>
+          </a:p>
+          <a:p>
+            <a:pPr algn="l"/>
+            <a:r>
+              <a:rPr lang="en-US" sz="2000" b="0" dirty="0">
+                <a:solidFill>
+                  <a:srgbClr val="010B13"/>
+                </a:solidFill>
+              </a:rPr>
+              <a:t>• Keep the worksheet beside the paper</a:t>
+            </a:r>
+          </a:p>
+        </p:txBody>
+      </p:sp>
+      <p:sp>
+        <p:nvSpPr>
+          <p:cNvPr id="1004" name="card-rail" descr="">
+            <a:extLst>
+              <a:ext uri="{C183D7F6-B498-43B3-948B-1728B52AA6E4}">
+                <adec:decorative xmlns:adec="http://schemas.microsoft.com/office/drawing/2017/decorative" val="1"/>
+              </a:ext>
+            </a:extLst>
+          </p:cNvPr>
+          <p:cNvSpPr/>
+          <p:nvPr/>
+        </p:nvSpPr>
+        <p:spPr>
+          <a:xfrm>
+            <a:off x="6167628" y="2633472"/>
+            <a:ext cx="54864" cy="2529840"/>
+          </a:xfrm>
+          <a:prstGeom prst="roundRect">
+            <a:avLst>
+              <a:gd name="adj" fmla="val 20000"/>
+            </a:avLst>
+          </a:prstGeom>
+          <a:solidFill>
+            <a:srgbClr val="010B13"/>
+          </a:solidFill>
+          <a:ln>
+            <a:noFill/>
+          </a:ln>
+        </p:spPr>
+        <p:txBody>
+          <a:bodyPr lIns="182880" tIns="182880" rIns="182880" bIns="182880" anchor="t" wrap="square">
+            <a:normAutofit/>
+          </a:bodyPr>
+          <a:lstStyle/>
+          <a:p/>
+        </p:txBody>
+      </p:sp>
     </p:spTree>
   </p:cSld>
 </p:sld>
@@ -6211,100 +5718,213 @@
             </a:pPr>
             <a:r>
               <a:rPr/>
-              <a:t>2 Peer review serves the reader</a:t>
-            </a:r>
-          </a:p>
-        </p:txBody>
-      </p:sp>
-      <p:pic>
-        <p:nvPicPr>
-          <p:cNvPr descr="A cartoon showing how people can interpret the same statement differently, illustrating why reader confusion is useful revision evidence" id="0" name="Picture 1"/>
-          <p:cNvPicPr>
-            <a:picLocks noGrp="1" noChangeAspect="1"/>
-          </p:cNvPicPr>
+              <a:t>2 Respond to every worksheet item</a:t>
+            </a:r>
+          </a:p>
+        </p:txBody>
+      </p:sp>
+      <p:sp>
+        <p:nvSpPr>
+          <p:cNvPr id="1005" name="card-steel" descr="card: If it meets the requirement. • Check or circle the worksheet item • Give the page number where you found it"/>
+          <p:cNvSpPr/>
           <p:nvPr/>
-        </p:nvPicPr>
-        <p:blipFill>
-          <a:blip r:embed="rId3"/>
-          <a:stretch>
-            <a:fillRect/>
-          </a:stretch>
-        </p:blipFill>
-        <p:spPr bwMode="auto">
-          <a:xfrm>
-            <a:off x="1409700" y="2628900"/>
-            <a:ext cx="4267200" cy="3098800"/>
-          </a:xfrm>
-          <a:prstGeom prst="rect">
-            <a:avLst/>
+        </p:nvSpPr>
+        <p:spPr>
+          <a:xfrm>
+            <a:off x="1097280" y="2633472"/>
+            <a:ext cx="4924044" cy="2255520"/>
+          </a:xfrm>
+          <a:prstGeom prst="roundRect">
+            <a:avLst>
+              <a:gd name="adj" fmla="val 6000"/>
+            </a:avLst>
           </a:prstGeom>
-          <a:noFill/>
-          <a:ln w="9525">
+          <a:solidFill>
+            <a:srgbClr val="FEFDFA"/>
+          </a:solidFill>
+          <a:ln w="19050">
+            <a:solidFill>
+              <a:srgbClr val="CCCCCC"/>
+            </a:solidFill>
+          </a:ln>
+        </p:spPr>
+        <p:txBody>
+          <a:bodyPr lIns="182880" tIns="182880" rIns="182880" bIns="182880" anchor="t" wrap="square">
+            <a:normAutofit/>
+          </a:bodyPr>
+          <a:lstStyle/>
+          <a:p>
+            <a:pPr algn="l"/>
+            <a:r>
+              <a:rPr lang="en-US" sz="2200" b="1" dirty="0">
+                <a:solidFill>
+                  <a:srgbClr val="010B13"/>
+                </a:solidFill>
+              </a:rPr>
+              <a:t>If it meets the requirement</a:t>
+            </a:r>
+          </a:p>
+          <a:p>
+            <a:pPr algn="l"/>
+            <a:r>
+              <a:rPr lang="en-US" sz="2000" b="0" dirty="0">
+                <a:solidFill>
+                  <a:srgbClr val="010B13"/>
+                </a:solidFill>
+              </a:rPr>
+              <a:t>• Check or circle the worksheet item</a:t>
+            </a:r>
+          </a:p>
+          <a:p>
+            <a:pPr algn="l"/>
+            <a:r>
+              <a:rPr lang="en-US" sz="2000" b="0" dirty="0">
+                <a:solidFill>
+                  <a:srgbClr val="010B13"/>
+                </a:solidFill>
+              </a:rPr>
+              <a:t>• Give the page number where you found it</a:t>
+            </a:r>
+          </a:p>
+        </p:txBody>
+      </p:sp>
+      <p:sp>
+        <p:nvSpPr>
+          <p:cNvPr id="1006" name="card-rail" descr="">
+            <a:extLst>
+              <a:ext uri="{C183D7F6-B498-43B3-948B-1728B52AA6E4}">
+                <adec:decorative xmlns:adec="http://schemas.microsoft.com/office/drawing/2017/decorative" val="1"/>
+              </a:ext>
+            </a:extLst>
+          </p:cNvPr>
+          <p:cNvSpPr/>
+          <p:nvPr/>
+        </p:nvSpPr>
+        <p:spPr>
+          <a:xfrm>
+            <a:off x="1097280" y="2633472"/>
+            <a:ext cx="54864" cy="2255520"/>
+          </a:xfrm>
+          <a:prstGeom prst="roundRect">
+            <a:avLst>
+              <a:gd name="adj" fmla="val 20000"/>
+            </a:avLst>
+          </a:prstGeom>
+          <a:solidFill>
+            <a:srgbClr val="010B13"/>
+          </a:solidFill>
+          <a:ln>
             <a:noFill/>
-            <a:headEnd/>
-            <a:tailEnd/>
           </a:ln>
         </p:spPr>
-      </p:pic>
-      <p:sp>
-        <p:nvSpPr>
-          <p:cNvPr id="4" name="Content Placeholder 3"/>
-          <p:cNvSpPr>
-            <a:spLocks noGrp="1"/>
-          </p:cNvSpPr>
-          <p:nvPr>
-            <p:ph idx="2" sz="half"/>
-          </p:nvPr>
-        </p:nvSpPr>
-        <p:spPr/>
-        <p:txBody>
-          <a:bodyPr/>
-          <a:lstStyle/>
-          <a:p>
-            <a:pPr lvl="0" indent="0" marL="0">
-              <a:buNone/>
-            </a:pPr>
-            <a:r>
-              <a:rPr/>
-              <a:t>A useful review tells the author:</a:t>
-            </a:r>
-          </a:p>
-          <a:p>
-            <a:pPr lvl="0" indent="-457200" marL="457200">
-              <a:buAutoNum type="arabicPeriod"/>
-            </a:pPr>
-            <a:r>
-              <a:rPr/>
-              <a:t>what the draft communicates</a:t>
-            </a:r>
-          </a:p>
-          <a:p>
-            <a:pPr lvl="0" indent="-457200" marL="457200">
-              <a:buAutoNum type="arabicPeriod"/>
-            </a:pPr>
-            <a:r>
-              <a:rPr/>
-              <a:t>where the reader is unsure</a:t>
-            </a:r>
-          </a:p>
-          <a:p>
-            <a:pPr lvl="0" indent="-457200" marL="457200">
-              <a:buAutoNum type="arabicPeriod"/>
-            </a:pPr>
-            <a:r>
-              <a:rPr/>
-              <a:t>a revision to try</a:t>
-            </a:r>
-          </a:p>
-          <a:p>
-            <a:pPr lvl="0" indent="0" marL="0">
-              <a:buNone/>
-            </a:pPr>
-            <a:r>
-              <a:rPr/>
-              <a:t>Report the reading experience; do not grade the writer.</a:t>
-            </a:r>
-          </a:p>
+        <p:txBody>
+          <a:bodyPr lIns="182880" tIns="182880" rIns="182880" bIns="182880" anchor="t" wrap="square">
+            <a:normAutofit/>
+          </a:bodyPr>
+          <a:lstStyle/>
+          <a:p/>
+        </p:txBody>
+      </p:sp>
+      <p:sp>
+        <p:nvSpPr>
+          <p:cNvPr id="1007" name="card-steel" descr="card: If it needs revision. • Identify what needs attention • Add a comment or refer to one in the draft’s margin"/>
+          <p:cNvSpPr/>
+          <p:nvPr/>
+        </p:nvSpPr>
+        <p:spPr>
+          <a:xfrm>
+            <a:off x="6167628" y="2633472"/>
+            <a:ext cx="4924044" cy="1920240"/>
+          </a:xfrm>
+          <a:prstGeom prst="roundRect">
+            <a:avLst>
+              <a:gd name="adj" fmla="val 6000"/>
+            </a:avLst>
+          </a:prstGeom>
+          <a:solidFill>
+            <a:srgbClr val="FEFDFA"/>
+          </a:solidFill>
+          <a:ln w="19050">
+            <a:solidFill>
+              <a:srgbClr val="CCCCCC"/>
+            </a:solidFill>
+          </a:ln>
+        </p:spPr>
+        <p:txBody>
+          <a:bodyPr lIns="182880" tIns="182880" rIns="182880" bIns="182880" anchor="t" wrap="square">
+            <a:normAutofit/>
+          </a:bodyPr>
+          <a:lstStyle/>
+          <a:p>
+            <a:pPr algn="l"/>
+            <a:r>
+              <a:rPr lang="en-US" sz="2200" b="1" dirty="0">
+                <a:solidFill>
+                  <a:srgbClr val="010B13"/>
+                </a:solidFill>
+              </a:rPr>
+              <a:t>If it needs revision</a:t>
+            </a:r>
+          </a:p>
+          <a:p>
+            <a:pPr algn="l"/>
+            <a:r>
+              <a:rPr lang="en-US" sz="2000" b="0" dirty="0">
+                <a:solidFill>
+                  <a:srgbClr val="010B13"/>
+                </a:solidFill>
+              </a:rPr>
+              <a:t>• Identify what needs attention</a:t>
+            </a:r>
+          </a:p>
+          <a:p>
+            <a:pPr algn="l"/>
+            <a:r>
+              <a:rPr lang="en-US" sz="2000" b="0" dirty="0">
+                <a:solidFill>
+                  <a:srgbClr val="010B13"/>
+                </a:solidFill>
+              </a:rPr>
+              <a:t>• Add a comment or refer to one in the draft’s margin</a:t>
+            </a:r>
+          </a:p>
+        </p:txBody>
+      </p:sp>
+      <p:sp>
+        <p:nvSpPr>
+          <p:cNvPr id="1008" name="card-rail" descr="">
+            <a:extLst>
+              <a:ext uri="{C183D7F6-B498-43B3-948B-1728B52AA6E4}">
+                <adec:decorative xmlns:adec="http://schemas.microsoft.com/office/drawing/2017/decorative" val="1"/>
+              </a:ext>
+            </a:extLst>
+          </p:cNvPr>
+          <p:cNvSpPr/>
+          <p:nvPr/>
+        </p:nvSpPr>
+        <p:spPr>
+          <a:xfrm>
+            <a:off x="6167628" y="2633472"/>
+            <a:ext cx="54864" cy="1920240"/>
+          </a:xfrm>
+          <a:prstGeom prst="roundRect">
+            <a:avLst>
+              <a:gd name="adj" fmla="val 20000"/>
+            </a:avLst>
+          </a:prstGeom>
+          <a:solidFill>
+            <a:srgbClr val="010B13"/>
+          </a:solidFill>
+          <a:ln>
+            <a:noFill/>
+          </a:ln>
+        </p:spPr>
+        <p:txBody>
+          <a:bodyPr lIns="182880" tIns="182880" rIns="182880" bIns="182880" anchor="t" wrap="square">
+            <a:normAutofit/>
+          </a:bodyPr>
+          <a:lstStyle/>
+          <a:p/>
         </p:txBody>
       </p:sp>
     </p:spTree>
@@ -6354,94 +5974,169 @@
             </a:pPr>
             <a:r>
               <a:rPr/>
-              <a:t>3 Read once for the whole paper</a:t>
-            </a:r>
-          </a:p>
-        </p:txBody>
-      </p:sp>
-      <p:sp>
-        <p:nvSpPr>
-          <p:cNvPr id="3" name="Content Placeholder 2"/>
-          <p:cNvSpPr>
-            <a:spLocks noGrp="1"/>
-          </p:cNvSpPr>
-          <p:nvPr>
-            <p:ph idx="1" sz="half"/>
-          </p:nvPr>
-        </p:nvSpPr>
-        <p:spPr/>
-        <p:txBody>
-          <a:bodyPr/>
-          <a:lstStyle/>
-          <a:p>
-            <a:pPr lvl="0" indent="0" marL="0">
-              <a:buNone/>
-            </a:pPr>
-            <a:r>
-              <a:rPr/>
-              <a:t>On the first pass, ask:</a:t>
-            </a:r>
-          </a:p>
-          <a:p>
-            <a:pPr lvl="0"/>
-            <a:r>
-              <a:rPr/>
-              <a:t>What is the paper’s main question?</a:t>
-            </a:r>
-          </a:p>
-          <a:p>
-            <a:pPr lvl="0"/>
-            <a:r>
-              <a:rPr/>
-              <a:t>What story connects the sections?</a:t>
-            </a:r>
-          </a:p>
-          <a:p>
-            <a:pPr lvl="0"/>
-            <a:r>
-              <a:rPr/>
-              <a:t>Where is the organization clear?</a:t>
-            </a:r>
-          </a:p>
-          <a:p>
-            <a:pPr lvl="0"/>
-            <a:r>
-              <a:rPr/>
-              <a:t>Where do you lose the thread?</a:t>
-            </a:r>
-          </a:p>
-        </p:txBody>
-      </p:sp>
-      <p:pic>
-        <p:nvPicPr>
-          <p:cNvPr descr="A funnel narrowing from a broad opening to a focused point, illustrating the expected structure of a research introduction" id="0" name="Picture 1"/>
-          <p:cNvPicPr>
-            <a:picLocks noGrp="1" noChangeAspect="1"/>
-          </p:cNvPicPr>
+              <a:t>3 Give a comment the author can use</a:t>
+            </a:r>
+          </a:p>
+        </p:txBody>
+      </p:sp>
+      <p:sp>
+        <p:nvSpPr>
+          <p:cNvPr id="1009" name="prose" descr=""/>
+          <p:cNvSpPr/>
           <p:nvPr/>
-        </p:nvPicPr>
-        <p:blipFill>
-          <a:blip r:embed="rId3"/>
-          <a:stretch>
-            <a:fillRect/>
-          </a:stretch>
-        </p:blipFill>
-        <p:spPr bwMode="auto">
-          <a:xfrm>
-            <a:off x="7086600" y="2628900"/>
-            <a:ext cx="3098800" cy="3098800"/>
-          </a:xfrm>
-          <a:prstGeom prst="rect">
-            <a:avLst/>
+        </p:nvSpPr>
+        <p:spPr>
+          <a:xfrm>
+            <a:off x="1097280" y="2633472"/>
+            <a:ext cx="9994392" cy="208289"/>
+          </a:xfrm>
+          <a:prstGeom prst="roundRect">
+            <a:avLst>
+              <a:gd name="adj" fmla="val 6000"/>
+            </a:avLst>
           </a:prstGeom>
           <a:noFill/>
-          <a:ln w="9525">
+          <a:ln>
             <a:noFill/>
-            <a:headEnd/>
-            <a:tailEnd/>
           </a:ln>
         </p:spPr>
-      </p:pic>
+        <p:txBody>
+          <a:bodyPr lIns="182880" tIns="0" rIns="182880" bIns="0" anchor="t" wrap="square">
+            <a:normAutofit/>
+          </a:bodyPr>
+          <a:lstStyle/>
+          <a:p>
+            <a:pPr algn="l"/>
+            <a:r>
+              <a:rPr lang="en-US" sz="1366" b="0" dirty="0">
+                <a:solidFill>
+                  <a:srgbClr val="010B13"/>
+                </a:solidFill>
+              </a:rPr>
+              <a:t>Identify the location, explain the problem, suggest a revision</a:t>
+            </a:r>
+          </a:p>
+        </p:txBody>
+      </p:sp>
+      <p:sp>
+        <p:nvSpPr>
+          <p:cNvPr id="1010" name="card-steel" descr="card: “On page 3, I couldn’t tell how the second study supports your prediction. Add a sentence connecting its finding to the relationship you expect.”. "/>
+          <p:cNvSpPr/>
+          <p:nvPr/>
+        </p:nvSpPr>
+        <p:spPr>
+          <a:xfrm>
+            <a:off x="1097280" y="2988065"/>
+            <a:ext cx="3233928" cy="1969586"/>
+          </a:xfrm>
+          <a:prstGeom prst="roundRect">
+            <a:avLst>
+              <a:gd name="adj" fmla="val 6000"/>
+            </a:avLst>
+          </a:prstGeom>
+          <a:solidFill>
+            <a:srgbClr val="FEFDFA"/>
+          </a:solidFill>
+          <a:ln w="19050">
+            <a:solidFill>
+              <a:srgbClr val="CCCCCC"/>
+            </a:solidFill>
+          </a:ln>
+        </p:spPr>
+        <p:txBody>
+          <a:bodyPr lIns="182880" tIns="182880" rIns="182880" bIns="182880" anchor="t" wrap="square">
+            <a:normAutofit/>
+          </a:bodyPr>
+          <a:lstStyle/>
+          <a:p>
+            <a:pPr algn="l"/>
+            <a:r>
+              <a:rPr lang="en-US" sz="1503" b="1" dirty="0">
+                <a:solidFill>
+                  <a:srgbClr val="010B13"/>
+                </a:solidFill>
+              </a:rPr>
+              <a:t>“On page 3, I couldn’t tell how the second study supports your prediction. Add a sentence connecting its finding to the relationship you expect.”</a:t>
+            </a:r>
+          </a:p>
+        </p:txBody>
+      </p:sp>
+      <p:sp>
+        <p:nvSpPr>
+          <p:cNvPr id="1011" name="card-rail" descr="">
+            <a:extLst>
+              <a:ext uri="{C183D7F6-B498-43B3-948B-1728B52AA6E4}">
+                <adec:decorative xmlns:adec="http://schemas.microsoft.com/office/drawing/2017/decorative" val="1"/>
+              </a:ext>
+            </a:extLst>
+          </p:cNvPr>
+          <p:cNvSpPr/>
+          <p:nvPr/>
+        </p:nvSpPr>
+        <p:spPr>
+          <a:xfrm>
+            <a:off x="1097280" y="2988065"/>
+            <a:ext cx="54864" cy="1969586"/>
+          </a:xfrm>
+          <a:prstGeom prst="roundRect">
+            <a:avLst>
+              <a:gd name="adj" fmla="val 20000"/>
+            </a:avLst>
+          </a:prstGeom>
+          <a:solidFill>
+            <a:srgbClr val="010B13"/>
+          </a:solidFill>
+          <a:ln>
+            <a:noFill/>
+          </a:ln>
+        </p:spPr>
+        <p:txBody>
+          <a:bodyPr lIns="182880" tIns="182880" rIns="182880" bIns="182880" anchor="t" wrap="square">
+            <a:normAutofit/>
+          </a:bodyPr>
+          <a:lstStyle/>
+          <a:p/>
+        </p:txBody>
+      </p:sp>
+      <p:sp>
+        <p:nvSpPr>
+          <p:cNvPr id="1012" name="prose" descr=""/>
+          <p:cNvSpPr/>
+          <p:nvPr/>
+        </p:nvSpPr>
+        <p:spPr>
+          <a:xfrm>
+            <a:off x="1097280" y="5103955"/>
+            <a:ext cx="9994392" cy="208289"/>
+          </a:xfrm>
+          <a:prstGeom prst="roundRect">
+            <a:avLst>
+              <a:gd name="adj" fmla="val 6000"/>
+            </a:avLst>
+          </a:prstGeom>
+          <a:noFill/>
+          <a:ln>
+            <a:noFill/>
+          </a:ln>
+        </p:spPr>
+        <p:txBody>
+          <a:bodyPr lIns="182880" tIns="0" rIns="182880" bIns="0" anchor="t" wrap="square">
+            <a:normAutofit/>
+          </a:bodyPr>
+          <a:lstStyle/>
+          <a:p>
+            <a:pPr algn="l"/>
+            <a:r>
+              <a:rPr lang="en-US" sz="1366" b="0" dirty="0">
+                <a:solidFill>
+                  <a:srgbClr val="010B13"/>
+                </a:solidFill>
+              </a:rPr>
+              <a:t>Use enough detail for the author to find and address the problem</a:t>
+            </a:r>
+          </a:p>
+        </p:txBody>
+      </p:sp>
     </p:spTree>
   </p:cSld>
 </p:sld>
@@ -6489,7 +6184,7 @@
             </a:pPr>
             <a:r>
               <a:rPr/>
-              <a:t>4 Use one feedback formula</a:t>
+              <a:t>4 Check structure and appearance</a:t>
             </a:r>
           </a:p>
         </p:txBody>
@@ -6509,42 +6204,47 @@
           <a:bodyPr/>
           <a:lstStyle/>
           <a:p>
-            <a:pPr lvl="0" indent="-457200" marL="457200">
-              <a:buAutoNum type="arabicPeriod"/>
+            <a:pPr lvl="0" indent="0" marL="0">
+              <a:buNone/>
             </a:pPr>
             <a:r>
-              <a:rPr b="1"/>
-              <a:t>Describe:</a:t>
-            </a:r>
-            <a:r>
               <a:rPr/>
-              <a:t> What did you notice?</a:t>
-            </a:r>
-          </a:p>
-          <a:p>
-            <a:pPr lvl="0" indent="-457200" marL="457200">
-              <a:buAutoNum type="arabicPeriod"/>
-            </a:pPr>
-            <a:r>
-              <a:rPr b="1"/>
-              <a:t>Diagnose:</a:t>
-            </a:r>
+              <a:t>[Pass 1]</a:t>
+            </a:r>
+          </a:p>
+          <a:p>
+            <a:pPr lvl="0"/>
             <a:r>
               <a:rPr/>
-              <a:t> Why does it affect the reader?</a:t>
-            </a:r>
-          </a:p>
-          <a:p>
-            <a:pPr lvl="0" indent="-457200" marL="457200">
-              <a:buAutoNum type="arabicPeriod"/>
-            </a:pPr>
-            <a:r>
-              <a:rPr b="1"/>
-              <a:t>Suggest:</a:t>
-            </a:r>
+              <a:t>Font, size, and overall appearance</a:t>
+            </a:r>
+          </a:p>
+          <a:p>
+            <a:pPr lvl="0"/>
             <a:r>
               <a:rPr/>
-              <a:t> What realistic move comes next?</a:t>
+              <a:t>Title-page information and placement</a:t>
+            </a:r>
+          </a:p>
+          <a:p>
+            <a:pPr lvl="0"/>
+            <a:r>
+              <a:rPr/>
+              <a:t>Running head, page numbers, and headings</a:t>
+            </a:r>
+          </a:p>
+          <a:p>
+            <a:pPr lvl="0"/>
+            <a:r>
+              <a:rPr/>
+              <a:t>Logical order of sections</a:t>
+            </a:r>
+          </a:p>
+          <a:p>
+            <a:pPr lvl="0"/>
+            <a:r>
+              <a:rPr/>
+              <a:t>Citations and references that match in both directions</a:t>
             </a:r>
           </a:p>
         </p:txBody>
@@ -6596,7 +6296,7 @@
             </a:pPr>
             <a:r>
               <a:rPr/>
-              <a:t>5 Make comments specific</a:t>
+              <a:t>5 Connect the introduction to its sources</a:t>
             </a:r>
           </a:p>
         </p:txBody>
@@ -6608,7 +6308,7 @@
             <a:spLocks noGrp="1"/>
           </p:cNvSpPr>
           <p:nvPr>
-            <p:ph idx="1" sz="half"/>
+            <p:ph idx="1"/>
           </p:nvPr>
         </p:nvSpPr>
         <p:spPr/>
@@ -6620,51 +6320,8 @@
               <a:buNone/>
             </a:pPr>
             <a:r>
-              <a:rPr b="1"/>
-              <a:t>Weak</a:t>
-            </a:r>
-          </a:p>
-          <a:p>
-            <a:pPr lvl="0" indent="0" marL="0">
-              <a:buNone/>
-            </a:pPr>
-            <a:r>
               <a:rPr/>
-              <a:t>This section is confusing.</a:t>
-            </a:r>
-          </a:p>
-        </p:txBody>
-      </p:sp>
-      <p:sp>
-        <p:nvSpPr>
-          <p:cNvPr id="4" name="Content Placeholder 3"/>
-          <p:cNvSpPr>
-            <a:spLocks noGrp="1"/>
-          </p:cNvSpPr>
-          <p:nvPr>
-            <p:ph idx="2" sz="half"/>
-          </p:nvPr>
-        </p:nvSpPr>
-        <p:spPr/>
-        <p:txBody>
-          <a:bodyPr/>
-          <a:lstStyle/>
-          <a:p>
-            <a:pPr lvl="0" indent="0" marL="0">
-              <a:buNone/>
-            </a:pPr>
-            <a:r>
-              <a:rPr b="1"/>
-              <a:t>Useful</a:t>
-            </a:r>
-          </a:p>
-          <a:p>
-            <a:pPr lvl="0" indent="0" marL="0">
-              <a:buNone/>
-            </a:pPr>
-            <a:r>
-              <a:rPr/>
-              <a:t>This paragraph introduces a new construct without connecting it to the core variable. Add a transition and define that relationship.</a:t>
+              <a:t>[Pass 2 · Introduction]</a:t>
             </a:r>
           </a:p>
         </p:txBody>
@@ -6716,14 +6373,14 @@
             </a:pPr>
             <a:r>
               <a:rPr/>
-              <a:t>6 Review the introduction’s funnel</a:t>
+              <a:t>5 Connect the introduction to its sources (continued)</a:t>
             </a:r>
           </a:p>
         </p:txBody>
       </p:sp>
       <p:pic>
         <p:nvPicPr>
-          <p:cNvPr descr="A funnel narrowing from a broad opening to a focused point, illustrating the expected structure of a research introduction" id="0" name="Picture 1"/>
+          <p:cNvPr descr="An orange funnel narrows from a wide opening to a small outlet, illustrating an introduction moving toward a focused research question" id="0" name="Picture 1"/>
           <p:cNvPicPr>
             <a:picLocks noGrp="1" noChangeAspect="1"/>
           </p:cNvPicPr>
@@ -6766,57 +6423,31 @@
           <a:bodyPr/>
           <a:lstStyle/>
           <a:p>
-            <a:pPr lvl="0" indent="0" marL="0">
-              <a:buNone/>
-            </a:pPr>
+            <a:pPr lvl="0"/>
             <a:r>
               <a:rPr/>
-              <a:t>Does the introduction narrow from:</a:t>
-            </a:r>
-          </a:p>
-          <a:p>
-            <a:pPr lvl="0" indent="-457200" marL="457200">
-              <a:buAutoNum type="arabicPeriod"/>
-            </a:pPr>
+              <a:t>Is the purpose clear?</a:t>
+            </a:r>
+          </a:p>
+          <a:p>
+            <a:pPr lvl="0"/>
             <a:r>
               <a:rPr/>
-              <a:t>topic and construct</a:t>
-            </a:r>
-          </a:p>
-          <a:p>
-            <a:pPr lvl="0" indent="-457200" marL="457200">
-              <a:buAutoNum type="arabicPeriod"/>
-            </a:pPr>
+              <a:t>What does each cited study contribute?</a:t>
+            </a:r>
+          </a:p>
+          <a:p>
+            <a:pPr lvl="0"/>
             <a:r>
               <a:rPr/>
-              <a:t>prior evidence</a:t>
-            </a:r>
-          </a:p>
-          <a:p>
-            <a:pPr lvl="0" indent="-457200" marL="457200">
-              <a:buAutoNum type="arabicPeriod"/>
-            </a:pPr>
+              <a:t>Is there enough relevant detail?</a:t>
+            </a:r>
+          </a:p>
+          <a:p>
+            <a:pPr lvl="0"/>
             <a:r>
               <a:rPr/>
-              <a:t>unresolved gap</a:t>
-            </a:r>
-          </a:p>
-          <a:p>
-            <a:pPr lvl="0" indent="-457200" marL="457200">
-              <a:buAutoNum type="arabicPeriod"/>
-            </a:pPr>
-            <a:r>
-              <a:rPr/>
-              <a:t>current question</a:t>
-            </a:r>
-          </a:p>
-          <a:p>
-            <a:pPr lvl="0" indent="-457200" marL="457200">
-              <a:buAutoNum type="arabicPeriod"/>
-            </a:pPr>
-            <a:r>
-              <a:rPr/>
-              <a:t>directional hypotheses</a:t>
+              <a:t>Do the studies build a rationale for this project?</a:t>
             </a:r>
           </a:p>
         </p:txBody>
@@ -6868,49 +6499,19 @@
             </a:pPr>
             <a:r>
               <a:rPr/>
-              <a:t>7 Test every cited article</a:t>
-            </a:r>
-          </a:p>
-        </p:txBody>
-      </p:sp>
-      <p:pic>
-        <p:nvPicPr>
-          <p:cNvPr descr="An annotated research-article abstract illustrating how a reviewer checks what a cited study actually found and how it supports the draft" id="0" name="Picture 1"/>
-          <p:cNvPicPr>
-            <a:picLocks noGrp="1" noChangeAspect="1"/>
-          </p:cNvPicPr>
-          <p:nvPr/>
-        </p:nvPicPr>
-        <p:blipFill>
-          <a:blip r:embed="rId3"/>
-          <a:stretch>
-            <a:fillRect/>
-          </a:stretch>
-        </p:blipFill>
-        <p:spPr bwMode="auto">
-          <a:xfrm>
-            <a:off x="1244600" y="2628900"/>
-            <a:ext cx="4597400" cy="3098800"/>
-          </a:xfrm>
-          <a:prstGeom prst="rect">
-            <a:avLst/>
-          </a:prstGeom>
-          <a:noFill/>
-          <a:ln w="9525">
-            <a:noFill/>
-            <a:headEnd/>
-            <a:tailEnd/>
-          </a:ln>
-        </p:spPr>
-      </p:pic>
-      <p:sp>
-        <p:nvSpPr>
-          <p:cNvPr id="4" name="Content Placeholder 3"/>
-          <p:cNvSpPr>
-            <a:spLocks noGrp="1"/>
-          </p:cNvSpPr>
-          <p:nvPr>
-            <p:ph idx="2" sz="half"/>
+              <a:t>6 Check variables and predictions</a:t>
+            </a:r>
+          </a:p>
+        </p:txBody>
+      </p:sp>
+      <p:sp>
+        <p:nvSpPr>
+          <p:cNvPr id="3" name="Content Placeholder 2"/>
+          <p:cNvSpPr>
+            <a:spLocks noGrp="1"/>
+          </p:cNvSpPr>
+          <p:nvPr>
+            <p:ph idx="1"/>
           </p:nvPr>
         </p:nvSpPr>
         <p:spPr/>
@@ -6923,35 +6524,46 @@
             </a:pPr>
             <a:r>
               <a:rPr/>
-              <a:t>For each source, ask:</a:t>
+              <a:t>[Pass 2 · Research hypotheses]</a:t>
+            </a:r>
+          </a:p>
+          <a:p>
+            <a:pPr lvl="0" indent="0" marL="0">
+              <a:buNone/>
+            </a:pPr>
+            <a:r>
+              <a:rPr/>
+              <a:t>For each hypothesis, identify:</a:t>
             </a:r>
           </a:p>
           <a:p>
             <a:pPr lvl="0"/>
             <a:r>
               <a:rPr/>
-              <a:t>Why is it here?</a:t>
+              <a:t>The variables and target population</a:t>
             </a:r>
           </a:p>
           <a:p>
             <a:pPr lvl="0"/>
             <a:r>
               <a:rPr/>
-              <a:t>What claim does it support?</a:t>
+              <a:t>The relationship or comparison being predicted</a:t>
             </a:r>
           </a:p>
           <a:p>
             <a:pPr lvl="0"/>
             <a:r>
               <a:rPr/>
-              <a:t>Is its design described accurately?</a:t>
-            </a:r>
-          </a:p>
-          <a:p>
-            <a:pPr lvl="0"/>
-            <a:r>
-              <a:rPr/>
-              <a:t>Does the next sentence explain its relevance?</a:t>
+              <a:t>The expected direction or pattern</a:t>
+            </a:r>
+          </a:p>
+          <a:p>
+            <a:pPr lvl="0" indent="0" marL="0">
+              <a:buNone/>
+            </a:pPr>
+            <a:r>
+              <a:rPr b="1"/>
+              <a:t>Does the wording fit the planned analysis?</a:t>
             </a:r>
           </a:p>
         </p:txBody>
@@ -7003,7 +6615,7 @@
             </a:pPr>
             <a:r>
               <a:rPr/>
-              <a:t>8 Check each hypothesis</a:t>
+              <a:t>7 Check the Method and sample summary</a:t>
             </a:r>
           </a:p>
         </p:txBody>
@@ -7015,7 +6627,7 @@
             <a:spLocks noGrp="1"/>
           </p:cNvSpPr>
           <p:nvPr>
-            <p:ph idx="1" sz="half"/>
+            <p:ph idx="1"/>
           </p:nvPr>
         </p:nvSpPr>
         <p:spPr/>
@@ -7028,69 +6640,7 @@
             </a:pPr>
             <a:r>
               <a:rPr/>
-              <a:t>A reader should be able to identify:</a:t>
-            </a:r>
-          </a:p>
-          <a:p>
-            <a:pPr lvl="0"/>
-            <a:r>
-              <a:rPr/>
-              <a:t>the variables</a:t>
-            </a:r>
-          </a:p>
-          <a:p>
-            <a:pPr lvl="0"/>
-            <a:r>
-              <a:rPr/>
-              <a:t>groups or levels</a:t>
-            </a:r>
-          </a:p>
-          <a:p>
-            <a:pPr lvl="0"/>
-            <a:r>
-              <a:rPr/>
-              <a:t>the predicted direction</a:t>
-            </a:r>
-          </a:p>
-          <a:p>
-            <a:pPr lvl="0"/>
-            <a:r>
-              <a:rPr/>
-              <a:t>the connection to prior evidence</a:t>
-            </a:r>
-          </a:p>
-        </p:txBody>
-      </p:sp>
-      <p:sp>
-        <p:nvSpPr>
-          <p:cNvPr id="4" name="Content Placeholder 3"/>
-          <p:cNvSpPr>
-            <a:spLocks noGrp="1"/>
-          </p:cNvSpPr>
-          <p:nvPr>
-            <p:ph idx="2" sz="half"/>
-          </p:nvPr>
-        </p:nvSpPr>
-        <p:spPr/>
-        <p:txBody>
-          <a:bodyPr/>
-          <a:lstStyle/>
-          <a:p>
-            <a:pPr lvl="0" indent="0" marL="0">
-              <a:buNone/>
-            </a:pPr>
-            <a:r>
-              <a:rPr b="1"/>
-              <a:t>Read it aloud</a:t>
-            </a:r>
-          </a:p>
-          <a:p>
-            <a:pPr lvl="0" indent="0" marL="0">
-              <a:buNone/>
-            </a:pPr>
-            <a:r>
-              <a:rPr/>
-              <a:t>Could a classmate sketch the expected pattern from the sentence alone?</a:t>
+              <a:t>[Pass 2 · Method]</a:t>
             </a:r>
           </a:p>
         </p:txBody>
